--- a/Тема 4/ДВ_3_ИИ_Лекция_4.pptx
+++ b/Тема 4/ДВ_3_ИИ_Лекция_4.pptx
@@ -618,185 +618,6 @@
           <a:bodyPr/>
           <a:lstStyle/>
           <a:p>
-            <a:pPr algn="l"/>
-            <a:r>
-              <a:rPr lang="ru-RU" b="0" i="0" dirty="0">
-                <a:effectLst/>
-                <a:latin typeface="fkGroteskNeue"/>
-              </a:rPr>
-              <a:t>Шаг 3: Иерархическая кластеризация</a:t>
-            </a:r>
-          </a:p>
-          <a:p>
-            <a:pPr algn="l"/>
-            <a:r>
-              <a:rPr lang="ru-RU" b="0" i="0" dirty="0">
-                <a:effectLst/>
-                <a:latin typeface="fkGroteskNeue"/>
-              </a:rPr>
-              <a:t>Расстояние между генами = 1 - |корреляция|</a:t>
-            </a:r>
-          </a:p>
-          <a:p>
-            <a:pPr algn="l"/>
-            <a:r>
-              <a:rPr lang="ru-RU" b="0" i="0" dirty="0">
-                <a:effectLst/>
-                <a:latin typeface="fkGroteskNeue"/>
-              </a:rPr>
-              <a:t>Используем иерархическую кластеризацию:</a:t>
-            </a:r>
-          </a:p>
-          <a:p>
-            <a:pPr algn="l"/>
-            <a:r>
-              <a:rPr lang="ru-RU" b="0" i="0" dirty="0">
-                <a:effectLst/>
-                <a:latin typeface="fkGroteskNeue"/>
-              </a:rPr>
-              <a:t>На каждом уровне дерева близкие гены объединяются.</a:t>
-            </a:r>
-          </a:p>
-          <a:p>
-            <a:pPr algn="l"/>
-            <a:endParaRPr lang="en-US" b="0" i="0" dirty="0">
-              <a:effectLst/>
-              <a:latin typeface="fkGroteskNeue"/>
-            </a:endParaRPr>
-          </a:p>
-          <a:p>
-            <a:pPr algn="l"/>
-            <a:r>
-              <a:rPr lang="ru-RU" b="0" i="0" dirty="0">
-                <a:effectLst/>
-                <a:latin typeface="fkGroteskNeue"/>
-              </a:rPr>
-              <a:t>Шаг 4: Обнаружение модулей (Dynamic </a:t>
-            </a:r>
-            <a:r>
-              <a:rPr lang="ru-RU" b="0" i="0" dirty="0" err="1">
-                <a:effectLst/>
-                <a:latin typeface="fkGroteskNeue"/>
-              </a:rPr>
-              <a:t>Tree</a:t>
-            </a:r>
-            <a:r>
-              <a:rPr lang="ru-RU" b="0" i="0" dirty="0">
-                <a:effectLst/>
-                <a:latin typeface="fkGroteskNeue"/>
-              </a:rPr>
-              <a:t> </a:t>
-            </a:r>
-            <a:r>
-              <a:rPr lang="ru-RU" b="0" i="0" dirty="0" err="1">
-                <a:effectLst/>
-                <a:latin typeface="fkGroteskNeue"/>
-              </a:rPr>
-              <a:t>Cutting</a:t>
-            </a:r>
-            <a:r>
-              <a:rPr lang="ru-RU" b="0" i="0" dirty="0">
-                <a:effectLst/>
-                <a:latin typeface="fkGroteskNeue"/>
-              </a:rPr>
-              <a:t>)</a:t>
-            </a:r>
-          </a:p>
-          <a:p>
-            <a:pPr algn="l"/>
-            <a:r>
-              <a:rPr lang="ru-RU" b="0" i="0" dirty="0">
-                <a:effectLst/>
-                <a:latin typeface="fkGroteskNeue"/>
-              </a:rPr>
-              <a:t>Режем </a:t>
-            </a:r>
-            <a:r>
-              <a:rPr lang="ru-RU" b="0" i="0" dirty="0" err="1">
-                <a:effectLst/>
-                <a:latin typeface="fkGroteskNeue"/>
-              </a:rPr>
-              <a:t>дендрограмму</a:t>
-            </a:r>
-            <a:r>
-              <a:rPr lang="ru-RU" b="0" i="0" dirty="0">
-                <a:effectLst/>
-                <a:latin typeface="fkGroteskNeue"/>
-              </a:rPr>
-              <a:t> на высоте, соответствующей модулям.</a:t>
-            </a:r>
-          </a:p>
-          <a:p>
-            <a:pPr algn="l"/>
-            <a:r>
-              <a:rPr lang="ru-RU" b="0" i="0" dirty="0">
-                <a:effectLst/>
-                <a:latin typeface="fkGroteskNeue"/>
-              </a:rPr>
-              <a:t>Параметры:</a:t>
-            </a:r>
-          </a:p>
-          <a:p>
-            <a:pPr algn="l">
-              <a:buFont typeface="Arial" panose="020B0604020202020204" pitchFamily="34" charset="0"/>
-              <a:buChar char="•"/>
-            </a:pPr>
-            <a:r>
-              <a:rPr lang="ru-RU" b="0" i="0" dirty="0" err="1">
-                <a:effectLst/>
-                <a:latin typeface="fkGroteskNeue"/>
-              </a:rPr>
-              <a:t>minModuleSize</a:t>
-            </a:r>
-            <a:r>
-              <a:rPr lang="ru-RU" b="0" i="0" dirty="0">
-                <a:effectLst/>
-                <a:latin typeface="fkGroteskNeue"/>
-              </a:rPr>
-              <a:t>: минимальный размер модуля (обычно 30 гена)</a:t>
-            </a:r>
-          </a:p>
-          <a:p>
-            <a:pPr algn="l">
-              <a:buFont typeface="Arial" panose="020B0604020202020204" pitchFamily="34" charset="0"/>
-              <a:buChar char="•"/>
-            </a:pPr>
-            <a:r>
-              <a:rPr lang="ru-RU" b="0" i="0" dirty="0" err="1">
-                <a:effectLst/>
-                <a:latin typeface="fkGroteskNeue"/>
-              </a:rPr>
-              <a:t>deepSplit</a:t>
-            </a:r>
-            <a:r>
-              <a:rPr lang="ru-RU" b="0" i="0" dirty="0">
-                <a:effectLst/>
-                <a:latin typeface="fkGroteskNeue"/>
-              </a:rPr>
-              <a:t>: как агрессивно искать модули (0-4)</a:t>
-            </a:r>
-          </a:p>
-          <a:p>
-            <a:pPr algn="l"/>
-            <a:r>
-              <a:rPr lang="ru-RU" b="0" i="0" dirty="0">
-                <a:effectLst/>
-                <a:latin typeface="fkGroteskNeue"/>
-              </a:rPr>
-              <a:t>Результат: каждому гену присвоен модуль (Red, Blue, Green, Yellow и т.д.)</a:t>
-            </a:r>
-          </a:p>
-          <a:p>
-            <a:pPr algn="l"/>
-            <a:r>
-              <a:rPr lang="ru-RU" b="0" i="0" dirty="0">
-                <a:effectLst/>
-                <a:latin typeface="fkGroteskNeue"/>
-              </a:rPr>
-              <a:t>Обычно 5-30 модулей (зависит от данных и параметров)</a:t>
-            </a:r>
-          </a:p>
-          <a:p>
             <a:endParaRPr lang="ru-RU" sz="1200" b="0" i="0" kern="1200" dirty="0">
               <a:solidFill>
                 <a:schemeClr val="tx1"/>
@@ -890,354 +711,6 @@
           <a:lstStyle/>
           <a:p>
             <a:pPr algn="l"/>
-            <a:r>
-              <a:rPr lang="ru-RU" b="0" i="0" dirty="0">
-                <a:effectLst/>
-                <a:latin typeface="fkGroteskNeue"/>
-              </a:rPr>
-              <a:t>Шаг 5: Модульные собственные векторы (</a:t>
-            </a:r>
-            <a:r>
-              <a:rPr lang="ru-RU" b="0" i="0" dirty="0" err="1">
-                <a:effectLst/>
-                <a:latin typeface="fkGroteskNeue"/>
-              </a:rPr>
-              <a:t>Module</a:t>
-            </a:r>
-            <a:r>
-              <a:rPr lang="ru-RU" b="0" i="0" dirty="0">
-                <a:effectLst/>
-                <a:latin typeface="fkGroteskNeue"/>
-              </a:rPr>
-              <a:t> </a:t>
-            </a:r>
-            <a:r>
-              <a:rPr lang="ru-RU" b="0" i="0" dirty="0" err="1">
-                <a:effectLst/>
-                <a:latin typeface="fkGroteskNeue"/>
-              </a:rPr>
-              <a:t>Eigengenes</a:t>
-            </a:r>
-            <a:r>
-              <a:rPr lang="ru-RU" b="0" i="0" dirty="0">
-                <a:effectLst/>
-                <a:latin typeface="fkGroteskNeue"/>
-              </a:rPr>
-              <a:t>, ME)</a:t>
-            </a:r>
-          </a:p>
-          <a:p>
-            <a:pPr algn="l"/>
-            <a:r>
-              <a:rPr lang="ru-RU" b="0" i="0" dirty="0">
-                <a:effectLst/>
-                <a:latin typeface="fkGroteskNeue"/>
-              </a:rPr>
-              <a:t>Для каждого модуля имеется 30-500 генов.</a:t>
-            </a:r>
-          </a:p>
-          <a:p>
-            <a:pPr algn="l"/>
-            <a:r>
-              <a:rPr lang="ru-RU" b="0" i="0" dirty="0">
-                <a:effectLst/>
-                <a:latin typeface="fkGroteskNeue"/>
-              </a:rPr>
-              <a:t>Нужна одна "сводная" экспрессия модуля (одно число на пациента).</a:t>
-            </a:r>
-          </a:p>
-          <a:p>
-            <a:pPr algn="l"/>
-            <a:r>
-              <a:rPr lang="ru-RU" b="0" i="0" dirty="0">
-                <a:effectLst/>
-                <a:latin typeface="fkGroteskNeue"/>
-              </a:rPr>
-              <a:t>Решение: первый главный компонент (PCA)!</a:t>
-            </a:r>
-          </a:p>
-          <a:p>
-            <a:pPr algn="l"/>
-            <a:r>
-              <a:rPr lang="ru-RU" b="0" i="0" dirty="0">
-                <a:effectLst/>
-                <a:latin typeface="fkGroteskNeue"/>
-              </a:rPr>
-              <a:t>Геометрическая интерпретация: "основное направление" вариабельности модуля.</a:t>
-            </a:r>
-          </a:p>
-          <a:p>
-            <a:pPr algn="l"/>
-            <a:r>
-              <a:rPr lang="ru-RU" b="0" i="0" dirty="0">
-                <a:effectLst/>
-                <a:latin typeface="fkGroteskNeue"/>
-              </a:rPr>
-              <a:t>Результат: для каждого пациента и каждого модуля → одно число (ME)</a:t>
-            </a:r>
-          </a:p>
-          <a:p>
-            <a:pPr algn="l"/>
-            <a:r>
-              <a:rPr lang="ru-RU" b="0" i="0" dirty="0">
-                <a:effectLst/>
-                <a:latin typeface="fkGroteskNeue"/>
-              </a:rPr>
-              <a:t>Если </a:t>
-            </a:r>
-            <a:r>
-              <a:rPr lang="ru-RU" b="0" i="0" dirty="0" err="1">
-                <a:effectLst/>
-                <a:latin typeface="fkGroteskNeue"/>
-              </a:rPr>
-              <a:t>ME_red</a:t>
-            </a:r>
-            <a:r>
-              <a:rPr lang="ru-RU" b="0" i="0" dirty="0">
-                <a:effectLst/>
-                <a:latin typeface="fkGroteskNeue"/>
-              </a:rPr>
-              <a:t> = 5 → пациент имеет высокую экспрессию </a:t>
-            </a:r>
-            <a:r>
-              <a:rPr lang="ru-RU" b="0" i="0" dirty="0" err="1">
-                <a:effectLst/>
-                <a:latin typeface="fkGroteskNeue"/>
-              </a:rPr>
-              <a:t>red</a:t>
-            </a:r>
-            <a:r>
-              <a:rPr lang="ru-RU" b="0" i="0" dirty="0">
-                <a:effectLst/>
-                <a:latin typeface="fkGroteskNeue"/>
-              </a:rPr>
-              <a:t> модуля</a:t>
-            </a:r>
-            <a:br>
-              <a:rPr lang="ru-RU" b="0" i="0" dirty="0">
-                <a:effectLst/>
-                <a:latin typeface="fkGroteskNeue"/>
-              </a:rPr>
-            </a:br>
-            <a:r>
-              <a:rPr lang="ru-RU" b="0" i="0" dirty="0">
-                <a:effectLst/>
-                <a:latin typeface="fkGroteskNeue"/>
-              </a:rPr>
-              <a:t>Если </a:t>
-            </a:r>
-            <a:r>
-              <a:rPr lang="ru-RU" b="0" i="0" dirty="0" err="1">
-                <a:effectLst/>
-                <a:latin typeface="fkGroteskNeue"/>
-              </a:rPr>
-              <a:t>ME_red</a:t>
-            </a:r>
-            <a:r>
-              <a:rPr lang="ru-RU" b="0" i="0" dirty="0">
-                <a:effectLst/>
-                <a:latin typeface="fkGroteskNeue"/>
-              </a:rPr>
-              <a:t> = -3 → пациент имеет низкую экспрессию </a:t>
-            </a:r>
-            <a:r>
-              <a:rPr lang="ru-RU" b="0" i="0" dirty="0" err="1">
-                <a:effectLst/>
-                <a:latin typeface="fkGroteskNeue"/>
-              </a:rPr>
-              <a:t>red</a:t>
-            </a:r>
-            <a:r>
-              <a:rPr lang="ru-RU" b="0" i="0" dirty="0">
-                <a:effectLst/>
-                <a:latin typeface="fkGroteskNeue"/>
-              </a:rPr>
-              <a:t> модуля</a:t>
-            </a:r>
-          </a:p>
-          <a:p>
-            <a:pPr algn="l"/>
-            <a:r>
-              <a:rPr lang="ru-RU" b="0" i="0" dirty="0">
-                <a:effectLst/>
-                <a:latin typeface="fkGroteskNeue"/>
-              </a:rPr>
-              <a:t>Шаг 6: Связь модулей с фенотипом</a:t>
-            </a:r>
-          </a:p>
-          <a:p>
-            <a:pPr algn="l"/>
-            <a:r>
-              <a:rPr lang="ru-RU" b="0" i="0" dirty="0">
-                <a:effectLst/>
-                <a:latin typeface="fkGroteskNeue"/>
-              </a:rPr>
-              <a:t>Главный вопрос: какие модули связаны с заболеванием?</a:t>
-            </a:r>
-          </a:p>
-          <a:p>
-            <a:pPr algn="l"/>
-            <a:r>
-              <a:rPr lang="ru-RU" b="0" i="0" dirty="0">
-                <a:effectLst/>
-                <a:latin typeface="fkGroteskNeue"/>
-              </a:rPr>
-              <a:t>Считаем корреляцию каждого ME с интересующим фенотипом:</a:t>
-            </a:r>
-          </a:p>
-          <a:p>
-            <a:pPr algn="l"/>
-            <a:r>
-              <a:rPr lang="ru-RU" b="0" i="0" dirty="0">
-                <a:effectLst/>
-                <a:latin typeface="fkGroteskNeue"/>
-              </a:rPr>
-              <a:t>Результат:</a:t>
-            </a:r>
-          </a:p>
-          <a:p>
-            <a:pPr algn="l">
-              <a:buFont typeface="Arial" panose="020B0604020202020204" pitchFamily="34" charset="0"/>
-              <a:buChar char="•"/>
-            </a:pPr>
-            <a:r>
-              <a:rPr lang="ru-RU" b="0" i="0" dirty="0">
-                <a:effectLst/>
-                <a:latin typeface="fkGroteskNeue"/>
-              </a:rPr>
-              <a:t>Red модуль высоко коррелирован → пациенты с </a:t>
-            </a:r>
-            <a:r>
-              <a:rPr lang="ru-RU" b="0" i="0" dirty="0" err="1">
-                <a:effectLst/>
-                <a:latin typeface="fkGroteskNeue"/>
-              </a:rPr>
-              <a:t>high</a:t>
-            </a:r>
-            <a:r>
-              <a:rPr lang="ru-RU" b="0" i="0" dirty="0">
-                <a:effectLst/>
-                <a:latin typeface="fkGroteskNeue"/>
-              </a:rPr>
-              <a:t> </a:t>
-            </a:r>
-            <a:r>
-              <a:rPr lang="ru-RU" b="0" i="0" dirty="0" err="1">
-                <a:effectLst/>
-                <a:latin typeface="fkGroteskNeue"/>
-              </a:rPr>
-              <a:t>ME_red</a:t>
-            </a:r>
-            <a:r>
-              <a:rPr lang="ru-RU" b="0" i="0" dirty="0">
-                <a:effectLst/>
-                <a:latin typeface="fkGroteskNeue"/>
-              </a:rPr>
-              <a:t> живут дольше</a:t>
-            </a:r>
-          </a:p>
-          <a:p>
-            <a:pPr algn="l">
-              <a:buFont typeface="Arial" panose="020B0604020202020204" pitchFamily="34" charset="0"/>
-              <a:buChar char="•"/>
-            </a:pPr>
-            <a:r>
-              <a:rPr lang="ru-RU" b="0" i="0" dirty="0">
-                <a:effectLst/>
-                <a:latin typeface="fkGroteskNeue"/>
-              </a:rPr>
-              <a:t>Blue модуль не коррелирован → не связан с выживанием</a:t>
-            </a:r>
-          </a:p>
-          <a:p>
-            <a:pPr algn="l">
-              <a:buFont typeface="Arial" panose="020B0604020202020204" pitchFamily="34" charset="0"/>
-              <a:buChar char="•"/>
-            </a:pPr>
-            <a:r>
-              <a:rPr lang="ru-RU" b="0" i="0" dirty="0">
-                <a:effectLst/>
-                <a:latin typeface="fkGroteskNeue"/>
-              </a:rPr>
-              <a:t>Green модуль положительно коррелирован → пациенты с </a:t>
-            </a:r>
-            <a:r>
-              <a:rPr lang="ru-RU" b="0" i="0" dirty="0" err="1">
-                <a:effectLst/>
-                <a:latin typeface="fkGroteskNeue"/>
-              </a:rPr>
-              <a:t>high</a:t>
-            </a:r>
-            <a:r>
-              <a:rPr lang="ru-RU" b="0" i="0" dirty="0">
-                <a:effectLst/>
-                <a:latin typeface="fkGroteskNeue"/>
-              </a:rPr>
-              <a:t> </a:t>
-            </a:r>
-            <a:r>
-              <a:rPr lang="ru-RU" b="0" i="0" dirty="0" err="1">
-                <a:effectLst/>
-                <a:latin typeface="fkGroteskNeue"/>
-              </a:rPr>
-              <a:t>ME_green</a:t>
-            </a:r>
-            <a:r>
-              <a:rPr lang="ru-RU" b="0" i="0" dirty="0">
-                <a:effectLst/>
-                <a:latin typeface="fkGroteskNeue"/>
-              </a:rPr>
-              <a:t> живут дольше</a:t>
-            </a:r>
-          </a:p>
-          <a:p>
-            <a:pPr algn="l"/>
-            <a:r>
-              <a:rPr lang="ru-RU" b="0" i="0" dirty="0">
-                <a:effectLst/>
-                <a:latin typeface="fkGroteskNeue"/>
-              </a:rPr>
-              <a:t>Интерпретация:</a:t>
-            </a:r>
-          </a:p>
-          <a:p>
-            <a:pPr algn="l"/>
-            <a:r>
-              <a:rPr lang="ru-RU" b="0" i="0" dirty="0">
-                <a:effectLst/>
-                <a:latin typeface="fkGroteskNeue"/>
-              </a:rPr>
-              <a:t>Red модуль может быть "иммунный" → хороший иммунитет → лучший прогноз</a:t>
-            </a:r>
-          </a:p>
-          <a:p>
-            <a:pPr algn="l"/>
-            <a:r>
-              <a:rPr lang="ru-RU" b="0" i="0" dirty="0">
-                <a:effectLst/>
-                <a:latin typeface="fkGroteskNeue"/>
-              </a:rPr>
-              <a:t>Green модуль может быть "апоптоз" → активирована гибель раковых клеток → лучший прогноз</a:t>
-            </a:r>
-          </a:p>
-          <a:p>
-            <a:pPr algn="l"/>
-            <a:r>
-              <a:rPr lang="ru-RU" b="0" i="0" dirty="0">
-                <a:effectLst/>
-                <a:latin typeface="fkGroteskNeue"/>
-              </a:rPr>
-              <a:t>Blue модуль может быть "метаболизм" → не коррелирует с выживанием напрямую</a:t>
-            </a:r>
-          </a:p>
-          <a:p>
-            <a:br>
-              <a:rPr lang="ru-RU" dirty="0"/>
-            </a:br>
-            <a:r>
-              <a:rPr lang="ru-RU" dirty="0"/>
-              <a:t>ПАУЗА</a:t>
-            </a:r>
             <a:endParaRPr lang="ru-RU" sz="1200" b="0" i="0" kern="1200" dirty="0">
               <a:solidFill>
                 <a:schemeClr val="tx1"/>
@@ -1330,283 +803,6 @@
           <a:bodyPr/>
           <a:lstStyle/>
           <a:p>
-            <a:pPr algn="l"/>
-            <a:r>
-              <a:rPr lang="ru-RU" b="0" i="0" dirty="0" err="1">
-                <a:effectLst/>
-                <a:latin typeface="fkGroteskNeue"/>
-              </a:rPr>
-              <a:t>Hub</a:t>
-            </a:r>
-            <a:r>
-              <a:rPr lang="ru-RU" b="0" i="0" dirty="0">
-                <a:effectLst/>
-                <a:latin typeface="fkGroteskNeue"/>
-              </a:rPr>
-              <a:t> гены — звёзды сети</a:t>
-            </a:r>
-          </a:p>
-          <a:p>
-            <a:pPr algn="l"/>
-            <a:r>
-              <a:rPr lang="ru-RU" b="0" i="0" dirty="0">
-                <a:effectLst/>
-                <a:latin typeface="fkGroteskNeue"/>
-              </a:rPr>
-              <a:t>Определение: гены с наибольшей связностью внутри своего модуля.</a:t>
-            </a:r>
-          </a:p>
-          <a:p>
-            <a:pPr algn="l"/>
-            <a:r>
-              <a:rPr lang="ru-RU" b="0" i="0" dirty="0">
-                <a:effectLst/>
-                <a:latin typeface="fkGroteskNeue"/>
-              </a:rPr>
-              <a:t>Почему важны?</a:t>
-            </a:r>
-          </a:p>
-          <a:p>
-            <a:pPr algn="l">
-              <a:buFont typeface="Arial" panose="020B0604020202020204" pitchFamily="34" charset="0"/>
-              <a:buChar char="•"/>
-            </a:pPr>
-            <a:r>
-              <a:rPr lang="ru-RU" b="0" i="0" dirty="0">
-                <a:effectLst/>
-                <a:latin typeface="fkGroteskNeue"/>
-              </a:rPr>
-              <a:t>Часто это транскрипционные факторы (</a:t>
-            </a:r>
-            <a:r>
-              <a:rPr lang="ru-RU" b="0" i="0" dirty="0" err="1">
-                <a:effectLst/>
-                <a:latin typeface="fkGroteskNeue"/>
-              </a:rPr>
-              <a:t>TFs</a:t>
-            </a:r>
-            <a:r>
-              <a:rPr lang="ru-RU" b="0" i="0" dirty="0">
-                <a:effectLst/>
-                <a:latin typeface="fkGroteskNeue"/>
-              </a:rPr>
-              <a:t>)</a:t>
-            </a:r>
-          </a:p>
-          <a:p>
-            <a:pPr algn="l">
-              <a:buFont typeface="Arial" panose="020B0604020202020204" pitchFamily="34" charset="0"/>
-              <a:buChar char="•"/>
-            </a:pPr>
-            <a:r>
-              <a:rPr lang="ru-RU" b="0" i="0" dirty="0">
-                <a:effectLst/>
-                <a:latin typeface="fkGroteskNeue"/>
-              </a:rPr>
-              <a:t>Регулируют много других генов</a:t>
-            </a:r>
-          </a:p>
-          <a:p>
-            <a:pPr algn="l">
-              <a:buFont typeface="Arial" panose="020B0604020202020204" pitchFamily="34" charset="0"/>
-              <a:buChar char="•"/>
-            </a:pPr>
-            <a:r>
-              <a:rPr lang="ru-RU" b="0" i="0" dirty="0">
-                <a:effectLst/>
-                <a:latin typeface="fkGroteskNeue"/>
-              </a:rPr>
-              <a:t>Ключевые "хабы", через которые идёт регуляция</a:t>
-            </a:r>
-          </a:p>
-          <a:p>
-            <a:pPr algn="l"/>
-            <a:r>
-              <a:rPr lang="ru-RU" b="0" i="0" dirty="0">
-                <a:effectLst/>
-                <a:latin typeface="fkGroteskNeue"/>
-              </a:rPr>
-              <a:t>Как найти </a:t>
-            </a:r>
-            <a:r>
-              <a:rPr lang="ru-RU" b="0" i="0" dirty="0" err="1">
-                <a:effectLst/>
-                <a:latin typeface="fkGroteskNeue"/>
-              </a:rPr>
-              <a:t>hub</a:t>
-            </a:r>
-            <a:r>
-              <a:rPr lang="ru-RU" b="0" i="0" dirty="0">
-                <a:effectLst/>
-                <a:latin typeface="fkGroteskNeue"/>
-              </a:rPr>
-              <a:t> гены?</a:t>
-            </a:r>
-          </a:p>
-          <a:p>
-            <a:pPr algn="l"/>
-            <a:r>
-              <a:rPr lang="ru-RU" b="0" i="0" dirty="0">
-                <a:effectLst/>
-                <a:latin typeface="fkGroteskNeue"/>
-              </a:rPr>
-              <a:t>Метрика 1: </a:t>
-            </a:r>
-            <a:r>
-              <a:rPr lang="ru-RU" b="0" i="0" dirty="0" err="1">
-                <a:effectLst/>
-                <a:latin typeface="fkGroteskNeue"/>
-              </a:rPr>
-              <a:t>Intramodular</a:t>
-            </a:r>
-            <a:r>
-              <a:rPr lang="ru-RU" b="0" i="0" dirty="0">
-                <a:effectLst/>
-                <a:latin typeface="fkGroteskNeue"/>
-              </a:rPr>
-              <a:t> </a:t>
-            </a:r>
-            <a:r>
-              <a:rPr lang="ru-RU" b="0" i="0" dirty="0" err="1">
-                <a:effectLst/>
-                <a:latin typeface="fkGroteskNeue"/>
-              </a:rPr>
-              <a:t>connectivity</a:t>
-            </a:r>
-            <a:r>
-              <a:rPr lang="ru-RU" b="0" i="0" dirty="0">
-                <a:effectLst/>
-                <a:latin typeface="fkGroteskNeue"/>
-              </a:rPr>
-              <a:t> (</a:t>
-            </a:r>
-            <a:r>
-              <a:rPr lang="ru-RU" b="0" i="0" dirty="0" err="1">
-                <a:effectLst/>
-                <a:latin typeface="fkGroteskNeue"/>
-              </a:rPr>
-              <a:t>kME</a:t>
-            </a:r>
-            <a:r>
-              <a:rPr lang="ru-RU" b="0" i="0" dirty="0">
-                <a:effectLst/>
-                <a:latin typeface="fkGroteskNeue"/>
-              </a:rPr>
-              <a:t>)</a:t>
-            </a:r>
-          </a:p>
-          <a:p>
-            <a:pPr algn="l"/>
-            <a:r>
-              <a:rPr lang="ru-RU" b="0" i="0" dirty="0">
-                <a:effectLst/>
-                <a:latin typeface="fkGroteskNeue"/>
-              </a:rPr>
-              <a:t>Корреляция гена с модульным собственным вектором ME.</a:t>
-            </a:r>
-          </a:p>
-          <a:p>
-            <a:pPr algn="l"/>
-            <a:r>
-              <a:rPr lang="ru-RU" b="0" i="0" dirty="0">
-                <a:effectLst/>
-                <a:latin typeface="fkGroteskNeue"/>
-              </a:rPr>
-              <a:t>Интерпретация:</a:t>
-            </a:r>
-          </a:p>
-          <a:p>
-            <a:pPr algn="l">
-              <a:buFont typeface="Arial" panose="020B0604020202020204" pitchFamily="34" charset="0"/>
-              <a:buChar char="•"/>
-            </a:pPr>
-            <a:r>
-              <a:rPr lang="ru-RU" b="0" i="0" dirty="0" err="1">
-                <a:effectLst/>
-                <a:latin typeface="fkGroteskNeue"/>
-              </a:rPr>
-              <a:t>kME</a:t>
-            </a:r>
-            <a:r>
-              <a:rPr lang="ru-RU" b="0" i="0" dirty="0">
-                <a:effectLst/>
-                <a:latin typeface="fkGroteskNeue"/>
-              </a:rPr>
-              <a:t> = 0.9 → этот ген "идеально репрезентирует" модуль</a:t>
-            </a:r>
-          </a:p>
-          <a:p>
-            <a:pPr algn="l">
-              <a:buFont typeface="Arial" panose="020B0604020202020204" pitchFamily="34" charset="0"/>
-              <a:buChar char="•"/>
-            </a:pPr>
-            <a:r>
-              <a:rPr lang="ru-RU" b="0" i="0" dirty="0" err="1">
-                <a:effectLst/>
-                <a:latin typeface="fkGroteskNeue"/>
-              </a:rPr>
-              <a:t>kME</a:t>
-            </a:r>
-            <a:r>
-              <a:rPr lang="ru-RU" b="0" i="0" dirty="0">
-                <a:effectLst/>
-                <a:latin typeface="fkGroteskNeue"/>
-              </a:rPr>
-              <a:t> = 0.5 → этот ген "частично в модуле"</a:t>
-            </a:r>
-          </a:p>
-          <a:p>
-            <a:pPr algn="l">
-              <a:buFont typeface="Arial" panose="020B0604020202020204" pitchFamily="34" charset="0"/>
-              <a:buChar char="•"/>
-            </a:pPr>
-            <a:r>
-              <a:rPr lang="ru-RU" b="0" i="0" dirty="0" err="1">
-                <a:effectLst/>
-                <a:latin typeface="fkGroteskNeue"/>
-              </a:rPr>
-              <a:t>kME</a:t>
-            </a:r>
-            <a:r>
-              <a:rPr lang="ru-RU" b="0" i="0" dirty="0">
-                <a:effectLst/>
-                <a:latin typeface="fkGroteskNeue"/>
-              </a:rPr>
-              <a:t> = 0.1 → этот ген "слегка связан с модулем"</a:t>
-            </a:r>
-          </a:p>
-          <a:p>
-            <a:pPr algn="l"/>
-            <a:r>
-              <a:rPr lang="ru-RU" b="0" i="0" dirty="0" err="1">
-                <a:effectLst/>
-                <a:latin typeface="fkGroteskNeue"/>
-              </a:rPr>
-              <a:t>Hub</a:t>
-            </a:r>
-            <a:r>
-              <a:rPr lang="ru-RU" b="0" i="0" dirty="0">
-                <a:effectLst/>
-                <a:latin typeface="fkGroteskNeue"/>
-              </a:rPr>
-              <a:t> гены имеют высокую </a:t>
-            </a:r>
-            <a:r>
-              <a:rPr lang="ru-RU" b="0" i="0" dirty="0" err="1">
-                <a:effectLst/>
-                <a:latin typeface="fkGroteskNeue"/>
-              </a:rPr>
-              <a:t>kME</a:t>
-            </a:r>
-            <a:r>
-              <a:rPr lang="ru-RU" b="0" i="0" dirty="0">
-                <a:effectLst/>
-                <a:latin typeface="fkGroteskNeue"/>
-              </a:rPr>
-              <a:t> в своём модуле.</a:t>
-            </a:r>
-          </a:p>
-          <a:p>
             <a:endParaRPr lang="ru-RU" sz="1200" b="0" i="0" kern="1200" dirty="0">
               <a:solidFill>
                 <a:schemeClr val="tx1"/>
@@ -1699,344 +895,6 @@
           <a:bodyPr/>
           <a:lstStyle/>
           <a:p>
-            <a:pPr algn="l"/>
-            <a:r>
-              <a:rPr lang="ru-RU" b="0" i="0" dirty="0">
-                <a:effectLst/>
-                <a:latin typeface="fkGroteskNeue"/>
-              </a:rPr>
-              <a:t>Визуализация сетей</a:t>
-            </a:r>
-          </a:p>
-          <a:p>
-            <a:pPr algn="l"/>
-            <a:r>
-              <a:rPr lang="ru-RU" b="0" i="0" dirty="0">
-                <a:effectLst/>
-                <a:latin typeface="fkGroteskNeue"/>
-              </a:rPr>
-              <a:t>Проблема: 16,000 генов, как изобразить?</a:t>
-            </a:r>
-          </a:p>
-          <a:p>
-            <a:pPr algn="l"/>
-            <a:r>
-              <a:rPr lang="ru-RU" b="0" i="0" dirty="0">
-                <a:effectLst/>
-                <a:latin typeface="fkGroteskNeue"/>
-              </a:rPr>
-              <a:t>Метод 1: TOM </a:t>
-            </a:r>
-            <a:r>
-              <a:rPr lang="ru-RU" b="0" i="0" dirty="0" err="1">
-                <a:effectLst/>
-                <a:latin typeface="fkGroteskNeue"/>
-              </a:rPr>
-              <a:t>Plot</a:t>
-            </a:r>
-            <a:r>
-              <a:rPr lang="ru-RU" b="0" i="0" dirty="0">
-                <a:effectLst/>
-                <a:latin typeface="fkGroteskNeue"/>
-              </a:rPr>
-              <a:t> (</a:t>
-            </a:r>
-            <a:r>
-              <a:rPr lang="ru-RU" b="0" i="0" dirty="0" err="1">
-                <a:effectLst/>
-                <a:latin typeface="fkGroteskNeue"/>
-              </a:rPr>
-              <a:t>Topological</a:t>
-            </a:r>
-            <a:r>
-              <a:rPr lang="ru-RU" b="0" i="0" dirty="0">
-                <a:effectLst/>
-                <a:latin typeface="fkGroteskNeue"/>
-              </a:rPr>
-              <a:t> </a:t>
-            </a:r>
-            <a:r>
-              <a:rPr lang="ru-RU" b="0" i="0" dirty="0" err="1">
-                <a:effectLst/>
-                <a:latin typeface="fkGroteskNeue"/>
-              </a:rPr>
-              <a:t>Overlap</a:t>
-            </a:r>
-            <a:r>
-              <a:rPr lang="ru-RU" b="0" i="0" dirty="0">
-                <a:effectLst/>
-                <a:latin typeface="fkGroteskNeue"/>
-              </a:rPr>
-              <a:t> Matrix)</a:t>
-            </a:r>
-          </a:p>
-          <a:p>
-            <a:pPr algn="l"/>
-            <a:r>
-              <a:rPr lang="ru-RU" b="0" i="0" dirty="0" err="1">
-                <a:effectLst/>
-                <a:latin typeface="fkGroteskNeue"/>
-              </a:rPr>
-              <a:t>Теплокарта</a:t>
-            </a:r>
-            <a:r>
-              <a:rPr lang="ru-RU" b="0" i="0" dirty="0">
-                <a:effectLst/>
-                <a:latin typeface="fkGroteskNeue"/>
-              </a:rPr>
-              <a:t>, показывающая связность пар генов.</a:t>
-            </a:r>
-          </a:p>
-          <a:p>
-            <a:pPr algn="l"/>
-            <a:r>
-              <a:rPr lang="ru-RU" b="0" i="0" dirty="0">
-                <a:effectLst/>
-                <a:latin typeface="fkGroteskNeue"/>
-              </a:rPr>
-              <a:t>Оси: гены (отсортированы по модулям)</a:t>
-            </a:r>
-          </a:p>
-          <a:p>
-            <a:pPr algn="l"/>
-            <a:r>
-              <a:rPr lang="ru-RU" b="0" i="0" dirty="0">
-                <a:effectLst/>
-                <a:latin typeface="fkGroteskNeue"/>
-              </a:rPr>
-              <a:t>Цвет: сила связи</a:t>
-            </a:r>
-          </a:p>
-          <a:p>
-            <a:pPr algn="l">
-              <a:buFont typeface="Arial" panose="020B0604020202020204" pitchFamily="34" charset="0"/>
-              <a:buChar char="•"/>
-            </a:pPr>
-            <a:r>
-              <a:rPr lang="ru-RU" b="0" i="0" dirty="0">
-                <a:effectLst/>
-                <a:latin typeface="fkGroteskNeue"/>
-              </a:rPr>
-              <a:t>Жёлтый = сильно соединены (TOM высокий)</a:t>
-            </a:r>
-          </a:p>
-          <a:p>
-            <a:pPr algn="l">
-              <a:buFont typeface="Arial" panose="020B0604020202020204" pitchFamily="34" charset="0"/>
-              <a:buChar char="•"/>
-            </a:pPr>
-            <a:r>
-              <a:rPr lang="ru-RU" b="0" i="0" dirty="0">
-                <a:effectLst/>
-                <a:latin typeface="fkGroteskNeue"/>
-              </a:rPr>
-              <a:t>Синий = слабо соединены (TOM низкий)</a:t>
-            </a:r>
-          </a:p>
-          <a:p>
-            <a:pPr algn="l"/>
-            <a:r>
-              <a:rPr lang="ru-RU" b="0" i="0" dirty="0">
-                <a:effectLst/>
-                <a:latin typeface="fkGroteskNeue"/>
-              </a:rPr>
-              <a:t>Результат: видна модульная структура как диагональные блоки!</a:t>
-            </a:r>
-          </a:p>
-          <a:p>
-            <a:pPr algn="l"/>
-            <a:r>
-              <a:rPr lang="ru-RU" b="0" i="0" dirty="0">
-                <a:effectLst/>
-                <a:latin typeface="fkGroteskNeue"/>
-              </a:rPr>
-              <a:t>Метод 2: </a:t>
-            </a:r>
-            <a:r>
-              <a:rPr lang="ru-RU" b="0" i="0" dirty="0" err="1">
-                <a:effectLst/>
-                <a:latin typeface="fkGroteskNeue"/>
-              </a:rPr>
-              <a:t>Cytoscape</a:t>
-            </a:r>
-            <a:r>
-              <a:rPr lang="ru-RU" b="0" i="0" dirty="0">
-                <a:effectLst/>
-                <a:latin typeface="fkGroteskNeue"/>
-              </a:rPr>
-              <a:t> (отдельное приложение)</a:t>
-            </a:r>
-          </a:p>
-          <a:p>
-            <a:pPr algn="l"/>
-            <a:r>
-              <a:rPr lang="ru-RU" b="0" i="0" dirty="0">
-                <a:effectLst/>
-                <a:latin typeface="fkGroteskNeue"/>
-              </a:rPr>
-              <a:t>Программа для визуализации графов.</a:t>
-            </a:r>
-          </a:p>
-          <a:p>
-            <a:pPr algn="l">
-              <a:buFont typeface="Arial" panose="020B0604020202020204" pitchFamily="34" charset="0"/>
-              <a:buChar char="•"/>
-            </a:pPr>
-            <a:r>
-              <a:rPr lang="ru-RU" b="0" i="0" dirty="0">
-                <a:effectLst/>
-                <a:latin typeface="fkGroteskNeue"/>
-              </a:rPr>
-              <a:t>Узлы = гены (размер = </a:t>
-            </a:r>
-            <a:r>
-              <a:rPr lang="ru-RU" b="0" i="0" dirty="0" err="1">
-                <a:effectLst/>
-                <a:latin typeface="fkGroteskNeue"/>
-              </a:rPr>
-              <a:t>degree</a:t>
-            </a:r>
-            <a:r>
-              <a:rPr lang="ru-RU" b="0" i="0" dirty="0">
-                <a:effectLst/>
-                <a:latin typeface="fkGroteskNeue"/>
-              </a:rPr>
-              <a:t>, цвет = модуль)</a:t>
-            </a:r>
-          </a:p>
-          <a:p>
-            <a:pPr algn="l">
-              <a:buFont typeface="Arial" panose="020B0604020202020204" pitchFamily="34" charset="0"/>
-              <a:buChar char="•"/>
-            </a:pPr>
-            <a:r>
-              <a:rPr lang="ru-RU" b="0" i="0" dirty="0">
-                <a:effectLst/>
-                <a:latin typeface="fkGroteskNeue"/>
-              </a:rPr>
-              <a:t>Рёбра = корреляция (толщина = сила)</a:t>
-            </a:r>
-          </a:p>
-          <a:p>
-            <a:pPr algn="l">
-              <a:buFont typeface="Arial" panose="020B0604020202020204" pitchFamily="34" charset="0"/>
-              <a:buChar char="•"/>
-            </a:pPr>
-            <a:r>
-              <a:rPr lang="ru-RU" b="0" i="0" dirty="0" err="1">
-                <a:effectLst/>
-                <a:latin typeface="fkGroteskNeue"/>
-              </a:rPr>
-              <a:t>Layout</a:t>
-            </a:r>
-            <a:r>
-              <a:rPr lang="ru-RU" b="0" i="0" dirty="0">
-                <a:effectLst/>
-                <a:latin typeface="fkGroteskNeue"/>
-              </a:rPr>
-              <a:t> = Force-</a:t>
-            </a:r>
-            <a:r>
-              <a:rPr lang="ru-RU" b="0" i="0" dirty="0" err="1">
-                <a:effectLst/>
-                <a:latin typeface="fkGroteskNeue"/>
-              </a:rPr>
-              <a:t>directed</a:t>
-            </a:r>
-            <a:r>
-              <a:rPr lang="ru-RU" b="0" i="0" dirty="0">
-                <a:effectLst/>
-                <a:latin typeface="fkGroteskNeue"/>
-              </a:rPr>
-              <a:t> (упругость, как если бы связанные узлы притягиваются)</a:t>
-            </a:r>
-          </a:p>
-          <a:p>
-            <a:pPr algn="l"/>
-            <a:r>
-              <a:rPr lang="ru-RU" b="0" i="0" dirty="0">
-                <a:effectLst/>
-                <a:latin typeface="fkGroteskNeue"/>
-              </a:rPr>
-              <a:t>Можно </a:t>
-            </a:r>
-            <a:r>
-              <a:rPr lang="ru-RU" b="0" i="0" dirty="0" err="1">
-                <a:effectLst/>
-                <a:latin typeface="fkGroteskNeue"/>
-              </a:rPr>
-              <a:t>zoom</a:t>
-            </a:r>
-            <a:r>
-              <a:rPr lang="ru-RU" b="0" i="0" dirty="0">
-                <a:effectLst/>
-                <a:latin typeface="fkGroteskNeue"/>
-              </a:rPr>
-              <a:t> in, кликать на гены, смотреть метаданные.</a:t>
-            </a:r>
-          </a:p>
-          <a:p>
-            <a:pPr algn="l"/>
-            <a:r>
-              <a:rPr lang="ru-RU" b="0" i="0" dirty="0" err="1">
-                <a:effectLst/>
-                <a:latin typeface="fkGroteskNeue"/>
-              </a:rPr>
-              <a:t>Cytoscape</a:t>
-            </a:r>
-            <a:r>
-              <a:rPr lang="ru-RU" b="0" i="0" dirty="0">
-                <a:effectLst/>
-                <a:latin typeface="fkGroteskNeue"/>
-              </a:rPr>
-              <a:t> можно экспортировать граф из R и визуализировать в программе.</a:t>
-            </a:r>
-          </a:p>
-          <a:p>
-            <a:pPr algn="l"/>
-            <a:r>
-              <a:rPr lang="ru-RU" b="0" i="0" dirty="0">
-                <a:effectLst/>
-                <a:latin typeface="fkGroteskNeue"/>
-              </a:rPr>
-              <a:t>Метод 3: </a:t>
-            </a:r>
-            <a:r>
-              <a:rPr lang="ru-RU" b="0" i="0" dirty="0" err="1">
-                <a:effectLst/>
-                <a:latin typeface="fkGroteskNeue"/>
-              </a:rPr>
-              <a:t>igraph</a:t>
-            </a:r>
-            <a:r>
-              <a:rPr lang="en-US" b="0" i="0" dirty="0">
-                <a:effectLst/>
-                <a:latin typeface="fkGroteskNeue"/>
-              </a:rPr>
-              <a:t> </a:t>
-            </a:r>
-            <a:r>
-              <a:rPr lang="ru-RU" b="0" i="0" dirty="0">
-                <a:effectLst/>
-                <a:latin typeface="fkGroteskNeue"/>
-              </a:rPr>
-              <a:t>и </a:t>
-            </a:r>
-            <a:r>
-              <a:rPr lang="en-US" sz="1200" dirty="0" err="1">
-                <a:latin typeface="fkGroteskNeue"/>
-              </a:rPr>
-              <a:t>tidygraph</a:t>
-            </a:r>
-            <a:r>
-              <a:rPr lang="ru-RU" b="0" i="0" dirty="0">
-                <a:effectLst/>
-                <a:latin typeface="fkGroteskNeue"/>
-              </a:rPr>
-              <a:t> в R</a:t>
-            </a:r>
-          </a:p>
-          <a:p>
             <a:endParaRPr lang="ru-RU" sz="1200" b="0" i="0" kern="1200" dirty="0">
               <a:solidFill>
                 <a:schemeClr val="tx1"/>
@@ -2129,352 +987,14 @@
           <a:bodyPr/>
           <a:lstStyle/>
           <a:p>
-            <a:r>
-              <a:rPr lang="ru-RU" sz="1200" b="0" i="0" kern="1200" dirty="0">
-                <a:solidFill>
-                  <a:schemeClr val="tx1"/>
-                </a:solidFill>
-                <a:latin typeface="+mn-lt"/>
-                <a:ea typeface="+mn-ea"/>
-                <a:cs typeface="+mn-cs"/>
-              </a:rPr>
-              <a:t>Что делают гены в модуле? Представьте: WGCNA выдала модуль из 150 генов, сильно ассоциированный с опухолью.</a:t>
-            </a:r>
-          </a:p>
-          <a:p>
-            <a:r>
-              <a:rPr lang="ru-RU" sz="1200" b="0" i="0" kern="1200" dirty="0">
-                <a:solidFill>
-                  <a:schemeClr val="tx1"/>
-                </a:solidFill>
-                <a:latin typeface="+mn-lt"/>
-                <a:ea typeface="+mn-ea"/>
-                <a:cs typeface="+mn-cs"/>
-              </a:rPr>
-              <a:t>Вопрос: что общего у этих 150 генов? Случайный набор или биологическая функция?</a:t>
-            </a:r>
-          </a:p>
-          <a:p>
-            <a:r>
-              <a:rPr lang="ru-RU" sz="1200" b="0" i="0" kern="1200" dirty="0">
-                <a:solidFill>
-                  <a:schemeClr val="tx1"/>
-                </a:solidFill>
-                <a:latin typeface="+mn-lt"/>
-                <a:ea typeface="+mn-ea"/>
-                <a:cs typeface="+mn-cs"/>
-              </a:rPr>
-              <a:t>Ответ: функциональное обогащение — </a:t>
-            </a:r>
-            <a:r>
-              <a:rPr lang="ru-RU" sz="1200" b="0" i="0" kern="1200" dirty="0" err="1">
-                <a:solidFill>
-                  <a:schemeClr val="tx1"/>
-                </a:solidFill>
-                <a:latin typeface="+mn-lt"/>
-                <a:ea typeface="+mn-ea"/>
-                <a:cs typeface="+mn-cs"/>
-              </a:rPr>
-              <a:t>Gene</a:t>
-            </a:r>
-            <a:r>
-              <a:rPr lang="ru-RU" sz="1200" b="0" i="0" kern="1200" dirty="0">
-                <a:solidFill>
-                  <a:schemeClr val="tx1"/>
-                </a:solidFill>
-                <a:latin typeface="+mn-lt"/>
-                <a:ea typeface="+mn-ea"/>
-                <a:cs typeface="+mn-cs"/>
-              </a:rPr>
-              <a:t> </a:t>
-            </a:r>
-            <a:r>
-              <a:rPr lang="ru-RU" sz="1200" b="0" i="0" kern="1200" dirty="0" err="1">
-                <a:solidFill>
-                  <a:schemeClr val="tx1"/>
-                </a:solidFill>
-                <a:latin typeface="+mn-lt"/>
-                <a:ea typeface="+mn-ea"/>
-                <a:cs typeface="+mn-cs"/>
-              </a:rPr>
-              <a:t>Ontology</a:t>
-            </a:r>
-            <a:r>
-              <a:rPr lang="ru-RU" sz="1200" b="0" i="0" kern="1200" dirty="0">
-                <a:solidFill>
-                  <a:schemeClr val="tx1"/>
-                </a:solidFill>
-                <a:latin typeface="+mn-lt"/>
-                <a:ea typeface="+mn-ea"/>
-                <a:cs typeface="+mn-cs"/>
-              </a:rPr>
-              <a:t> (GO). Каждому гену из 20 тысяч в геноме присвоены аннотации по трём осям.</a:t>
-            </a:r>
-          </a:p>
-          <a:p>
-            <a:r>
-              <a:rPr lang="ru-RU" sz="1200" b="0" i="0" kern="1200" dirty="0" err="1">
-                <a:solidFill>
-                  <a:schemeClr val="tx1"/>
-                </a:solidFill>
-                <a:latin typeface="+mn-lt"/>
-                <a:ea typeface="+mn-ea"/>
-                <a:cs typeface="+mn-cs"/>
-              </a:rPr>
-              <a:t>Biological</a:t>
-            </a:r>
-            <a:r>
-              <a:rPr lang="ru-RU" sz="1200" b="0" i="0" kern="1200" dirty="0">
-                <a:solidFill>
-                  <a:schemeClr val="tx1"/>
-                </a:solidFill>
-                <a:latin typeface="+mn-lt"/>
-                <a:ea typeface="+mn-ea"/>
-                <a:cs typeface="+mn-cs"/>
-              </a:rPr>
-              <a:t> Process (GO BP): апоптоз, клеточная пролиферация, репарация ДНК.</a:t>
-            </a:r>
-          </a:p>
-          <a:p>
-            <a:r>
-              <a:rPr lang="ru-RU" sz="1200" b="0" i="0" kern="1200" dirty="0" err="1">
-                <a:solidFill>
-                  <a:schemeClr val="tx1"/>
-                </a:solidFill>
-                <a:latin typeface="+mn-lt"/>
-                <a:ea typeface="+mn-ea"/>
-                <a:cs typeface="+mn-cs"/>
-              </a:rPr>
-              <a:t>Molecular</a:t>
-            </a:r>
-            <a:r>
-              <a:rPr lang="ru-RU" sz="1200" b="0" i="0" kern="1200" dirty="0">
-                <a:solidFill>
-                  <a:schemeClr val="tx1"/>
-                </a:solidFill>
-                <a:latin typeface="+mn-lt"/>
-                <a:ea typeface="+mn-ea"/>
-                <a:cs typeface="+mn-cs"/>
-              </a:rPr>
-              <a:t> </a:t>
-            </a:r>
-            <a:r>
-              <a:rPr lang="ru-RU" sz="1200" b="0" i="0" kern="1200" dirty="0" err="1">
-                <a:solidFill>
-                  <a:schemeClr val="tx1"/>
-                </a:solidFill>
-                <a:latin typeface="+mn-lt"/>
-                <a:ea typeface="+mn-ea"/>
-                <a:cs typeface="+mn-cs"/>
-              </a:rPr>
-              <a:t>Function</a:t>
-            </a:r>
-            <a:r>
-              <a:rPr lang="ru-RU" sz="1200" b="0" i="0" kern="1200" dirty="0">
-                <a:solidFill>
-                  <a:schemeClr val="tx1"/>
-                </a:solidFill>
-                <a:latin typeface="+mn-lt"/>
-                <a:ea typeface="+mn-ea"/>
-                <a:cs typeface="+mn-cs"/>
-              </a:rPr>
-              <a:t> (GO MF): </a:t>
-            </a:r>
-            <a:r>
-              <a:rPr lang="ru-RU" sz="1200" b="0" i="0" kern="1200" dirty="0" err="1">
-                <a:solidFill>
-                  <a:schemeClr val="tx1"/>
-                </a:solidFill>
-                <a:latin typeface="+mn-lt"/>
-                <a:ea typeface="+mn-ea"/>
-                <a:cs typeface="+mn-cs"/>
-              </a:rPr>
-              <a:t>киназная</a:t>
-            </a:r>
-            <a:r>
-              <a:rPr lang="ru-RU" sz="1200" b="0" i="0" kern="1200" dirty="0">
-                <a:solidFill>
-                  <a:schemeClr val="tx1"/>
-                </a:solidFill>
-                <a:latin typeface="+mn-lt"/>
-                <a:ea typeface="+mn-ea"/>
-                <a:cs typeface="+mn-cs"/>
-              </a:rPr>
-              <a:t> активность, связывание факторов транскрипции.</a:t>
-            </a:r>
-          </a:p>
-          <a:p>
-            <a:r>
-              <a:rPr lang="ru-RU" sz="1200" b="0" i="0" kern="1200" dirty="0" err="1">
-                <a:solidFill>
-                  <a:schemeClr val="tx1"/>
-                </a:solidFill>
-                <a:latin typeface="+mn-lt"/>
-                <a:ea typeface="+mn-ea"/>
-                <a:cs typeface="+mn-cs"/>
-              </a:rPr>
-              <a:t>Cellular</a:t>
-            </a:r>
-            <a:r>
-              <a:rPr lang="ru-RU" sz="1200" b="0" i="0" kern="1200" dirty="0">
-                <a:solidFill>
-                  <a:schemeClr val="tx1"/>
-                </a:solidFill>
-                <a:latin typeface="+mn-lt"/>
-                <a:ea typeface="+mn-ea"/>
-                <a:cs typeface="+mn-cs"/>
-              </a:rPr>
-              <a:t> </a:t>
-            </a:r>
-            <a:r>
-              <a:rPr lang="ru-RU" sz="1200" b="0" i="0" kern="1200" dirty="0" err="1">
-                <a:solidFill>
-                  <a:schemeClr val="tx1"/>
-                </a:solidFill>
-                <a:latin typeface="+mn-lt"/>
-                <a:ea typeface="+mn-ea"/>
-                <a:cs typeface="+mn-cs"/>
-              </a:rPr>
-              <a:t>Component</a:t>
-            </a:r>
-            <a:r>
-              <a:rPr lang="ru-RU" sz="1200" b="0" i="0" kern="1200" dirty="0">
-                <a:solidFill>
-                  <a:schemeClr val="tx1"/>
-                </a:solidFill>
-                <a:latin typeface="+mn-lt"/>
-                <a:ea typeface="+mn-ea"/>
-                <a:cs typeface="+mn-cs"/>
-              </a:rPr>
-              <a:t> (GO CC): митохондрии, клеточная мембрана.</a:t>
-            </a:r>
-          </a:p>
-          <a:p>
-            <a:r>
-              <a:rPr lang="ru-RU" sz="1200" b="0" i="0" kern="1200" dirty="0">
-                <a:solidFill>
-                  <a:schemeClr val="tx1"/>
-                </a:solidFill>
-                <a:latin typeface="+mn-lt"/>
-                <a:ea typeface="+mn-ea"/>
-                <a:cs typeface="+mn-cs"/>
-              </a:rPr>
-              <a:t>Статистика: гипергеометрический тест. Если случайно взять 150 из 20 тысяч, сколько ожидается с функцией 'апоптоз'? Наблюдаемое &gt;&gt; ожидаемого — обогащение.</a:t>
-            </a:r>
-          </a:p>
-          <a:p>
-            <a:r>
-              <a:rPr lang="ru-RU" sz="1200" b="0" i="0" kern="1200" dirty="0">
-                <a:solidFill>
-                  <a:schemeClr val="tx1"/>
-                </a:solidFill>
-                <a:latin typeface="+mn-lt"/>
-                <a:ea typeface="+mn-ea"/>
-                <a:cs typeface="+mn-cs"/>
-              </a:rPr>
-              <a:t>Дополнение: KEGG </a:t>
-            </a:r>
-            <a:r>
-              <a:rPr lang="ru-RU" sz="1200" b="0" i="0" kern="1200" dirty="0" err="1">
-                <a:solidFill>
-                  <a:schemeClr val="tx1"/>
-                </a:solidFill>
-                <a:latin typeface="+mn-lt"/>
-                <a:ea typeface="+mn-ea"/>
-                <a:cs typeface="+mn-cs"/>
-              </a:rPr>
-              <a:t>pathways</a:t>
-            </a:r>
-            <a:r>
-              <a:rPr lang="ru-RU" sz="1200" b="0" i="0" kern="1200" dirty="0">
-                <a:solidFill>
-                  <a:schemeClr val="tx1"/>
-                </a:solidFill>
-                <a:latin typeface="+mn-lt"/>
-                <a:ea typeface="+mn-ea"/>
-                <a:cs typeface="+mn-cs"/>
-              </a:rPr>
-              <a:t> — </a:t>
-            </a:r>
-            <a:r>
-              <a:rPr lang="ru-RU" sz="1200" b="0" i="0" kern="1200" dirty="0" err="1">
-                <a:solidFill>
-                  <a:schemeClr val="tx1"/>
-                </a:solidFill>
-                <a:latin typeface="+mn-lt"/>
-                <a:ea typeface="+mn-ea"/>
-                <a:cs typeface="+mn-cs"/>
-              </a:rPr>
-              <a:t>Wnt</a:t>
-            </a:r>
-            <a:r>
-              <a:rPr lang="ru-RU" sz="1200" b="0" i="0" kern="1200" dirty="0">
-                <a:solidFill>
-                  <a:schemeClr val="tx1"/>
-                </a:solidFill>
-                <a:latin typeface="+mn-lt"/>
-                <a:ea typeface="+mn-ea"/>
-                <a:cs typeface="+mn-cs"/>
-              </a:rPr>
-              <a:t> </a:t>
-            </a:r>
-            <a:r>
-              <a:rPr lang="ru-RU" sz="1200" b="0" i="0" kern="1200" dirty="0" err="1">
-                <a:solidFill>
-                  <a:schemeClr val="tx1"/>
-                </a:solidFill>
-                <a:latin typeface="+mn-lt"/>
-                <a:ea typeface="+mn-ea"/>
-                <a:cs typeface="+mn-cs"/>
-              </a:rPr>
-              <a:t>signaling</a:t>
-            </a:r>
-            <a:r>
-              <a:rPr lang="ru-RU" sz="1200" b="0" i="0" kern="1200" dirty="0">
-                <a:solidFill>
-                  <a:schemeClr val="tx1"/>
-                </a:solidFill>
-                <a:latin typeface="+mn-lt"/>
-                <a:ea typeface="+mn-ea"/>
-                <a:cs typeface="+mn-cs"/>
-              </a:rPr>
-              <a:t>, p53 </a:t>
-            </a:r>
-            <a:r>
-              <a:rPr lang="ru-RU" sz="1200" b="0" i="0" kern="1200" dirty="0" err="1">
-                <a:solidFill>
-                  <a:schemeClr val="tx1"/>
-                </a:solidFill>
-                <a:latin typeface="+mn-lt"/>
-                <a:ea typeface="+mn-ea"/>
-                <a:cs typeface="+mn-cs"/>
-              </a:rPr>
-              <a:t>pathway</a:t>
-            </a:r>
-            <a:r>
-              <a:rPr lang="ru-RU" sz="1200" b="0" i="0" kern="1200" dirty="0">
-                <a:solidFill>
-                  <a:schemeClr val="tx1"/>
-                </a:solidFill>
-                <a:latin typeface="+mn-lt"/>
-                <a:ea typeface="+mn-ea"/>
-                <a:cs typeface="+mn-cs"/>
-              </a:rPr>
-              <a:t>, MAPK. Аналогичный тест на пути.</a:t>
-            </a:r>
-          </a:p>
-          <a:p>
-            <a:r>
-              <a:rPr lang="ru-RU" sz="1200" b="0" i="0" kern="1200" dirty="0">
-                <a:solidFill>
-                  <a:schemeClr val="tx1"/>
-                </a:solidFill>
-                <a:latin typeface="+mn-lt"/>
-                <a:ea typeface="+mn-ea"/>
-                <a:cs typeface="+mn-cs"/>
-              </a:rPr>
-              <a:t>Вывод: модуль не абстрактный, а 'путь пролиферации и выживания опухоли'. GO/KEGG — обязательный шаг после WGCNA!</a:t>
-            </a:r>
+            <a:endParaRPr lang="ru-RU" sz="1200" b="0" i="0" kern="1200" dirty="0">
+              <a:solidFill>
+                <a:schemeClr val="tx1"/>
+              </a:solidFill>
+              <a:latin typeface="+mn-lt"/>
+              <a:ea typeface="+mn-ea"/>
+              <a:cs typeface="+mn-cs"/>
+            </a:endParaRPr>
           </a:p>
         </p:txBody>
       </p:sp>
@@ -2559,924 +1079,6 @@
           <a:bodyPr/>
           <a:lstStyle/>
           <a:p>
-            <a:pPr algn="l"/>
-            <a:r>
-              <a:rPr lang="en-US" b="0" i="0" dirty="0">
-                <a:effectLst/>
-                <a:latin typeface="fkGroteskNeue"/>
-              </a:rPr>
-              <a:t>Case Study: </a:t>
-            </a:r>
-            <a:r>
-              <a:rPr lang="ru-RU" b="0" i="0" dirty="0">
-                <a:effectLst/>
-                <a:latin typeface="fkGroteskNeue"/>
-              </a:rPr>
-              <a:t>Рак молочной железы (детально)</a:t>
-            </a:r>
-          </a:p>
-          <a:p>
-            <a:pPr algn="l"/>
-            <a:r>
-              <a:rPr lang="ru-RU" b="0" i="0" dirty="0" err="1">
-                <a:effectLst/>
-                <a:latin typeface="fkGroteskNeue"/>
-              </a:rPr>
-              <a:t>Датасет</a:t>
-            </a:r>
-            <a:r>
-              <a:rPr lang="ru-RU" b="0" i="0" dirty="0">
-                <a:effectLst/>
-                <a:latin typeface="fkGroteskNeue"/>
-              </a:rPr>
-              <a:t>: </a:t>
-            </a:r>
-            <a:r>
-              <a:rPr lang="en-US" b="0" i="0" dirty="0">
-                <a:effectLst/>
-                <a:latin typeface="fkGroteskNeue"/>
-              </a:rPr>
-              <a:t>TCGA Breast Cancer (The Cancer Genome Atlas)</a:t>
-            </a:r>
-          </a:p>
-          <a:p>
-            <a:pPr algn="l">
-              <a:buFont typeface="Arial" panose="020B0604020202020204" pitchFamily="34" charset="0"/>
-              <a:buChar char="•"/>
-            </a:pPr>
-            <a:r>
-              <a:rPr lang="en-US" b="0" i="0" dirty="0">
-                <a:effectLst/>
-                <a:latin typeface="fkGroteskNeue"/>
-              </a:rPr>
-              <a:t>1,200 </a:t>
-            </a:r>
-            <a:r>
-              <a:rPr lang="ru-RU" b="0" i="0" dirty="0">
-                <a:effectLst/>
-                <a:latin typeface="fkGroteskNeue"/>
-              </a:rPr>
-              <a:t>пациентов</a:t>
-            </a:r>
-          </a:p>
-          <a:p>
-            <a:pPr algn="l">
-              <a:buFont typeface="Arial" panose="020B0604020202020204" pitchFamily="34" charset="0"/>
-              <a:buChar char="•"/>
-            </a:pPr>
-            <a:r>
-              <a:rPr lang="ru-RU" b="0" i="0" dirty="0">
-                <a:effectLst/>
-                <a:latin typeface="fkGroteskNeue"/>
-              </a:rPr>
-              <a:t>~20,000 генов</a:t>
-            </a:r>
-          </a:p>
-          <a:p>
-            <a:pPr algn="l">
-              <a:buFont typeface="Arial" panose="020B0604020202020204" pitchFamily="34" charset="0"/>
-              <a:buChar char="•"/>
-            </a:pPr>
-            <a:r>
-              <a:rPr lang="ru-RU" b="0" i="0" dirty="0">
-                <a:effectLst/>
-                <a:latin typeface="fkGroteskNeue"/>
-              </a:rPr>
-              <a:t>15 лет </a:t>
-            </a:r>
-            <a:r>
-              <a:rPr lang="en-US" b="0" i="0" dirty="0">
-                <a:effectLst/>
-                <a:latin typeface="fkGroteskNeue"/>
-              </a:rPr>
-              <a:t>follow-up</a:t>
-            </a:r>
-          </a:p>
-          <a:p>
-            <a:pPr algn="l">
-              <a:buFont typeface="Arial" panose="020B0604020202020204" pitchFamily="34" charset="0"/>
-              <a:buChar char="•"/>
-            </a:pPr>
-            <a:r>
-              <a:rPr lang="ru-RU" b="0" i="0" dirty="0">
-                <a:effectLst/>
-                <a:latin typeface="fkGroteskNeue"/>
-              </a:rPr>
-              <a:t>Фенотипы: выживание, стадия, </a:t>
-            </a:r>
-            <a:r>
-              <a:rPr lang="ru-RU" b="0" i="0" dirty="0" err="1">
-                <a:effectLst/>
-                <a:latin typeface="fkGroteskNeue"/>
-              </a:rPr>
-              <a:t>гистотип</a:t>
-            </a:r>
-            <a:r>
-              <a:rPr lang="ru-RU" b="0" i="0" dirty="0">
-                <a:effectLst/>
-                <a:latin typeface="fkGroteskNeue"/>
-              </a:rPr>
-              <a:t>, гормональные рецепторы, </a:t>
-            </a:r>
-            <a:r>
-              <a:rPr lang="en-US" b="0" i="0" dirty="0">
-                <a:effectLst/>
-                <a:latin typeface="fkGroteskNeue"/>
-              </a:rPr>
-              <a:t>HER2 </a:t>
-            </a:r>
-            <a:r>
-              <a:rPr lang="ru-RU" b="0" i="0" dirty="0">
-                <a:effectLst/>
-                <a:latin typeface="fkGroteskNeue"/>
-              </a:rPr>
-              <a:t>статус</a:t>
-            </a:r>
-          </a:p>
-          <a:p>
-            <a:pPr algn="l"/>
-            <a:r>
-              <a:rPr lang="ru-RU" b="0" i="0" dirty="0">
-                <a:effectLst/>
-                <a:latin typeface="fkGroteskNeue"/>
-              </a:rPr>
-              <a:t>Применена </a:t>
-            </a:r>
-            <a:r>
-              <a:rPr lang="en-US" b="0" i="0" dirty="0">
-                <a:effectLst/>
-                <a:latin typeface="fkGroteskNeue"/>
-              </a:rPr>
-              <a:t>WGCNA:</a:t>
-            </a:r>
-          </a:p>
-          <a:p>
-            <a:pPr algn="l"/>
-            <a:r>
-              <a:rPr lang="ru-RU" b="0" i="0" dirty="0">
-                <a:effectLst/>
-                <a:latin typeface="fkGroteskNeue"/>
-              </a:rPr>
-              <a:t>Найдено 15 модулей.</a:t>
-            </a:r>
-          </a:p>
-          <a:p>
-            <a:pPr algn="l"/>
-            <a:r>
-              <a:rPr lang="ru-RU" b="0" i="0" dirty="0">
-                <a:effectLst/>
-                <a:latin typeface="fkGroteskNeue"/>
-              </a:rPr>
-              <a:t>Корреляция модулей с выживанием:</a:t>
-            </a:r>
-          </a:p>
-          <a:p>
-            <a:pPr algn="l"/>
-            <a:r>
-              <a:rPr lang="en-US" b="0" i="0" dirty="0">
-                <a:effectLst/>
-                <a:latin typeface="fkGroteskNeue"/>
-              </a:rPr>
-              <a:t>Red </a:t>
-            </a:r>
-            <a:r>
-              <a:rPr lang="ru-RU" b="0" i="0" dirty="0">
-                <a:effectLst/>
-                <a:latin typeface="fkGroteskNeue"/>
-              </a:rPr>
-              <a:t>модуль:</a:t>
-            </a:r>
-          </a:p>
-          <a:p>
-            <a:pPr algn="l">
-              <a:buFont typeface="Arial" panose="020B0604020202020204" pitchFamily="34" charset="0"/>
-              <a:buChar char="•"/>
-            </a:pPr>
-            <a:r>
-              <a:rPr lang="en-US" b="0" i="0" dirty="0">
-                <a:effectLst/>
-                <a:latin typeface="fkGroteskNeue"/>
-              </a:rPr>
-              <a:t>r = 0.68 </a:t>
-            </a:r>
-            <a:r>
-              <a:rPr lang="ru-RU" b="0" i="0" dirty="0">
-                <a:effectLst/>
-                <a:latin typeface="fkGroteskNeue"/>
-              </a:rPr>
-              <a:t>с выживанием (</a:t>
-            </a:r>
-            <a:r>
-              <a:rPr lang="en-US" b="0" i="0" dirty="0">
-                <a:effectLst/>
-                <a:latin typeface="fkGroteskNeue"/>
-              </a:rPr>
-              <a:t>p &lt; 0.001) ***</a:t>
-            </a:r>
-          </a:p>
-          <a:p>
-            <a:pPr algn="l">
-              <a:buFont typeface="Arial" panose="020B0604020202020204" pitchFamily="34" charset="0"/>
-              <a:buChar char="•"/>
-            </a:pPr>
-            <a:r>
-              <a:rPr lang="ru-RU" b="0" i="0" dirty="0">
-                <a:effectLst/>
-                <a:latin typeface="fkGroteskNeue"/>
-              </a:rPr>
-              <a:t>Интерпретация: модули высокого уровня → лучше выживают</a:t>
-            </a:r>
-          </a:p>
-          <a:p>
-            <a:pPr algn="l"/>
-            <a:r>
-              <a:rPr lang="en-US" b="0" i="0" dirty="0">
-                <a:effectLst/>
-                <a:latin typeface="fkGroteskNeue"/>
-              </a:rPr>
-              <a:t>Blue </a:t>
-            </a:r>
-            <a:r>
-              <a:rPr lang="ru-RU" b="0" i="0" dirty="0">
-                <a:effectLst/>
-                <a:latin typeface="fkGroteskNeue"/>
-              </a:rPr>
-              <a:t>модуль:</a:t>
-            </a:r>
-          </a:p>
-          <a:p>
-            <a:pPr algn="l">
-              <a:buFont typeface="Arial" panose="020B0604020202020204" pitchFamily="34" charset="0"/>
-              <a:buChar char="•"/>
-            </a:pPr>
-            <a:r>
-              <a:rPr lang="en-US" b="0" i="0" dirty="0">
-                <a:effectLst/>
-                <a:latin typeface="fkGroteskNeue"/>
-              </a:rPr>
-              <a:t>r = -0.45 </a:t>
-            </a:r>
-            <a:r>
-              <a:rPr lang="ru-RU" b="0" i="0" dirty="0">
-                <a:effectLst/>
-                <a:latin typeface="fkGroteskNeue"/>
-              </a:rPr>
-              <a:t>с выживанием (</a:t>
-            </a:r>
-            <a:r>
-              <a:rPr lang="en-US" b="0" i="0" dirty="0">
-                <a:effectLst/>
-                <a:latin typeface="fkGroteskNeue"/>
-              </a:rPr>
-              <a:t>p = 0.01) *</a:t>
-            </a:r>
-          </a:p>
-          <a:p>
-            <a:pPr algn="l">
-              <a:buFont typeface="Arial" panose="020B0604020202020204" pitchFamily="34" charset="0"/>
-              <a:buChar char="•"/>
-            </a:pPr>
-            <a:r>
-              <a:rPr lang="ru-RU" b="0" i="0" dirty="0">
-                <a:effectLst/>
-                <a:latin typeface="fkGroteskNeue"/>
-              </a:rPr>
-              <a:t>Интерпретация: модули высокого уровня → хуже выживают</a:t>
-            </a:r>
-          </a:p>
-          <a:p>
-            <a:pPr algn="l"/>
-            <a:r>
-              <a:rPr lang="en-US" b="0" i="0" dirty="0">
-                <a:effectLst/>
-                <a:latin typeface="fkGroteskNeue"/>
-              </a:rPr>
-              <a:t>Green </a:t>
-            </a:r>
-            <a:r>
-              <a:rPr lang="ru-RU" b="0" i="0" dirty="0">
-                <a:effectLst/>
-                <a:latin typeface="fkGroteskNeue"/>
-              </a:rPr>
-              <a:t>модуль:</a:t>
-            </a:r>
-          </a:p>
-          <a:p>
-            <a:pPr algn="l">
-              <a:buFont typeface="Arial" panose="020B0604020202020204" pitchFamily="34" charset="0"/>
-              <a:buChar char="•"/>
-            </a:pPr>
-            <a:r>
-              <a:rPr lang="en-US" b="0" i="0" dirty="0">
-                <a:effectLst/>
-                <a:latin typeface="fkGroteskNeue"/>
-              </a:rPr>
-              <a:t>r = 0.35 </a:t>
-            </a:r>
-            <a:r>
-              <a:rPr lang="ru-RU" b="0" i="0" dirty="0">
-                <a:effectLst/>
-                <a:latin typeface="fkGroteskNeue"/>
-              </a:rPr>
-              <a:t>с </a:t>
-            </a:r>
-            <a:r>
-              <a:rPr lang="en-US" b="0" i="0" dirty="0">
-                <a:effectLst/>
-                <a:latin typeface="fkGroteskNeue"/>
-              </a:rPr>
-              <a:t>HER2+ </a:t>
-            </a:r>
-            <a:r>
-              <a:rPr lang="ru-RU" b="0" i="0" dirty="0">
-                <a:effectLst/>
-                <a:latin typeface="fkGroteskNeue"/>
-              </a:rPr>
-              <a:t>статусом (</a:t>
-            </a:r>
-            <a:r>
-              <a:rPr lang="en-US" b="0" i="0" dirty="0">
-                <a:effectLst/>
-                <a:latin typeface="fkGroteskNeue"/>
-              </a:rPr>
-              <a:t>p = 0.05) *</a:t>
-            </a:r>
-          </a:p>
-          <a:p>
-            <a:pPr algn="l">
-              <a:buFont typeface="Arial" panose="020B0604020202020204" pitchFamily="34" charset="0"/>
-              <a:buChar char="•"/>
-            </a:pPr>
-            <a:r>
-              <a:rPr lang="ru-RU" b="0" i="0" dirty="0">
-                <a:effectLst/>
-                <a:latin typeface="fkGroteskNeue"/>
-              </a:rPr>
-              <a:t>Интерпретация: модули связаны с рецепторным статусом</a:t>
-            </a:r>
-          </a:p>
-          <a:p>
-            <a:pPr algn="l"/>
-            <a:r>
-              <a:rPr lang="ru-RU" b="0" i="0" dirty="0">
-                <a:effectLst/>
-                <a:latin typeface="fkGroteskNeue"/>
-              </a:rPr>
-              <a:t>Остальные модули: </a:t>
-            </a:r>
-            <a:r>
-              <a:rPr lang="en-US" b="0" i="0" dirty="0">
-                <a:effectLst/>
-                <a:latin typeface="fkGroteskNeue"/>
-              </a:rPr>
-              <a:t>p &gt; 0.05 (</a:t>
-            </a:r>
-            <a:r>
-              <a:rPr lang="ru-RU" b="0" i="0" dirty="0">
-                <a:effectLst/>
-                <a:latin typeface="fkGroteskNeue"/>
-              </a:rPr>
-              <a:t>не значимы)</a:t>
-            </a:r>
-          </a:p>
-          <a:p>
-            <a:pPr algn="l"/>
-            <a:r>
-              <a:rPr lang="ru-RU" b="0" i="0" dirty="0">
-                <a:effectLst/>
-                <a:latin typeface="fkGroteskNeue"/>
-              </a:rPr>
-              <a:t>Функциональное обогащение </a:t>
-            </a:r>
-            <a:r>
-              <a:rPr lang="en-US" b="0" i="0" dirty="0">
-                <a:effectLst/>
-                <a:latin typeface="fkGroteskNeue"/>
-              </a:rPr>
-              <a:t>Red </a:t>
-            </a:r>
-            <a:r>
-              <a:rPr lang="ru-RU" b="0" i="0" dirty="0">
-                <a:effectLst/>
-                <a:latin typeface="fkGroteskNeue"/>
-              </a:rPr>
-              <a:t>модуля (150 генов):</a:t>
-            </a:r>
-          </a:p>
-          <a:p>
-            <a:pPr algn="l"/>
-            <a:r>
-              <a:rPr lang="en-US" b="0" i="0" dirty="0">
-                <a:effectLst/>
-                <a:latin typeface="fkGroteskNeue"/>
-              </a:rPr>
-              <a:t>Gene Ontology </a:t>
-            </a:r>
-            <a:r>
-              <a:rPr lang="ru-RU" b="0" i="0" dirty="0">
-                <a:effectLst/>
-                <a:latin typeface="fkGroteskNeue"/>
-              </a:rPr>
-              <a:t>анализ (обогащение):</a:t>
-            </a:r>
-          </a:p>
-          <a:p>
-            <a:pPr algn="l"/>
-            <a:r>
-              <a:rPr lang="en-US" b="0" i="0" dirty="0">
-                <a:effectLst/>
-                <a:latin typeface="fkGroteskNeue"/>
-              </a:rPr>
-              <a:t>Top GO terms (</a:t>
-            </a:r>
-            <a:r>
-              <a:rPr lang="ru-RU" b="0" i="0" dirty="0">
-                <a:effectLst/>
-                <a:latin typeface="fkGroteskNeue"/>
-              </a:rPr>
-              <a:t>по </a:t>
-            </a:r>
-            <a:r>
-              <a:rPr lang="en-US" b="0" i="0" dirty="0">
-                <a:effectLst/>
-                <a:latin typeface="fkGroteskNeue"/>
-              </a:rPr>
-              <a:t>p-value):</a:t>
-            </a:r>
-          </a:p>
-          <a:p>
-            <a:pPr algn="l">
-              <a:buFont typeface="+mj-lt"/>
-              <a:buAutoNum type="arabicPeriod"/>
-            </a:pPr>
-            <a:r>
-              <a:rPr lang="en-US" b="0" i="0" dirty="0">
-                <a:effectLst/>
-                <a:latin typeface="fkGroteskNeue"/>
-              </a:rPr>
-              <a:t>"Immune response" (p = 1e-50) — </a:t>
-            </a:r>
-            <a:r>
-              <a:rPr lang="ru-RU" b="0" i="0" dirty="0">
-                <a:effectLst/>
-                <a:latin typeface="fkGroteskNeue"/>
-              </a:rPr>
-              <a:t>почти все гены про иммунитет!</a:t>
-            </a:r>
-          </a:p>
-          <a:p>
-            <a:pPr algn="l">
-              <a:buFont typeface="+mj-lt"/>
-              <a:buAutoNum type="arabicPeriod"/>
-            </a:pPr>
-            <a:r>
-              <a:rPr lang="ru-RU" b="0" i="0" dirty="0">
-                <a:effectLst/>
-                <a:latin typeface="fkGroteskNeue"/>
-              </a:rPr>
-              <a:t>"</a:t>
-            </a:r>
-            <a:r>
-              <a:rPr lang="en-US" b="0" i="0" dirty="0">
-                <a:effectLst/>
-                <a:latin typeface="fkGroteskNeue"/>
-              </a:rPr>
-              <a:t>T cell activation" (p = 1e-45)</a:t>
-            </a:r>
-          </a:p>
-          <a:p>
-            <a:pPr algn="l">
-              <a:buFont typeface="+mj-lt"/>
-              <a:buAutoNum type="arabicPeriod"/>
-            </a:pPr>
-            <a:r>
-              <a:rPr lang="en-US" b="0" i="0" dirty="0">
-                <a:effectLst/>
-                <a:latin typeface="fkGroteskNeue"/>
-              </a:rPr>
-              <a:t>"Leukocyte migration" (p = 1e-42)</a:t>
-            </a:r>
-          </a:p>
-          <a:p>
-            <a:pPr algn="l">
-              <a:buFont typeface="+mj-lt"/>
-              <a:buAutoNum type="arabicPeriod"/>
-            </a:pPr>
-            <a:r>
-              <a:rPr lang="en-US" b="0" i="0" dirty="0">
-                <a:effectLst/>
-                <a:latin typeface="fkGroteskNeue"/>
-              </a:rPr>
-              <a:t>"Interferon signaling" (p = 1e-40)</a:t>
-            </a:r>
-          </a:p>
-          <a:p>
-            <a:pPr algn="l"/>
-            <a:r>
-              <a:rPr lang="ru-RU" b="0" i="0" dirty="0">
-                <a:effectLst/>
-                <a:latin typeface="fkGroteskNeue"/>
-              </a:rPr>
-              <a:t>Вывод: </a:t>
-            </a:r>
-            <a:r>
-              <a:rPr lang="en-US" b="0" i="0" dirty="0">
-                <a:effectLst/>
-                <a:latin typeface="fkGroteskNeue"/>
-              </a:rPr>
-              <a:t>Red </a:t>
-            </a:r>
-            <a:r>
-              <a:rPr lang="ru-RU" b="0" i="0" dirty="0">
-                <a:effectLst/>
-                <a:latin typeface="fkGroteskNeue"/>
-              </a:rPr>
-              <a:t>модуль = иммунный модуль!</a:t>
-            </a:r>
-          </a:p>
-          <a:p>
-            <a:pPr algn="l"/>
-            <a:r>
-              <a:rPr lang="ru-RU" b="0" i="0" dirty="0">
-                <a:effectLst/>
-                <a:latin typeface="fkGroteskNeue"/>
-              </a:rPr>
-              <a:t>Пациенты с высокой экспрессией иммунного модуля → хороший иммунный ответ → рак подавляется → лучший прогноз</a:t>
-            </a:r>
-          </a:p>
-          <a:p>
-            <a:pPr algn="l"/>
-            <a:r>
-              <a:rPr lang="en-US" b="0" i="0" dirty="0">
-                <a:effectLst/>
-                <a:latin typeface="fkGroteskNeue"/>
-              </a:rPr>
-              <a:t>KEGG pathway </a:t>
-            </a:r>
-            <a:r>
-              <a:rPr lang="ru-RU" b="0" i="0" dirty="0">
-                <a:effectLst/>
-                <a:latin typeface="fkGroteskNeue"/>
-              </a:rPr>
-              <a:t>анализ:</a:t>
-            </a:r>
-          </a:p>
-          <a:p>
-            <a:pPr algn="l"/>
-            <a:r>
-              <a:rPr lang="en-US" b="0" i="0" dirty="0">
-                <a:effectLst/>
-                <a:latin typeface="fkGroteskNeue"/>
-              </a:rPr>
-              <a:t>Top pathways:</a:t>
-            </a:r>
-          </a:p>
-          <a:p>
-            <a:pPr algn="l">
-              <a:buFont typeface="+mj-lt"/>
-              <a:buAutoNum type="arabicPeriod"/>
-            </a:pPr>
-            <a:r>
-              <a:rPr lang="en-US" b="0" i="0" dirty="0">
-                <a:effectLst/>
-                <a:latin typeface="fkGroteskNeue"/>
-              </a:rPr>
-              <a:t>"Th1 differentiation" (p = 1e-30)</a:t>
-            </a:r>
-          </a:p>
-          <a:p>
-            <a:pPr algn="l">
-              <a:buFont typeface="+mj-lt"/>
-              <a:buAutoNum type="arabicPeriod"/>
-            </a:pPr>
-            <a:r>
-              <a:rPr lang="en-US" b="0" i="0" dirty="0">
-                <a:effectLst/>
-                <a:latin typeface="fkGroteskNeue"/>
-              </a:rPr>
-              <a:t>"Antigen presentation" (p = 1e-28)</a:t>
-            </a:r>
-          </a:p>
-          <a:p>
-            <a:pPr algn="l">
-              <a:buFont typeface="+mj-lt"/>
-              <a:buAutoNum type="arabicPeriod"/>
-            </a:pPr>
-            <a:r>
-              <a:rPr lang="en-US" b="0" i="0" dirty="0">
-                <a:effectLst/>
-                <a:latin typeface="fkGroteskNeue"/>
-              </a:rPr>
-              <a:t>"JAK-STAT signaling" (p = 1e-25)</a:t>
-            </a:r>
-          </a:p>
-          <a:p>
-            <a:pPr algn="l"/>
-            <a:r>
-              <a:rPr lang="ru-RU" b="0" i="0" dirty="0">
-                <a:effectLst/>
-                <a:latin typeface="fkGroteskNeue"/>
-              </a:rPr>
-              <a:t>Все про активацию иммунитета!</a:t>
-            </a:r>
-          </a:p>
-          <a:p>
-            <a:pPr algn="l"/>
-            <a:r>
-              <a:rPr lang="ru-RU" b="0" i="0" dirty="0">
-                <a:effectLst/>
-                <a:latin typeface="fkGroteskNeue"/>
-              </a:rPr>
-              <a:t>Функциональное обогащение </a:t>
-            </a:r>
-            <a:r>
-              <a:rPr lang="en-US" b="0" i="0" dirty="0">
-                <a:effectLst/>
-                <a:latin typeface="fkGroteskNeue"/>
-              </a:rPr>
-              <a:t>Blue </a:t>
-            </a:r>
-            <a:r>
-              <a:rPr lang="ru-RU" b="0" i="0" dirty="0">
-                <a:effectLst/>
-                <a:latin typeface="fkGroteskNeue"/>
-              </a:rPr>
-              <a:t>модуля (200 генов):</a:t>
-            </a:r>
-          </a:p>
-          <a:p>
-            <a:pPr algn="l"/>
-            <a:r>
-              <a:rPr lang="en-US" b="0" i="0" dirty="0">
-                <a:effectLst/>
-                <a:latin typeface="fkGroteskNeue"/>
-              </a:rPr>
-              <a:t>Top GO terms:</a:t>
-            </a:r>
-          </a:p>
-          <a:p>
-            <a:pPr algn="l">
-              <a:buFont typeface="+mj-lt"/>
-              <a:buAutoNum type="arabicPeriod"/>
-            </a:pPr>
-            <a:r>
-              <a:rPr lang="en-US" b="0" i="0" dirty="0">
-                <a:effectLst/>
-                <a:latin typeface="fkGroteskNeue"/>
-              </a:rPr>
-              <a:t>"Cell cycle regulation" (p = 1e-35)</a:t>
-            </a:r>
-          </a:p>
-          <a:p>
-            <a:pPr algn="l">
-              <a:buFont typeface="+mj-lt"/>
-              <a:buAutoNum type="arabicPeriod"/>
-            </a:pPr>
-            <a:r>
-              <a:rPr lang="en-US" b="0" i="0" dirty="0">
-                <a:effectLst/>
-                <a:latin typeface="fkGroteskNeue"/>
-              </a:rPr>
-              <a:t>"DNA replication" (p = 1e-32)</a:t>
-            </a:r>
-          </a:p>
-          <a:p>
-            <a:pPr algn="l">
-              <a:buFont typeface="+mj-lt"/>
-              <a:buAutoNum type="arabicPeriod"/>
-            </a:pPr>
-            <a:r>
-              <a:rPr lang="en-US" b="0" i="0" dirty="0">
-                <a:effectLst/>
-                <a:latin typeface="fkGroteskNeue"/>
-              </a:rPr>
-              <a:t>"Mitosis" (p = 1e-30)</a:t>
-            </a:r>
-          </a:p>
-          <a:p>
-            <a:pPr algn="l"/>
-            <a:r>
-              <a:rPr lang="ru-RU" b="0" i="0" dirty="0">
-                <a:effectLst/>
-                <a:latin typeface="fkGroteskNeue"/>
-              </a:rPr>
-              <a:t>Вывод: </a:t>
-            </a:r>
-            <a:r>
-              <a:rPr lang="en-US" b="0" i="0" dirty="0">
-                <a:effectLst/>
-                <a:latin typeface="fkGroteskNeue"/>
-              </a:rPr>
-              <a:t>Blue </a:t>
-            </a:r>
-            <a:r>
-              <a:rPr lang="ru-RU" b="0" i="0" dirty="0">
-                <a:effectLst/>
-                <a:latin typeface="fkGroteskNeue"/>
-              </a:rPr>
-              <a:t>модуль = клеточный цикл и пролиферация!</a:t>
-            </a:r>
-          </a:p>
-          <a:p>
-            <a:pPr algn="l"/>
-            <a:r>
-              <a:rPr lang="ru-RU" b="0" i="0" dirty="0">
-                <a:effectLst/>
-                <a:latin typeface="fkGroteskNeue"/>
-              </a:rPr>
-              <a:t>Пациенты с высокой экспрессией → раковые клетки активно делятся → плохой прогноз</a:t>
-            </a:r>
-          </a:p>
-          <a:p>
-            <a:pPr algn="l"/>
-            <a:r>
-              <a:rPr lang="en-US" b="0" i="0" dirty="0">
-                <a:effectLst/>
-                <a:latin typeface="fkGroteskNeue"/>
-              </a:rPr>
-              <a:t>Hub </a:t>
-            </a:r>
-            <a:r>
-              <a:rPr lang="ru-RU" b="0" i="0" dirty="0">
-                <a:effectLst/>
-                <a:latin typeface="fkGroteskNeue"/>
-              </a:rPr>
-              <a:t>гены в </a:t>
-            </a:r>
-            <a:r>
-              <a:rPr lang="en-US" b="0" i="0" dirty="0">
-                <a:effectLst/>
-                <a:latin typeface="fkGroteskNeue"/>
-              </a:rPr>
-              <a:t>Red </a:t>
-            </a:r>
-            <a:r>
-              <a:rPr lang="ru-RU" b="0" i="0" dirty="0">
-                <a:effectLst/>
-                <a:latin typeface="fkGroteskNeue"/>
-              </a:rPr>
-              <a:t>модуле (иммунный):</a:t>
-            </a:r>
-          </a:p>
-          <a:p>
-            <a:pPr algn="l"/>
-            <a:r>
-              <a:rPr lang="en-US" b="0" i="0" dirty="0">
-                <a:effectLst/>
-                <a:latin typeface="fkGroteskNeue"/>
-              </a:rPr>
-              <a:t>Top 5 hub </a:t>
-            </a:r>
-            <a:r>
-              <a:rPr lang="ru-RU" b="0" i="0" dirty="0">
-                <a:effectLst/>
-                <a:latin typeface="fkGroteskNeue"/>
-              </a:rPr>
-              <a:t>гены:</a:t>
-            </a:r>
-          </a:p>
-          <a:p>
-            <a:pPr algn="l">
-              <a:buFont typeface="+mj-lt"/>
-              <a:buAutoNum type="arabicPeriod"/>
-            </a:pPr>
-            <a:r>
-              <a:rPr lang="en-US" b="0" i="0" dirty="0">
-                <a:effectLst/>
-                <a:latin typeface="fkGroteskNeue"/>
-              </a:rPr>
-              <a:t>IL6 (Interleukin 6): </a:t>
-            </a:r>
-            <a:r>
-              <a:rPr lang="ru-RU" b="0" i="0" dirty="0">
-                <a:effectLst/>
-                <a:latin typeface="fkGroteskNeue"/>
-              </a:rPr>
-              <a:t>цитокин, активация иммунитета</a:t>
-            </a:r>
-          </a:p>
-          <a:p>
-            <a:pPr algn="l">
-              <a:buFont typeface="+mj-lt"/>
-              <a:buAutoNum type="arabicPeriod"/>
-            </a:pPr>
-            <a:r>
-              <a:rPr lang="en-US" b="0" i="0" dirty="0">
-                <a:effectLst/>
-                <a:latin typeface="fkGroteskNeue"/>
-              </a:rPr>
-              <a:t>TNF (Tumor Necrosis Factor): </a:t>
-            </a:r>
-            <a:r>
-              <a:rPr lang="ru-RU" b="0" i="0" dirty="0">
-                <a:effectLst/>
-                <a:latin typeface="fkGroteskNeue"/>
-              </a:rPr>
-              <a:t>цитокин, убивает раковые клетки</a:t>
-            </a:r>
-          </a:p>
-          <a:p>
-            <a:pPr algn="l">
-              <a:buFont typeface="+mj-lt"/>
-              <a:buAutoNum type="arabicPeriod"/>
-            </a:pPr>
-            <a:r>
-              <a:rPr lang="en-US" b="0" i="0" dirty="0">
-                <a:effectLst/>
-                <a:latin typeface="fkGroteskNeue"/>
-              </a:rPr>
-              <a:t>IL1B (Interleukin 1B): </a:t>
-            </a:r>
-            <a:r>
-              <a:rPr lang="ru-RU" b="0" i="0" dirty="0">
-                <a:effectLst/>
-                <a:latin typeface="fkGroteskNeue"/>
-              </a:rPr>
-              <a:t>воспаление, активация иммунитета</a:t>
-            </a:r>
-          </a:p>
-          <a:p>
-            <a:pPr algn="l">
-              <a:buFont typeface="+mj-lt"/>
-              <a:buAutoNum type="arabicPeriod"/>
-            </a:pPr>
-            <a:r>
-              <a:rPr lang="en-US" b="0" i="0" dirty="0">
-                <a:effectLst/>
-                <a:latin typeface="fkGroteskNeue"/>
-              </a:rPr>
-              <a:t>IL2 (Interleukin 2): </a:t>
-            </a:r>
-            <a:r>
-              <a:rPr lang="ru-RU" b="0" i="0" dirty="0">
-                <a:effectLst/>
-                <a:latin typeface="fkGroteskNeue"/>
-              </a:rPr>
-              <a:t>активация </a:t>
-            </a:r>
-            <a:r>
-              <a:rPr lang="en-US" b="0" i="0" dirty="0">
-                <a:effectLst/>
-                <a:latin typeface="fkGroteskNeue"/>
-              </a:rPr>
-              <a:t>T cells</a:t>
-            </a:r>
-          </a:p>
-          <a:p>
-            <a:pPr algn="l">
-              <a:buFont typeface="+mj-lt"/>
-              <a:buAutoNum type="arabicPeriod"/>
-            </a:pPr>
-            <a:r>
-              <a:rPr lang="en-US" b="0" i="0" dirty="0">
-                <a:effectLst/>
-                <a:latin typeface="fkGroteskNeue"/>
-              </a:rPr>
-              <a:t>CD8A (CD8 antigen): </a:t>
-            </a:r>
-            <a:r>
-              <a:rPr lang="ru-RU" b="0" i="0" dirty="0">
-                <a:effectLst/>
-                <a:latin typeface="fkGroteskNeue"/>
-              </a:rPr>
-              <a:t>маркер </a:t>
-            </a:r>
-            <a:r>
-              <a:rPr lang="en-US" b="0" i="0" dirty="0">
-                <a:effectLst/>
-                <a:latin typeface="fkGroteskNeue"/>
-              </a:rPr>
-              <a:t>T cells killer</a:t>
-            </a:r>
-          </a:p>
-          <a:p>
-            <a:pPr algn="l"/>
-            <a:r>
-              <a:rPr lang="ru-RU" b="0" i="0" dirty="0">
-                <a:effectLst/>
-                <a:latin typeface="fkGroteskNeue"/>
-              </a:rPr>
-              <a:t>Все про активацию иммунитета!</a:t>
-            </a:r>
-          </a:p>
-          <a:p>
-            <a:pPr algn="l"/>
-            <a:r>
-              <a:rPr lang="ru-RU" b="0" i="0" dirty="0">
-                <a:effectLst/>
-                <a:latin typeface="fkGroteskNeue"/>
-              </a:rPr>
-              <a:t>Этот модуль можно назвать "</a:t>
-            </a:r>
-            <a:r>
-              <a:rPr lang="en-US" b="0" i="0" dirty="0">
-                <a:effectLst/>
-                <a:latin typeface="fkGroteskNeue"/>
-              </a:rPr>
-              <a:t>T cell activation and immune response module"</a:t>
-            </a:r>
-          </a:p>
-          <a:p>
             <a:endParaRPr lang="ru-RU" sz="1200" b="0" i="0" kern="1200" dirty="0">
               <a:solidFill>
                 <a:schemeClr val="tx1"/>
@@ -3569,323 +1171,6 @@
           <a:bodyPr/>
           <a:lstStyle/>
           <a:p>
-            <a:pPr algn="l"/>
-            <a:r>
-              <a:rPr lang="ru-RU" b="0" i="0" dirty="0">
-                <a:effectLst/>
-                <a:latin typeface="fkGroteskNeue"/>
-              </a:rPr>
-              <a:t>Сравнение сетей: здоровые </a:t>
-            </a:r>
-            <a:r>
-              <a:rPr lang="ru-RU" b="0" i="0" dirty="0" err="1">
-                <a:effectLst/>
-                <a:latin typeface="fkGroteskNeue"/>
-              </a:rPr>
-              <a:t>vs</a:t>
-            </a:r>
-            <a:r>
-              <a:rPr lang="ru-RU" b="0" i="0" dirty="0">
-                <a:effectLst/>
-                <a:latin typeface="fkGroteskNeue"/>
-              </a:rPr>
-              <a:t> больные</a:t>
-            </a:r>
-          </a:p>
-          <a:p>
-            <a:pPr algn="l"/>
-            <a:r>
-              <a:rPr lang="ru-RU" b="0" i="0" dirty="0">
-                <a:effectLst/>
-                <a:latin typeface="fkGroteskNeue"/>
-              </a:rPr>
-              <a:t>Интересный вопрос: изменяется ли сетевая архитектура при раке?</a:t>
-            </a:r>
-          </a:p>
-          <a:p>
-            <a:pPr algn="l"/>
-            <a:r>
-              <a:rPr lang="ru-RU" b="0" i="0" dirty="0">
-                <a:effectLst/>
-                <a:latin typeface="fkGroteskNeue"/>
-              </a:rPr>
-              <a:t>Метод 1: Отдельная WGCNA для каждой группы</a:t>
-            </a:r>
-          </a:p>
-          <a:p>
-            <a:pPr algn="l"/>
-            <a:r>
-              <a:rPr lang="ru-RU" b="0" i="0" dirty="0">
-                <a:effectLst/>
-                <a:latin typeface="fkGroteskNeue"/>
-              </a:rPr>
-              <a:t>Здоровые ткани (n=100):</a:t>
-            </a:r>
-          </a:p>
-          <a:p>
-            <a:pPr algn="l">
-              <a:buFont typeface="Arial" panose="020B0604020202020204" pitchFamily="34" charset="0"/>
-              <a:buChar char="•"/>
-            </a:pPr>
-            <a:r>
-              <a:rPr lang="ru-RU" b="0" i="0" dirty="0">
-                <a:effectLst/>
-                <a:latin typeface="fkGroteskNeue"/>
-              </a:rPr>
-              <a:t>WGCNA → находим модули в здоровых</a:t>
-            </a:r>
-          </a:p>
-          <a:p>
-            <a:pPr algn="l">
-              <a:buFont typeface="Arial" panose="020B0604020202020204" pitchFamily="34" charset="0"/>
-              <a:buChar char="•"/>
-            </a:pPr>
-            <a:r>
-              <a:rPr lang="ru-RU" b="0" i="0" dirty="0">
-                <a:effectLst/>
-                <a:latin typeface="fkGroteskNeue"/>
-              </a:rPr>
-              <a:t>Результат: "здоровые модули" (наверное, про нормальную функцию клеток)</a:t>
-            </a:r>
-          </a:p>
-          <a:p>
-            <a:pPr algn="l"/>
-            <a:r>
-              <a:rPr lang="ru-RU" b="0" i="0" dirty="0">
-                <a:effectLst/>
-                <a:latin typeface="fkGroteskNeue"/>
-              </a:rPr>
-              <a:t>Раковые ткани (n=100):</a:t>
-            </a:r>
-          </a:p>
-          <a:p>
-            <a:pPr algn="l">
-              <a:buFont typeface="Arial" panose="020B0604020202020204" pitchFamily="34" charset="0"/>
-              <a:buChar char="•"/>
-            </a:pPr>
-            <a:r>
-              <a:rPr lang="ru-RU" b="0" i="0" dirty="0">
-                <a:effectLst/>
-                <a:latin typeface="fkGroteskNeue"/>
-              </a:rPr>
-              <a:t>WGCNA → находим модули в раке</a:t>
-            </a:r>
-          </a:p>
-          <a:p>
-            <a:pPr algn="l">
-              <a:buFont typeface="Arial" panose="020B0604020202020204" pitchFamily="34" charset="0"/>
-              <a:buChar char="•"/>
-            </a:pPr>
-            <a:r>
-              <a:rPr lang="ru-RU" b="0" i="0" dirty="0">
-                <a:effectLst/>
-                <a:latin typeface="fkGroteskNeue"/>
-              </a:rPr>
-              <a:t>Результат: "раковые модули" (может быть совсем другие)</a:t>
-            </a:r>
-          </a:p>
-          <a:p>
-            <a:pPr algn="l"/>
-            <a:r>
-              <a:rPr lang="ru-RU" b="0" i="0" dirty="0">
-                <a:effectLst/>
-                <a:latin typeface="fkGroteskNeue"/>
-              </a:rPr>
-              <a:t>Сравнение:</a:t>
-            </a:r>
-          </a:p>
-          <a:p>
-            <a:pPr algn="l">
-              <a:buFont typeface="Arial" panose="020B0604020202020204" pitchFamily="34" charset="0"/>
-              <a:buChar char="•"/>
-            </a:pPr>
-            <a:r>
-              <a:rPr lang="ru-RU" b="0" i="0" dirty="0">
-                <a:effectLst/>
-                <a:latin typeface="fkGroteskNeue"/>
-              </a:rPr>
-              <a:t>Какие модули исчезли в раке?</a:t>
-            </a:r>
-          </a:p>
-          <a:p>
-            <a:pPr algn="l">
-              <a:buFont typeface="Arial" panose="020B0604020202020204" pitchFamily="34" charset="0"/>
-              <a:buChar char="•"/>
-            </a:pPr>
-            <a:r>
-              <a:rPr lang="ru-RU" b="0" i="0" dirty="0">
-                <a:effectLst/>
-                <a:latin typeface="fkGroteskNeue"/>
-              </a:rPr>
-              <a:t>Какие новые модули появились?</a:t>
-            </a:r>
-          </a:p>
-          <a:p>
-            <a:pPr algn="l">
-              <a:buFont typeface="Arial" panose="020B0604020202020204" pitchFamily="34" charset="0"/>
-              <a:buChar char="•"/>
-            </a:pPr>
-            <a:r>
-              <a:rPr lang="ru-RU" b="0" i="0" dirty="0">
-                <a:effectLst/>
-                <a:latin typeface="fkGroteskNeue"/>
-              </a:rPr>
-              <a:t>Какие изменили структуру?</a:t>
-            </a:r>
-          </a:p>
-          <a:p>
-            <a:pPr algn="l"/>
-            <a:r>
-              <a:rPr lang="ru-RU" b="0" i="0" dirty="0">
-                <a:effectLst/>
-                <a:latin typeface="fkGroteskNeue"/>
-              </a:rPr>
-              <a:t>Результат часто: в раке сетевая архитектура переорганизована, появляются новые связи</a:t>
-            </a:r>
-          </a:p>
-          <a:p>
-            <a:pPr algn="l"/>
-            <a:r>
-              <a:rPr lang="ru-RU" b="0" i="0" dirty="0">
-                <a:effectLst/>
-                <a:latin typeface="fkGroteskNeue"/>
-              </a:rPr>
-              <a:t>Метод 2: </a:t>
-            </a:r>
-            <a:r>
-              <a:rPr lang="ru-RU" b="0" i="0" dirty="0" err="1">
-                <a:effectLst/>
-                <a:latin typeface="fkGroteskNeue"/>
-              </a:rPr>
-              <a:t>Differential</a:t>
-            </a:r>
-            <a:r>
-              <a:rPr lang="ru-RU" b="0" i="0" dirty="0">
-                <a:effectLst/>
-                <a:latin typeface="fkGroteskNeue"/>
-              </a:rPr>
-              <a:t> </a:t>
-            </a:r>
-            <a:r>
-              <a:rPr lang="ru-RU" b="0" i="0" dirty="0" err="1">
-                <a:effectLst/>
-                <a:latin typeface="fkGroteskNeue"/>
-              </a:rPr>
-              <a:t>network</a:t>
-            </a:r>
-            <a:r>
-              <a:rPr lang="ru-RU" b="0" i="0" dirty="0">
-                <a:effectLst/>
-                <a:latin typeface="fkGroteskNeue"/>
-              </a:rPr>
-              <a:t> </a:t>
-            </a:r>
-            <a:r>
-              <a:rPr lang="ru-RU" b="0" i="0" dirty="0" err="1">
-                <a:effectLst/>
-                <a:latin typeface="fkGroteskNeue"/>
-              </a:rPr>
-              <a:t>analysis</a:t>
-            </a:r>
-            <a:endParaRPr lang="ru-RU" b="0" i="0" dirty="0">
-              <a:effectLst/>
-              <a:latin typeface="fkGroteskNeue"/>
-            </a:endParaRPr>
-          </a:p>
-          <a:p>
-            <a:pPr algn="l"/>
-            <a:r>
-              <a:rPr lang="ru-RU" b="0" i="0" dirty="0">
-                <a:effectLst/>
-                <a:latin typeface="fkGroteskNeue"/>
-              </a:rPr>
-              <a:t>Берём общие модули (найденные в объединённом </a:t>
-            </a:r>
-            <a:r>
-              <a:rPr lang="ru-RU" b="0" i="0" dirty="0" err="1">
-                <a:effectLst/>
-                <a:latin typeface="fkGroteskNeue"/>
-              </a:rPr>
-              <a:t>датасете</a:t>
-            </a:r>
-            <a:r>
-              <a:rPr lang="ru-RU" b="0" i="0" dirty="0">
-                <a:effectLst/>
-                <a:latin typeface="fkGroteskNeue"/>
-              </a:rPr>
-              <a:t>).</a:t>
-            </a:r>
-          </a:p>
-          <a:p>
-            <a:pPr algn="l"/>
-            <a:r>
-              <a:rPr lang="ru-RU" b="0" i="0" dirty="0">
-                <a:effectLst/>
-                <a:latin typeface="fkGroteskNeue"/>
-              </a:rPr>
-              <a:t>Для каждого модуля считаем:</a:t>
-            </a:r>
-          </a:p>
-          <a:p>
-            <a:pPr algn="l">
-              <a:buFont typeface="Arial" panose="020B0604020202020204" pitchFamily="34" charset="0"/>
-              <a:buChar char="•"/>
-            </a:pPr>
-            <a:r>
-              <a:rPr lang="ru-RU" b="0" i="0" dirty="0">
-                <a:effectLst/>
-                <a:latin typeface="fkGroteskNeue"/>
-              </a:rPr>
-              <a:t>Средняя корреляция между генами в здоровых</a:t>
-            </a:r>
-          </a:p>
-          <a:p>
-            <a:pPr algn="l">
-              <a:buFont typeface="Arial" panose="020B0604020202020204" pitchFamily="34" charset="0"/>
-              <a:buChar char="•"/>
-            </a:pPr>
-            <a:r>
-              <a:rPr lang="ru-RU" b="0" i="0" dirty="0">
-                <a:effectLst/>
-                <a:latin typeface="fkGroteskNeue"/>
-              </a:rPr>
-              <a:t>Средняя корреляция между генами в раке</a:t>
-            </a:r>
-          </a:p>
-          <a:p>
-            <a:pPr algn="l">
-              <a:buFont typeface="Arial" panose="020B0604020202020204" pitchFamily="34" charset="0"/>
-              <a:buChar char="•"/>
-            </a:pPr>
-            <a:r>
-              <a:rPr lang="ru-RU" b="0" i="0" dirty="0">
-                <a:effectLst/>
-                <a:latin typeface="fkGroteskNeue"/>
-              </a:rPr>
-              <a:t>t-тест на разницу</a:t>
-            </a:r>
-          </a:p>
-          <a:p>
-            <a:pPr algn="l"/>
-            <a:r>
-              <a:rPr lang="ru-RU" b="0" i="0" dirty="0">
-                <a:effectLst/>
-                <a:latin typeface="fkGroteskNeue"/>
-              </a:rPr>
-              <a:t>Результат: какие связи усилились, какие ослабели?</a:t>
-            </a:r>
-          </a:p>
-          <a:p>
-            <a:pPr algn="l"/>
-            <a:r>
-              <a:rPr lang="ru-RU" b="0" i="0" dirty="0">
-                <a:effectLst/>
-                <a:latin typeface="fkGroteskNeue"/>
-              </a:rPr>
-              <a:t>Пример:</a:t>
-            </a:r>
-          </a:p>
-          <a:p>
             <a:endParaRPr lang="ru-RU" sz="1200" b="0" i="0" kern="1200" dirty="0">
               <a:solidFill>
                 <a:schemeClr val="tx1"/>
@@ -3978,500 +1263,6 @@
           <a:bodyPr/>
           <a:lstStyle/>
           <a:p>
-            <a:pPr algn="l"/>
-            <a:r>
-              <a:rPr lang="ru-RU" b="0" i="0" dirty="0">
-                <a:effectLst/>
-                <a:latin typeface="fkGroteskNeue"/>
-              </a:rPr>
-              <a:t>Интеграция многомерных данных (</a:t>
-            </a:r>
-            <a:r>
-              <a:rPr lang="en-US" b="0" i="0" dirty="0">
-                <a:effectLst/>
-                <a:latin typeface="fkGroteskNeue"/>
-              </a:rPr>
-              <a:t>Multi-omics)</a:t>
-            </a:r>
-          </a:p>
-          <a:p>
-            <a:pPr algn="l"/>
-            <a:r>
-              <a:rPr lang="ru-RU" b="0" i="0" dirty="0">
-                <a:effectLst/>
-                <a:latin typeface="fkGroteskNeue"/>
-              </a:rPr>
-              <a:t>Проблема: часто есть несколько типов данных:</a:t>
-            </a:r>
-          </a:p>
-          <a:p>
-            <a:pPr algn="l">
-              <a:buFont typeface="Arial" panose="020B0604020202020204" pitchFamily="34" charset="0"/>
-              <a:buChar char="•"/>
-            </a:pPr>
-            <a:r>
-              <a:rPr lang="en-US" b="0" i="0" dirty="0">
-                <a:effectLst/>
-                <a:latin typeface="fkGroteskNeue"/>
-              </a:rPr>
-              <a:t>Gene expression (RNA-seq, </a:t>
-            </a:r>
-            <a:r>
-              <a:rPr lang="ru-RU" b="0" i="0" dirty="0" err="1">
-                <a:effectLst/>
-                <a:latin typeface="fkGroteskNeue"/>
-              </a:rPr>
-              <a:t>микромассивы</a:t>
-            </a:r>
-            <a:r>
-              <a:rPr lang="ru-RU" b="0" i="0" dirty="0">
-                <a:effectLst/>
-                <a:latin typeface="fkGroteskNeue"/>
-              </a:rPr>
-              <a:t>)</a:t>
-            </a:r>
-          </a:p>
-          <a:p>
-            <a:pPr algn="l">
-              <a:buFont typeface="Arial" panose="020B0604020202020204" pitchFamily="34" charset="0"/>
-              <a:buChar char="•"/>
-            </a:pPr>
-            <a:r>
-              <a:rPr lang="en-US" b="0" i="0" dirty="0">
-                <a:effectLst/>
-                <a:latin typeface="fkGroteskNeue"/>
-              </a:rPr>
-              <a:t>DNA methylation (</a:t>
-            </a:r>
-            <a:r>
-              <a:rPr lang="ru-RU" b="0" i="0" dirty="0">
-                <a:effectLst/>
-                <a:latin typeface="fkGroteskNeue"/>
-              </a:rPr>
-              <a:t>целые геном)</a:t>
-            </a:r>
-          </a:p>
-          <a:p>
-            <a:pPr algn="l">
-              <a:buFont typeface="Arial" panose="020B0604020202020204" pitchFamily="34" charset="0"/>
-              <a:buChar char="•"/>
-            </a:pPr>
-            <a:r>
-              <a:rPr lang="en-US" b="0" i="0" dirty="0">
-                <a:effectLst/>
-                <a:latin typeface="fkGroteskNeue"/>
-              </a:rPr>
-              <a:t>Protein expression (</a:t>
-            </a:r>
-            <a:r>
-              <a:rPr lang="ru-RU" b="0" i="0" dirty="0" err="1">
-                <a:effectLst/>
-                <a:latin typeface="fkGroteskNeue"/>
-              </a:rPr>
-              <a:t>протеомика</a:t>
-            </a:r>
-            <a:r>
-              <a:rPr lang="ru-RU" b="0" i="0" dirty="0">
-                <a:effectLst/>
-                <a:latin typeface="fkGroteskNeue"/>
-              </a:rPr>
-              <a:t>)</a:t>
-            </a:r>
-          </a:p>
-          <a:p>
-            <a:pPr algn="l">
-              <a:buFont typeface="Arial" panose="020B0604020202020204" pitchFamily="34" charset="0"/>
-              <a:buChar char="•"/>
-            </a:pPr>
-            <a:r>
-              <a:rPr lang="en-US" b="0" i="0" dirty="0">
-                <a:effectLst/>
-                <a:latin typeface="fkGroteskNeue"/>
-              </a:rPr>
-              <a:t>Copy Number Variation (CNV, </a:t>
-            </a:r>
-            <a:r>
-              <a:rPr lang="ru-RU" b="0" i="0" dirty="0">
-                <a:effectLst/>
-                <a:latin typeface="fkGroteskNeue"/>
-              </a:rPr>
-              <a:t>вариации числа копий)</a:t>
-            </a:r>
-          </a:p>
-          <a:p>
-            <a:pPr algn="l">
-              <a:buFont typeface="Arial" panose="020B0604020202020204" pitchFamily="34" charset="0"/>
-              <a:buChar char="•"/>
-            </a:pPr>
-            <a:r>
-              <a:rPr lang="en-US" b="0" i="0" dirty="0">
-                <a:effectLst/>
-                <a:latin typeface="fkGroteskNeue"/>
-              </a:rPr>
-              <a:t>Mutations (</a:t>
-            </a:r>
-            <a:r>
-              <a:rPr lang="ru-RU" b="0" i="0" dirty="0">
-                <a:effectLst/>
-                <a:latin typeface="fkGroteskNeue"/>
-              </a:rPr>
-              <a:t>мутации, секвенирование)</a:t>
-            </a:r>
-          </a:p>
-          <a:p>
-            <a:pPr algn="l">
-              <a:buFont typeface="Arial" panose="020B0604020202020204" pitchFamily="34" charset="0"/>
-              <a:buChar char="•"/>
-            </a:pPr>
-            <a:r>
-              <a:rPr lang="en-US" b="0" i="0" dirty="0">
-                <a:effectLst/>
-                <a:latin typeface="fkGroteskNeue"/>
-              </a:rPr>
-              <a:t>miRNA expression (</a:t>
-            </a:r>
-            <a:r>
-              <a:rPr lang="ru-RU" b="0" i="0" dirty="0">
-                <a:effectLst/>
-                <a:latin typeface="fkGroteskNeue"/>
-              </a:rPr>
-              <a:t>микро-РНК)</a:t>
-            </a:r>
-          </a:p>
-          <a:p>
-            <a:pPr algn="l"/>
-            <a:r>
-              <a:rPr lang="ru-RU" b="0" i="0" dirty="0">
-                <a:effectLst/>
-                <a:latin typeface="fkGroteskNeue"/>
-              </a:rPr>
-              <a:t>Идея: построить сети для каждого типа данных → найти взаимодействия</a:t>
-            </a:r>
-          </a:p>
-          <a:p>
-            <a:pPr algn="l"/>
-            <a:r>
-              <a:rPr lang="ru-RU" b="0" i="0" dirty="0">
-                <a:effectLst/>
-                <a:latin typeface="fkGroteskNeue"/>
-              </a:rPr>
-              <a:t>Подход 1: </a:t>
-            </a:r>
-            <a:r>
-              <a:rPr lang="en-US" b="0" i="0" dirty="0">
-                <a:effectLst/>
-                <a:latin typeface="fkGroteskNeue"/>
-              </a:rPr>
-              <a:t>MOFA (Multi-Omics Factor Analysis)</a:t>
-            </a:r>
-          </a:p>
-          <a:p>
-            <a:pPr algn="l"/>
-            <a:r>
-              <a:rPr lang="ru-RU" b="0" i="0" dirty="0">
-                <a:effectLst/>
-                <a:latin typeface="fkGroteskNeue"/>
-              </a:rPr>
-              <a:t>Матричное разложение (</a:t>
-            </a:r>
-            <a:r>
-              <a:rPr lang="en-US" b="0" i="0" dirty="0">
-                <a:effectLst/>
-                <a:latin typeface="fkGroteskNeue"/>
-              </a:rPr>
-              <a:t>Matrix Factorization).</a:t>
-            </a:r>
-          </a:p>
-          <a:p>
-            <a:pPr algn="l"/>
-            <a:r>
-              <a:rPr lang="ru-RU" b="0" i="0" dirty="0">
-                <a:effectLst/>
-                <a:latin typeface="fkGroteskNeue"/>
-              </a:rPr>
-              <a:t>Ищет общие "факторы" (</a:t>
-            </a:r>
-            <a:r>
-              <a:rPr lang="en-US" b="0" i="0" dirty="0">
-                <a:effectLst/>
-                <a:latin typeface="fkGroteskNeue"/>
-              </a:rPr>
-              <a:t>latent factors), </a:t>
-            </a:r>
-            <a:r>
-              <a:rPr lang="ru-RU" b="0" i="0" dirty="0">
-                <a:effectLst/>
-                <a:latin typeface="fkGroteskNeue"/>
-              </a:rPr>
-              <a:t>которые объясняют вариабельность во ВСЕХ </a:t>
-            </a:r>
-            <a:r>
-              <a:rPr lang="en-US" b="0" i="0" dirty="0">
-                <a:effectLst/>
-                <a:latin typeface="fkGroteskNeue"/>
-              </a:rPr>
-              <a:t>omics.</a:t>
-            </a:r>
-          </a:p>
-          <a:p>
-            <a:pPr algn="l"/>
-            <a:r>
-              <a:rPr lang="ru-RU" b="0" i="0" dirty="0">
-                <a:effectLst/>
-                <a:latin typeface="fkGroteskNeue"/>
-              </a:rPr>
-              <a:t>Результат: 10-20 факторов, каждый объясняет часть вариации.</a:t>
-            </a:r>
-          </a:p>
-          <a:p>
-            <a:pPr algn="l"/>
-            <a:r>
-              <a:rPr lang="ru-RU" b="0" i="0" dirty="0">
-                <a:effectLst/>
-                <a:latin typeface="fkGroteskNeue"/>
-              </a:rPr>
-              <a:t>Можно увидеть: какие факторы связаны с фенотипом?</a:t>
-            </a:r>
-          </a:p>
-          <a:p>
-            <a:pPr algn="l"/>
-            <a:r>
-              <a:rPr lang="ru-RU" b="0" i="0" dirty="0">
-                <a:effectLst/>
-                <a:latin typeface="fkGroteskNeue"/>
-              </a:rPr>
-              <a:t>Подход 2: </a:t>
-            </a:r>
-            <a:r>
-              <a:rPr lang="en-US" b="0" i="0" dirty="0">
-                <a:effectLst/>
-                <a:latin typeface="fkGroteskNeue"/>
-              </a:rPr>
-              <a:t>Multiple WGCNA + </a:t>
-            </a:r>
-            <a:r>
-              <a:rPr lang="ru-RU" b="0" i="0" dirty="0">
-                <a:effectLst/>
-                <a:latin typeface="fkGroteskNeue"/>
-              </a:rPr>
-              <a:t>интеграция</a:t>
-            </a:r>
-          </a:p>
-          <a:p>
-            <a:pPr algn="l">
-              <a:buFont typeface="+mj-lt"/>
-              <a:buAutoNum type="arabicPeriod"/>
-            </a:pPr>
-            <a:r>
-              <a:rPr lang="en-US" b="0" i="0" dirty="0">
-                <a:effectLst/>
-                <a:latin typeface="fkGroteskNeue"/>
-              </a:rPr>
-              <a:t>WGCNA </a:t>
-            </a:r>
-            <a:r>
-              <a:rPr lang="ru-RU" b="0" i="0" dirty="0">
-                <a:effectLst/>
-                <a:latin typeface="fkGroteskNeue"/>
-              </a:rPr>
-              <a:t>для </a:t>
-            </a:r>
-            <a:r>
-              <a:rPr lang="en-US" b="0" i="0" dirty="0">
-                <a:effectLst/>
-                <a:latin typeface="fkGroteskNeue"/>
-              </a:rPr>
-              <a:t>RNA-seq → </a:t>
-            </a:r>
-            <a:r>
-              <a:rPr lang="ru-RU" b="0" i="0" dirty="0">
-                <a:effectLst/>
-                <a:latin typeface="fkGroteskNeue"/>
-              </a:rPr>
-              <a:t>модули_</a:t>
-            </a:r>
-            <a:r>
-              <a:rPr lang="en-US" b="0" i="0" dirty="0">
-                <a:effectLst/>
-                <a:latin typeface="fkGroteskNeue"/>
-              </a:rPr>
-              <a:t>RNA</a:t>
-            </a:r>
-          </a:p>
-          <a:p>
-            <a:pPr algn="l">
-              <a:buFont typeface="+mj-lt"/>
-              <a:buAutoNum type="arabicPeriod"/>
-            </a:pPr>
-            <a:r>
-              <a:rPr lang="en-US" b="0" i="0" dirty="0">
-                <a:effectLst/>
-                <a:latin typeface="fkGroteskNeue"/>
-              </a:rPr>
-              <a:t>WGCNA </a:t>
-            </a:r>
-            <a:r>
-              <a:rPr lang="ru-RU" b="0" i="0" dirty="0">
-                <a:effectLst/>
-                <a:latin typeface="fkGroteskNeue"/>
-              </a:rPr>
-              <a:t>для </a:t>
-            </a:r>
-            <a:r>
-              <a:rPr lang="en-US" b="0" i="0" dirty="0">
-                <a:effectLst/>
-                <a:latin typeface="fkGroteskNeue"/>
-              </a:rPr>
-              <a:t>methylation → </a:t>
-            </a:r>
-            <a:r>
-              <a:rPr lang="ru-RU" b="0" i="0" dirty="0">
-                <a:effectLst/>
-                <a:latin typeface="fkGroteskNeue"/>
-              </a:rPr>
-              <a:t>модули_</a:t>
-            </a:r>
-            <a:r>
-              <a:rPr lang="en-US" b="0" i="0" dirty="0">
-                <a:effectLst/>
-                <a:latin typeface="fkGroteskNeue"/>
-              </a:rPr>
-              <a:t>methyl</a:t>
-            </a:r>
-          </a:p>
-          <a:p>
-            <a:pPr algn="l">
-              <a:buFont typeface="+mj-lt"/>
-              <a:buAutoNum type="arabicPeriod"/>
-            </a:pPr>
-            <a:r>
-              <a:rPr lang="ru-RU" b="0" i="0" dirty="0">
-                <a:effectLst/>
-                <a:latin typeface="fkGroteskNeue"/>
-              </a:rPr>
-              <a:t>Считаем корреляцию между модулями:</a:t>
-            </a:r>
-          </a:p>
-          <a:p>
-            <a:pPr marL="742950" lvl="1" indent="-285750" algn="l">
-              <a:buFont typeface="+mj-lt"/>
-              <a:buAutoNum type="arabicPeriod"/>
-            </a:pPr>
-            <a:r>
-              <a:rPr lang="ru-RU" b="0" i="0" dirty="0">
-                <a:effectLst/>
-                <a:latin typeface="fkGroteskNeue"/>
-              </a:rPr>
-              <a:t>Высокая экспрессия модуля_</a:t>
-            </a:r>
-            <a:r>
-              <a:rPr lang="en-US" b="0" i="0" dirty="0">
-                <a:effectLst/>
-                <a:latin typeface="fkGroteskNeue"/>
-              </a:rPr>
-              <a:t>RNA ↔ </a:t>
-            </a:r>
-            <a:r>
-              <a:rPr lang="ru-RU" b="0" i="0" dirty="0">
-                <a:effectLst/>
-                <a:latin typeface="fkGroteskNeue"/>
-              </a:rPr>
-              <a:t>низкая </a:t>
-            </a:r>
-            <a:r>
-              <a:rPr lang="ru-RU" b="0" i="0" dirty="0" err="1">
-                <a:effectLst/>
-                <a:latin typeface="fkGroteskNeue"/>
-              </a:rPr>
-              <a:t>метилация</a:t>
-            </a:r>
-            <a:r>
-              <a:rPr lang="ru-RU" b="0" i="0" dirty="0">
-                <a:effectLst/>
-                <a:latin typeface="fkGroteskNeue"/>
-              </a:rPr>
-              <a:t> модуля_</a:t>
-            </a:r>
-            <a:r>
-              <a:rPr lang="en-US" b="0" i="0" dirty="0">
-                <a:effectLst/>
-                <a:latin typeface="fkGroteskNeue"/>
-              </a:rPr>
-              <a:t>methyl?</a:t>
-            </a:r>
-          </a:p>
-          <a:p>
-            <a:pPr algn="l">
-              <a:buFont typeface="+mj-lt"/>
-              <a:buAutoNum type="arabicPeriod"/>
-            </a:pPr>
-            <a:r>
-              <a:rPr lang="ru-RU" b="0" i="0" dirty="0">
-                <a:effectLst/>
-                <a:latin typeface="fkGroteskNeue"/>
-              </a:rPr>
-              <a:t>Если коррелированы → взаимодействие!</a:t>
-            </a:r>
-          </a:p>
-          <a:p>
-            <a:pPr algn="l"/>
-            <a:r>
-              <a:rPr lang="ru-RU" b="0" i="0" dirty="0">
-                <a:effectLst/>
-                <a:latin typeface="fkGroteskNeue"/>
-              </a:rPr>
-              <a:t>Результат:</a:t>
-            </a:r>
-          </a:p>
-          <a:p>
-            <a:pPr algn="l"/>
-            <a:r>
-              <a:rPr lang="ru-RU" b="0" i="0" dirty="0">
-                <a:effectLst/>
-                <a:latin typeface="fkGroteskNeue"/>
-              </a:rPr>
-              <a:t>Вывод: гены иммунитета нормально </a:t>
-            </a:r>
-            <a:r>
-              <a:rPr lang="ru-RU" b="0" i="0" dirty="0" err="1">
-                <a:effectLst/>
-                <a:latin typeface="fkGroteskNeue"/>
-              </a:rPr>
-              <a:t>экспрессированы</a:t>
-            </a:r>
-            <a:r>
-              <a:rPr lang="ru-RU" b="0" i="0" dirty="0">
-                <a:effectLst/>
-                <a:latin typeface="fkGroteskNeue"/>
-              </a:rPr>
-              <a:t> потому что не </a:t>
-            </a:r>
-            <a:r>
-              <a:rPr lang="ru-RU" b="0" i="0" dirty="0" err="1">
-                <a:effectLst/>
-                <a:latin typeface="fkGroteskNeue"/>
-              </a:rPr>
-              <a:t>метилированы</a:t>
-            </a:r>
-            <a:r>
-              <a:rPr lang="ru-RU" b="0" i="0" dirty="0">
-                <a:effectLst/>
-                <a:latin typeface="fkGroteskNeue"/>
-              </a:rPr>
-              <a:t>!</a:t>
-            </a:r>
-          </a:p>
-          <a:p>
-            <a:pPr algn="l"/>
-            <a:r>
-              <a:rPr lang="ru-RU" b="0" i="0" dirty="0">
-                <a:effectLst/>
-                <a:latin typeface="fkGroteskNeue"/>
-              </a:rPr>
-              <a:t>Это биологический механизм!</a:t>
-            </a:r>
-          </a:p>
-          <a:p>
             <a:endParaRPr lang="ru-RU" sz="1200" b="0" i="0" kern="1200" dirty="0">
               <a:solidFill>
                 <a:schemeClr val="tx1"/>
@@ -4565,552 +1356,14 @@
           <a:lstStyle/>
           <a:p>
             <a:pPr algn="l"/>
-            <a:r>
-              <a:rPr lang="ru-RU" b="0" i="0" dirty="0">
-                <a:effectLst/>
-                <a:latin typeface="fkGroteskNeue"/>
-              </a:rPr>
-              <a:t>Сетевые маркеры для клинического применения</a:t>
-            </a:r>
-          </a:p>
-          <a:p>
-            <a:pPr algn="l"/>
-            <a:r>
-              <a:rPr lang="ru-RU" b="0" i="0" dirty="0">
-                <a:effectLst/>
-                <a:latin typeface="fkGroteskNeue"/>
-              </a:rPr>
-              <a:t>Ключевой вопрос: как использовать сетевую информацию для предсказания?</a:t>
-            </a:r>
-          </a:p>
-          <a:p>
-            <a:pPr algn="l"/>
-            <a:r>
-              <a:rPr lang="ru-RU" b="0" i="0" dirty="0">
-                <a:effectLst/>
-                <a:latin typeface="fkGroteskNeue"/>
-              </a:rPr>
-              <a:t>Идея: сетевые индексы риска</a:t>
-            </a:r>
-          </a:p>
-          <a:p>
-            <a:pPr algn="l"/>
-            <a:r>
-              <a:rPr lang="ru-RU" b="0" i="0" dirty="0">
-                <a:effectLst/>
-                <a:latin typeface="fkGroteskNeue"/>
-              </a:rPr>
-              <a:t>Для каждого пациента считаем:</a:t>
-            </a:r>
-          </a:p>
-          <a:p>
-            <a:pPr algn="l"/>
-            <a:r>
-              <a:rPr lang="ru-RU" b="0" i="0" dirty="0">
-                <a:effectLst/>
-                <a:latin typeface="fkGroteskNeue"/>
-              </a:rPr>
-              <a:t>Коэффициент риска, где вес гена j = его "важность" в модуле (</a:t>
-            </a:r>
-            <a:r>
-              <a:rPr lang="ru-RU" b="0" i="0" dirty="0" err="1">
-                <a:effectLst/>
-                <a:latin typeface="fkGroteskNeue"/>
-              </a:rPr>
-              <a:t>kME</a:t>
-            </a:r>
-            <a:r>
-              <a:rPr lang="ru-RU" b="0" i="0" dirty="0">
-                <a:effectLst/>
-                <a:latin typeface="fkGroteskNeue"/>
-              </a:rPr>
-              <a:t>, </a:t>
-            </a:r>
-            <a:r>
-              <a:rPr lang="ru-RU" b="0" i="0" dirty="0" err="1">
-                <a:effectLst/>
-                <a:latin typeface="fkGroteskNeue"/>
-              </a:rPr>
-              <a:t>degree</a:t>
-            </a:r>
-            <a:r>
-              <a:rPr lang="ru-RU" b="0" i="0" dirty="0">
-                <a:effectLst/>
-                <a:latin typeface="fkGroteskNeue"/>
-              </a:rPr>
-              <a:t> или другое)</a:t>
-            </a:r>
-          </a:p>
-          <a:p>
-            <a:pPr algn="l"/>
-            <a:r>
-              <a:rPr lang="ru-RU" b="0" i="0" dirty="0">
-                <a:effectLst/>
-                <a:latin typeface="fkGroteskNeue"/>
-              </a:rPr>
-              <a:t>Клиническое применение:</a:t>
-            </a:r>
-          </a:p>
-          <a:p>
-            <a:pPr algn="l"/>
-            <a:r>
-              <a:rPr lang="ru-RU" b="0" i="0" dirty="0">
-                <a:effectLst/>
-                <a:latin typeface="fkGroteskNeue"/>
-              </a:rPr>
-              <a:t>Пациент A: Risk </a:t>
-            </a:r>
-            <a:r>
-              <a:rPr lang="ru-RU" b="0" i="0" dirty="0" err="1">
-                <a:effectLst/>
-                <a:latin typeface="fkGroteskNeue"/>
-              </a:rPr>
-              <a:t>score</a:t>
-            </a:r>
-            <a:r>
-              <a:rPr lang="ru-RU" b="0" i="0" dirty="0">
-                <a:effectLst/>
-                <a:latin typeface="fkGroteskNeue"/>
-              </a:rPr>
-              <a:t> = 3.5 (высокий риск) → активно лечить</a:t>
-            </a:r>
-            <a:br>
-              <a:rPr lang="ru-RU" b="0" i="0" dirty="0">
-                <a:effectLst/>
-                <a:latin typeface="fkGroteskNeue"/>
-              </a:rPr>
-            </a:br>
-            <a:r>
-              <a:rPr lang="ru-RU" b="0" i="0" dirty="0">
-                <a:effectLst/>
-                <a:latin typeface="fkGroteskNeue"/>
-              </a:rPr>
-              <a:t>Пациент B: Risk </a:t>
-            </a:r>
-            <a:r>
-              <a:rPr lang="ru-RU" b="0" i="0" dirty="0" err="1">
-                <a:effectLst/>
-                <a:latin typeface="fkGroteskNeue"/>
-              </a:rPr>
-              <a:t>score</a:t>
-            </a:r>
-            <a:r>
-              <a:rPr lang="ru-RU" b="0" i="0" dirty="0">
-                <a:effectLst/>
-                <a:latin typeface="fkGroteskNeue"/>
-              </a:rPr>
-              <a:t> = -2.1 (низкий риск) → возможен наблюдение</a:t>
-            </a:r>
-          </a:p>
-          <a:p>
-            <a:pPr algn="l"/>
-            <a:r>
-              <a:rPr lang="ru-RU" b="0" i="0" dirty="0">
-                <a:effectLst/>
-                <a:latin typeface="fkGroteskNeue"/>
-              </a:rPr>
-              <a:t>Преимущество над одиночным геном:</a:t>
-            </a:r>
-          </a:p>
-          <a:p>
-            <a:pPr algn="l"/>
-            <a:r>
-              <a:rPr lang="ru-RU" b="0" i="0" dirty="0">
-                <a:effectLst/>
-                <a:latin typeface="fkGroteskNeue"/>
-              </a:rPr>
-              <a:t>Одиночный ген (например, IL6):</a:t>
-            </a:r>
-          </a:p>
-          <a:p>
-            <a:pPr algn="l">
-              <a:buFont typeface="Arial" panose="020B0604020202020204" pitchFamily="34" charset="0"/>
-              <a:buChar char="•"/>
-            </a:pPr>
-            <a:r>
-              <a:rPr lang="ru-RU" b="0" i="0" dirty="0">
-                <a:effectLst/>
-                <a:latin typeface="fkGroteskNeue"/>
-              </a:rPr>
-              <a:t>Пациент имеет IL6 = 10 (высокий уровень)</a:t>
-            </a:r>
-          </a:p>
-          <a:p>
-            <a:pPr algn="l">
-              <a:buFont typeface="Arial" panose="020B0604020202020204" pitchFamily="34" charset="0"/>
-              <a:buChar char="•"/>
-            </a:pPr>
-            <a:r>
-              <a:rPr lang="ru-RU" b="0" i="0" dirty="0">
-                <a:effectLst/>
-                <a:latin typeface="fkGroteskNeue"/>
-              </a:rPr>
-              <a:t>Может быть спонтанная флуктуация</a:t>
-            </a:r>
-          </a:p>
-          <a:p>
-            <a:pPr algn="l">
-              <a:buFont typeface="Arial" panose="020B0604020202020204" pitchFamily="34" charset="0"/>
-              <a:buChar char="•"/>
-            </a:pPr>
-            <a:r>
-              <a:rPr lang="ru-RU" b="0" i="0" dirty="0">
-                <a:effectLst/>
-                <a:latin typeface="fkGroteskNeue"/>
-              </a:rPr>
-              <a:t>Или может быть истинная активация иммунитета</a:t>
-            </a:r>
-          </a:p>
-          <a:p>
-            <a:pPr algn="l">
-              <a:buFont typeface="Arial" panose="020B0604020202020204" pitchFamily="34" charset="0"/>
-              <a:buChar char="•"/>
-            </a:pPr>
-            <a:r>
-              <a:rPr lang="ru-RU" b="0" i="0" dirty="0">
-                <a:effectLst/>
-                <a:latin typeface="fkGroteskNeue"/>
-              </a:rPr>
-              <a:t>Неясно!</a:t>
-            </a:r>
-          </a:p>
-          <a:p>
-            <a:pPr algn="l"/>
-            <a:r>
-              <a:rPr lang="ru-RU" b="0" i="0" dirty="0">
-                <a:effectLst/>
-                <a:latin typeface="fkGroteskNeue"/>
-              </a:rPr>
-              <a:t>Модульный индекс:</a:t>
-            </a:r>
-          </a:p>
-          <a:p>
-            <a:pPr algn="l">
-              <a:buFont typeface="Arial" panose="020B0604020202020204" pitchFamily="34" charset="0"/>
-              <a:buChar char="•"/>
-            </a:pPr>
-            <a:r>
-              <a:rPr lang="ru-RU" b="0" i="0" dirty="0">
-                <a:effectLst/>
-                <a:latin typeface="fkGroteskNeue"/>
-              </a:rPr>
-              <a:t>IL6 = 10, IL2 = 8, TNF = 9, CD8A = 11, ... (все иммунные гены высокие!)</a:t>
-            </a:r>
-          </a:p>
-          <a:p>
-            <a:pPr algn="l">
-              <a:buFont typeface="Arial" panose="020B0604020202020204" pitchFamily="34" charset="0"/>
-              <a:buChar char="•"/>
-            </a:pPr>
-            <a:r>
-              <a:rPr lang="ru-RU" b="0" i="0" dirty="0">
-                <a:effectLst/>
-                <a:latin typeface="fkGroteskNeue"/>
-              </a:rPr>
-              <a:t>Вывод: действительно активирована вся иммунная система</a:t>
-            </a:r>
-          </a:p>
-          <a:p>
-            <a:pPr algn="l">
-              <a:buFont typeface="Arial" panose="020B0604020202020204" pitchFamily="34" charset="0"/>
-              <a:buChar char="•"/>
-            </a:pPr>
-            <a:r>
-              <a:rPr lang="ru-RU" b="0" i="0" dirty="0">
-                <a:effectLst/>
-                <a:latin typeface="fkGroteskNeue"/>
-              </a:rPr>
-              <a:t>Более надёжно!</a:t>
-            </a:r>
-          </a:p>
-          <a:p>
-            <a:pPr algn="l"/>
-            <a:r>
-              <a:rPr lang="ru-RU" b="0" i="0" dirty="0">
-                <a:effectLst/>
-                <a:latin typeface="fkGroteskNeue"/>
-              </a:rPr>
-              <a:t>Пример:</a:t>
-            </a:r>
-          </a:p>
-          <a:p>
-            <a:pPr algn="l"/>
-            <a:r>
-              <a:rPr lang="ru-RU" b="0" i="0" dirty="0" err="1">
-                <a:effectLst/>
-                <a:latin typeface="fkGroteskNeue"/>
-              </a:rPr>
-              <a:t>Датасет</a:t>
-            </a:r>
-            <a:r>
-              <a:rPr lang="ru-RU" b="0" i="0" dirty="0">
-                <a:effectLst/>
-                <a:latin typeface="fkGroteskNeue"/>
-              </a:rPr>
-              <a:t> рака молочной железы (</a:t>
-            </a:r>
-            <a:r>
-              <a:rPr lang="en-US" b="0" i="0" dirty="0">
-                <a:effectLst/>
-                <a:latin typeface="fkGroteskNeue"/>
-              </a:rPr>
-              <a:t>TCGA).</a:t>
-            </a:r>
-          </a:p>
-          <a:p>
-            <a:pPr algn="l"/>
-            <a:r>
-              <a:rPr lang="ru-RU" b="0" i="0" dirty="0">
-                <a:effectLst/>
-                <a:latin typeface="fkGroteskNeue"/>
-              </a:rPr>
-              <a:t>Обучили </a:t>
-            </a:r>
-            <a:r>
-              <a:rPr lang="en-US" b="0" i="0" dirty="0">
-                <a:effectLst/>
-                <a:latin typeface="fkGroteskNeue"/>
-              </a:rPr>
-              <a:t>Cox model </a:t>
-            </a:r>
-            <a:r>
-              <a:rPr lang="ru-RU" b="0" i="0" dirty="0">
-                <a:effectLst/>
-                <a:latin typeface="fkGroteskNeue"/>
-              </a:rPr>
-              <a:t>на </a:t>
-            </a:r>
-            <a:r>
-              <a:rPr lang="en-US" b="0" i="0" dirty="0">
-                <a:effectLst/>
-                <a:latin typeface="fkGroteskNeue"/>
-              </a:rPr>
-              <a:t>Risk score </a:t>
-            </a:r>
-            <a:r>
-              <a:rPr lang="ru-RU" b="0" i="0" dirty="0">
-                <a:effectLst/>
-                <a:latin typeface="fkGroteskNeue"/>
-              </a:rPr>
-              <a:t>модулей:</a:t>
-            </a:r>
-          </a:p>
-          <a:p>
-            <a:pPr algn="l"/>
-            <a:r>
-              <a:rPr lang="en-US" b="0" i="0" dirty="0">
-                <a:effectLst/>
-                <a:latin typeface="berkeleyMono"/>
-              </a:rPr>
-              <a:t>text</a:t>
-            </a:r>
-          </a:p>
-          <a:p>
-            <a:pPr algn="l"/>
-            <a:r>
-              <a:rPr lang="en-US" b="0" i="0" dirty="0">
-                <a:solidFill>
-                  <a:srgbClr val="4D4D4C"/>
-                </a:solidFill>
-                <a:effectLst/>
-                <a:latin typeface="inherit"/>
-              </a:rPr>
-              <a:t>Cox hazard = exp(0.5 * </a:t>
-            </a:r>
-            <a:r>
-              <a:rPr lang="en-US" b="0" i="0" dirty="0" err="1">
-                <a:solidFill>
-                  <a:srgbClr val="4D4D4C"/>
-                </a:solidFill>
-                <a:effectLst/>
-                <a:latin typeface="inherit"/>
-              </a:rPr>
-              <a:t>Risk_score_red</a:t>
-            </a:r>
-            <a:r>
-              <a:rPr lang="en-US" b="0" i="0" dirty="0">
-                <a:solidFill>
-                  <a:srgbClr val="4D4D4C"/>
-                </a:solidFill>
-                <a:effectLst/>
-                <a:latin typeface="inherit"/>
-              </a:rPr>
-              <a:t> + 0.3 * </a:t>
-            </a:r>
-            <a:r>
-              <a:rPr lang="en-US" b="0" i="0" dirty="0" err="1">
-                <a:solidFill>
-                  <a:srgbClr val="4D4D4C"/>
-                </a:solidFill>
-                <a:effectLst/>
-                <a:latin typeface="inherit"/>
-              </a:rPr>
-              <a:t>Risk_score_blue</a:t>
-            </a:r>
-            <a:r>
-              <a:rPr lang="en-US" b="0" i="0" dirty="0">
-                <a:solidFill>
-                  <a:srgbClr val="4D4D4C"/>
-                </a:solidFill>
-                <a:effectLst/>
-                <a:latin typeface="inherit"/>
-              </a:rPr>
-              <a:t>) </a:t>
-            </a:r>
-            <a:endParaRPr lang="en-US" b="0" i="0" dirty="0">
-              <a:effectLst/>
-              <a:latin typeface="berkeleyMono"/>
+            <a:endParaRPr lang="ru-RU" sz="1200" b="0" i="0" kern="1200" dirty="0">
+              <a:solidFill>
+                <a:schemeClr val="tx1"/>
+              </a:solidFill>
+              <a:latin typeface="+mn-lt"/>
+              <a:ea typeface="+mn-ea"/>
+              <a:cs typeface="+mn-cs"/>
             </a:endParaRPr>
-          </a:p>
-          <a:p>
-            <a:pPr algn="l"/>
-            <a:r>
-              <a:rPr lang="ru-RU" b="0" i="0" dirty="0">
-                <a:effectLst/>
-                <a:latin typeface="fkGroteskNeue"/>
-              </a:rPr>
-              <a:t>На </a:t>
-            </a:r>
-            <a:r>
-              <a:rPr lang="en-US" b="0" i="0" dirty="0">
-                <a:effectLst/>
-                <a:latin typeface="fkGroteskNeue"/>
-              </a:rPr>
-              <a:t>validation </a:t>
-            </a:r>
-            <a:r>
-              <a:rPr lang="ru-RU" b="0" i="0" dirty="0">
-                <a:effectLst/>
-                <a:latin typeface="fkGroteskNeue"/>
-              </a:rPr>
-              <a:t>сете:</a:t>
-            </a:r>
-          </a:p>
-          <a:p>
-            <a:pPr algn="l">
-              <a:buFont typeface="Arial" panose="020B0604020202020204" pitchFamily="34" charset="0"/>
-              <a:buChar char="•"/>
-            </a:pPr>
-            <a:r>
-              <a:rPr lang="ru-RU" b="0" i="0" dirty="0">
-                <a:effectLst/>
-                <a:latin typeface="fkGroteskNeue"/>
-              </a:rPr>
-              <a:t>Риск-группа </a:t>
-            </a:r>
-            <a:r>
-              <a:rPr lang="en-US" b="0" i="0" dirty="0">
-                <a:effectLst/>
-                <a:latin typeface="fkGroteskNeue"/>
-              </a:rPr>
-              <a:t>High: 1-year survival = 60%</a:t>
-            </a:r>
-          </a:p>
-          <a:p>
-            <a:pPr algn="l">
-              <a:buFont typeface="Arial" panose="020B0604020202020204" pitchFamily="34" charset="0"/>
-              <a:buChar char="•"/>
-            </a:pPr>
-            <a:r>
-              <a:rPr lang="ru-RU" b="0" i="0" dirty="0">
-                <a:effectLst/>
-                <a:latin typeface="fkGroteskNeue"/>
-              </a:rPr>
-              <a:t>Риск-группа </a:t>
-            </a:r>
-            <a:r>
-              <a:rPr lang="en-US" b="0" i="0" dirty="0">
-                <a:effectLst/>
-                <a:latin typeface="fkGroteskNeue"/>
-              </a:rPr>
-              <a:t>Low: 1-year survival = 95%</a:t>
-            </a:r>
-          </a:p>
-          <a:p>
-            <a:pPr algn="l"/>
-            <a:r>
-              <a:rPr lang="ru-RU" b="0" i="0" dirty="0">
-                <a:effectLst/>
-                <a:latin typeface="fkGroteskNeue"/>
-              </a:rPr>
-              <a:t>Разница огромная!</a:t>
-            </a:r>
-          </a:p>
-          <a:p>
-            <a:pPr algn="l"/>
-            <a:r>
-              <a:rPr lang="ru-RU" b="0" i="0" dirty="0">
-                <a:effectLst/>
-                <a:latin typeface="fkGroteskNeue"/>
-              </a:rPr>
-              <a:t>Сравнили с одиночным геном </a:t>
-            </a:r>
-            <a:r>
-              <a:rPr lang="en-US" b="0" i="0" dirty="0">
-                <a:effectLst/>
-                <a:latin typeface="fkGroteskNeue"/>
-              </a:rPr>
-              <a:t>IL6:</a:t>
-            </a:r>
-          </a:p>
-          <a:p>
-            <a:pPr algn="l">
-              <a:buFont typeface="Arial" panose="020B0604020202020204" pitchFamily="34" charset="0"/>
-              <a:buChar char="•"/>
-            </a:pPr>
-            <a:r>
-              <a:rPr lang="en-US" b="0" i="0" dirty="0">
-                <a:effectLst/>
-                <a:latin typeface="fkGroteskNeue"/>
-              </a:rPr>
-              <a:t>IL6 High: 1-year survival = 75%</a:t>
-            </a:r>
-          </a:p>
-          <a:p>
-            <a:pPr algn="l">
-              <a:buFont typeface="Arial" panose="020B0604020202020204" pitchFamily="34" charset="0"/>
-              <a:buChar char="•"/>
-            </a:pPr>
-            <a:r>
-              <a:rPr lang="en-US" b="0" i="0" dirty="0">
-                <a:effectLst/>
-                <a:latin typeface="fkGroteskNeue"/>
-              </a:rPr>
-              <a:t>IL6 Low: 1-year survival = 85%</a:t>
-            </a:r>
-          </a:p>
-          <a:p>
-            <a:pPr algn="l"/>
-            <a:r>
-              <a:rPr lang="ru-RU" b="0" i="0" dirty="0">
-                <a:effectLst/>
-                <a:latin typeface="fkGroteskNeue"/>
-              </a:rPr>
-              <a:t>Разница меньше! Модульный индекс лучше!</a:t>
-            </a:r>
-          </a:p>
-          <a:p>
-            <a:br>
-              <a:rPr lang="ru-RU" sz="1200" b="0" i="0" kern="1200" dirty="0">
-                <a:solidFill>
-                  <a:schemeClr val="tx1"/>
-                </a:solidFill>
-                <a:latin typeface="+mn-lt"/>
-                <a:ea typeface="+mn-ea"/>
-                <a:cs typeface="+mn-cs"/>
-              </a:rPr>
-            </a:br>
-            <a:r>
-              <a:rPr lang="ru-RU" sz="1200" b="0" i="0" kern="1200" dirty="0">
-                <a:solidFill>
-                  <a:schemeClr val="tx1"/>
-                </a:solidFill>
-                <a:latin typeface="+mn-lt"/>
-                <a:ea typeface="+mn-ea"/>
-                <a:cs typeface="+mn-cs"/>
-              </a:rPr>
-              <a:t>ПАУЗА</a:t>
-            </a:r>
           </a:p>
         </p:txBody>
       </p:sp>
@@ -5195,422 +1448,6 @@
           <a:bodyPr/>
           <a:lstStyle/>
           <a:p>
-            <a:pPr algn="l"/>
-            <a:r>
-              <a:rPr lang="ru-RU" b="0" i="0" dirty="0">
-                <a:effectLst/>
-                <a:latin typeface="fkGroteskNeue"/>
-              </a:rPr>
-              <a:t>Когда использовать WGCNA? Практические рекомендации</a:t>
-            </a:r>
-          </a:p>
-          <a:p>
-            <a:pPr algn="l"/>
-            <a:r>
-              <a:rPr lang="ru-RU" b="0" i="0" dirty="0">
-                <a:effectLst/>
-                <a:latin typeface="fkGroteskNeue"/>
-              </a:rPr>
-              <a:t>Используй WGCNA когда:</a:t>
-            </a:r>
-          </a:p>
-          <a:p>
-            <a:pPr algn="l"/>
-            <a:r>
-              <a:rPr lang="ru-RU" b="0" i="0" dirty="0">
-                <a:effectLst/>
-                <a:latin typeface="fkGroteskNeue"/>
-              </a:rPr>
-              <a:t>✓ Много генов (&gt; 5,000) → есть что анализировать</a:t>
-            </a:r>
-            <a:br>
-              <a:rPr lang="ru-RU" b="0" i="0" dirty="0">
-                <a:effectLst/>
-                <a:latin typeface="fkGroteskNeue"/>
-              </a:rPr>
-            </a:br>
-            <a:r>
-              <a:rPr lang="ru-RU" b="0" i="0" dirty="0">
-                <a:effectLst/>
-                <a:latin typeface="fkGroteskNeue"/>
-              </a:rPr>
-              <a:t>✓ Много образцов (&gt; 100) → достаточно вариации для надёжных корреляций</a:t>
-            </a:r>
-            <a:br>
-              <a:rPr lang="ru-RU" b="0" i="0" dirty="0">
-                <a:effectLst/>
-                <a:latin typeface="fkGroteskNeue"/>
-              </a:rPr>
-            </a:br>
-            <a:r>
-              <a:rPr lang="ru-RU" b="0" i="0" dirty="0">
-                <a:effectLst/>
-                <a:latin typeface="fkGroteskNeue"/>
-              </a:rPr>
-              <a:t>✓ Есть матрица экспрессии (RNA-</a:t>
-            </a:r>
-            <a:r>
-              <a:rPr lang="ru-RU" b="0" i="0" dirty="0" err="1">
-                <a:effectLst/>
-                <a:latin typeface="fkGroteskNeue"/>
-              </a:rPr>
-              <a:t>seq</a:t>
-            </a:r>
-            <a:r>
-              <a:rPr lang="ru-RU" b="0" i="0" dirty="0">
-                <a:effectLst/>
-                <a:latin typeface="fkGroteskNeue"/>
-              </a:rPr>
-              <a:t> или </a:t>
-            </a:r>
-            <a:r>
-              <a:rPr lang="ru-RU" b="0" i="0" dirty="0" err="1">
-                <a:effectLst/>
-                <a:latin typeface="fkGroteskNeue"/>
-              </a:rPr>
-              <a:t>microarray</a:t>
-            </a:r>
-            <a:r>
-              <a:rPr lang="ru-RU" b="0" i="0" dirty="0">
-                <a:effectLst/>
-                <a:latin typeface="fkGroteskNeue"/>
-              </a:rPr>
-              <a:t>)</a:t>
-            </a:r>
-            <a:br>
-              <a:rPr lang="ru-RU" b="0" i="0" dirty="0">
-                <a:effectLst/>
-                <a:latin typeface="fkGroteskNeue"/>
-              </a:rPr>
-            </a:br>
-            <a:r>
-              <a:rPr lang="ru-RU" b="0" i="0" dirty="0">
-                <a:effectLst/>
-                <a:latin typeface="fkGroteskNeue"/>
-              </a:rPr>
-              <a:t>✓ Интересует модульная/системная структура (не просто классификация)</a:t>
-            </a:r>
-            <a:br>
-              <a:rPr lang="ru-RU" b="0" i="0" dirty="0">
-                <a:effectLst/>
-                <a:latin typeface="fkGroteskNeue"/>
-              </a:rPr>
-            </a:br>
-            <a:r>
-              <a:rPr lang="ru-RU" b="0" i="0" dirty="0">
-                <a:effectLst/>
-                <a:latin typeface="fkGroteskNeue"/>
-              </a:rPr>
-              <a:t>✓ Есть фенотип для корреляции модулей</a:t>
-            </a:r>
-          </a:p>
-          <a:p>
-            <a:pPr algn="l"/>
-            <a:r>
-              <a:rPr lang="ru-RU" b="0" i="0" dirty="0">
-                <a:effectLst/>
-                <a:latin typeface="fkGroteskNeue"/>
-              </a:rPr>
-              <a:t>Не используй WGCNA когда:</a:t>
-            </a:r>
-          </a:p>
-          <a:p>
-            <a:pPr algn="l"/>
-            <a:r>
-              <a:rPr lang="ru-RU" b="0" i="0" dirty="0">
-                <a:effectLst/>
-                <a:latin typeface="fkGroteskNeue"/>
-              </a:rPr>
-              <a:t>✗ Мало генов (&lt; 1,000) — недостаточно для модулей</a:t>
-            </a:r>
-            <a:br>
-              <a:rPr lang="ru-RU" b="0" i="0" dirty="0">
-                <a:effectLst/>
-                <a:latin typeface="fkGroteskNeue"/>
-              </a:rPr>
-            </a:br>
-            <a:r>
-              <a:rPr lang="ru-RU" b="0" i="0" dirty="0">
-                <a:effectLst/>
-                <a:latin typeface="fkGroteskNeue"/>
-              </a:rPr>
-              <a:t>✗ Мало образцов (&lt; 50) — корреляции неустойчивы</a:t>
-            </a:r>
-            <a:br>
-              <a:rPr lang="ru-RU" b="0" i="0" dirty="0">
-                <a:effectLst/>
-                <a:latin typeface="fkGroteskNeue"/>
-              </a:rPr>
-            </a:br>
-            <a:r>
-              <a:rPr lang="ru-RU" b="0" i="0" dirty="0">
-                <a:effectLst/>
-                <a:latin typeface="fkGroteskNeue"/>
-              </a:rPr>
-              <a:t>✗ Нужна чистая классификация (используй </a:t>
-            </a:r>
-            <a:r>
-              <a:rPr lang="ru-RU" b="0" i="0" dirty="0" err="1">
-                <a:effectLst/>
-                <a:latin typeface="fkGroteskNeue"/>
-              </a:rPr>
-              <a:t>Random</a:t>
-            </a:r>
-            <a:r>
-              <a:rPr lang="ru-RU" b="0" i="0" dirty="0">
-                <a:effectLst/>
-                <a:latin typeface="fkGroteskNeue"/>
-              </a:rPr>
-              <a:t> </a:t>
-            </a:r>
-            <a:r>
-              <a:rPr lang="ru-RU" b="0" i="0" dirty="0" err="1">
-                <a:effectLst/>
-                <a:latin typeface="fkGroteskNeue"/>
-              </a:rPr>
-              <a:t>Forest</a:t>
-            </a:r>
-            <a:r>
-              <a:rPr lang="ru-RU" b="0" i="0" dirty="0">
-                <a:effectLst/>
-                <a:latin typeface="fkGroteskNeue"/>
-              </a:rPr>
-              <a:t>)</a:t>
-            </a:r>
-            <a:br>
-              <a:rPr lang="ru-RU" b="0" i="0" dirty="0">
-                <a:effectLst/>
-                <a:latin typeface="fkGroteskNeue"/>
-              </a:rPr>
-            </a:br>
-            <a:r>
-              <a:rPr lang="ru-RU" b="0" i="0" dirty="0">
-                <a:effectLst/>
-                <a:latin typeface="fkGroteskNeue"/>
-              </a:rPr>
-              <a:t>✗ Только 2 образца (нет вариации для корреляций)</a:t>
-            </a:r>
-            <a:br>
-              <a:rPr lang="ru-RU" b="0" i="0" dirty="0">
-                <a:effectLst/>
-                <a:latin typeface="fkGroteskNeue"/>
-              </a:rPr>
-            </a:br>
-            <a:r>
-              <a:rPr lang="ru-RU" b="0" i="0" dirty="0">
-                <a:effectLst/>
-                <a:latin typeface="fkGroteskNeue"/>
-              </a:rPr>
-              <a:t>✗ Данные уже </a:t>
-            </a:r>
-            <a:r>
-              <a:rPr lang="ru-RU" b="0" i="0" dirty="0" err="1">
-                <a:effectLst/>
-                <a:latin typeface="fkGroteskNeue"/>
-              </a:rPr>
-              <a:t>предотработаны</a:t>
-            </a:r>
-            <a:r>
-              <a:rPr lang="ru-RU" b="0" i="0" dirty="0">
-                <a:effectLst/>
-                <a:latin typeface="fkGroteskNeue"/>
-              </a:rPr>
-              <a:t> специфично для классификации</a:t>
-            </a:r>
-          </a:p>
-          <a:p>
-            <a:pPr algn="l"/>
-            <a:r>
-              <a:rPr lang="ru-RU" b="0" i="0" dirty="0">
-                <a:effectLst/>
-                <a:latin typeface="fkGroteskNeue"/>
-              </a:rPr>
-              <a:t>Альтернативы:</a:t>
-            </a:r>
-          </a:p>
-          <a:p>
-            <a:pPr algn="l"/>
-            <a:r>
-              <a:rPr lang="ru-RU" b="0" i="0" dirty="0">
-                <a:effectLst/>
-                <a:latin typeface="fkGroteskNeue"/>
-              </a:rPr>
-              <a:t>Если нужно быстро:</a:t>
-            </a:r>
-          </a:p>
-          <a:p>
-            <a:pPr algn="l">
-              <a:buFont typeface="+mj-lt"/>
-              <a:buAutoNum type="arabicPeriod"/>
-            </a:pPr>
-            <a:r>
-              <a:rPr lang="ru-RU" b="0" i="0" dirty="0">
-                <a:effectLst/>
-                <a:latin typeface="fkGroteskNeue"/>
-              </a:rPr>
-              <a:t>Возьми </a:t>
-            </a:r>
-            <a:r>
-              <a:rPr lang="ru-RU" b="0" i="0" dirty="0" err="1">
-                <a:effectLst/>
-                <a:latin typeface="fkGroteskNeue"/>
-              </a:rPr>
-              <a:t>top</a:t>
-            </a:r>
-            <a:r>
-              <a:rPr lang="ru-RU" b="0" i="0" dirty="0">
-                <a:effectLst/>
-                <a:latin typeface="fkGroteskNeue"/>
-              </a:rPr>
-              <a:t> 500-1,000 генов по p-</a:t>
-            </a:r>
-            <a:r>
-              <a:rPr lang="ru-RU" b="0" i="0" dirty="0" err="1">
-                <a:effectLst/>
-                <a:latin typeface="fkGroteskNeue"/>
-              </a:rPr>
-              <a:t>value</a:t>
-            </a:r>
-            <a:r>
-              <a:rPr lang="ru-RU" b="0" i="0" dirty="0">
-                <a:effectLst/>
-                <a:latin typeface="fkGroteskNeue"/>
-              </a:rPr>
-              <a:t> (дифференциальная экспрессия)</a:t>
-            </a:r>
-          </a:p>
-          <a:p>
-            <a:pPr algn="l">
-              <a:buFont typeface="+mj-lt"/>
-              <a:buAutoNum type="arabicPeriod"/>
-            </a:pPr>
-            <a:r>
-              <a:rPr lang="ru-RU" b="0" i="0" dirty="0">
-                <a:effectLst/>
-                <a:latin typeface="fkGroteskNeue"/>
-              </a:rPr>
-              <a:t>Построй сеть на них (меньше генов = быстрее)</a:t>
-            </a:r>
-          </a:p>
-          <a:p>
-            <a:pPr algn="l">
-              <a:buFont typeface="+mj-lt"/>
-              <a:buAutoNum type="arabicPeriod"/>
-            </a:pPr>
-            <a:r>
-              <a:rPr lang="ru-RU" b="0" i="0" dirty="0">
-                <a:effectLst/>
-                <a:latin typeface="fkGroteskNeue"/>
-              </a:rPr>
-              <a:t>Проведи обнаружение модулей</a:t>
-            </a:r>
-          </a:p>
-          <a:p>
-            <a:pPr algn="l"/>
-            <a:r>
-              <a:rPr lang="ru-RU" b="0" i="0" dirty="0">
-                <a:effectLst/>
-                <a:latin typeface="fkGroteskNeue"/>
-              </a:rPr>
-              <a:t>Минусы: потеряешь слабые сигналы</a:t>
-            </a:r>
-          </a:p>
-          <a:p>
-            <a:pPr algn="l"/>
-            <a:r>
-              <a:rPr lang="ru-RU" b="0" i="0" dirty="0">
-                <a:effectLst/>
-                <a:latin typeface="fkGroteskNeue"/>
-              </a:rPr>
-              <a:t>Если нужна сложность (</a:t>
-            </a:r>
-            <a:r>
-              <a:rPr lang="ru-RU" b="0" i="0" dirty="0" err="1">
-                <a:effectLst/>
-                <a:latin typeface="fkGroteskNeue"/>
-              </a:rPr>
-              <a:t>multi-omics</a:t>
-            </a:r>
-            <a:r>
-              <a:rPr lang="ru-RU" b="0" i="0" dirty="0">
-                <a:effectLst/>
-                <a:latin typeface="fkGroteskNeue"/>
-              </a:rPr>
-              <a:t>):</a:t>
-            </a:r>
-          </a:p>
-          <a:p>
-            <a:pPr algn="l"/>
-            <a:r>
-              <a:rPr lang="ru-RU" b="0" i="0" dirty="0">
-                <a:effectLst/>
-                <a:latin typeface="fkGroteskNeue"/>
-              </a:rPr>
-              <a:t>Используй MOFA вместо WGCNA</a:t>
-            </a:r>
-          </a:p>
-          <a:p>
-            <a:pPr algn="l"/>
-            <a:r>
-              <a:rPr lang="ru-RU" b="0" i="0" dirty="0">
-                <a:effectLst/>
-                <a:latin typeface="fkGroteskNeue"/>
-              </a:rPr>
-              <a:t>Если нужны граф-нейросети:</a:t>
-            </a:r>
-          </a:p>
-          <a:p>
-            <a:pPr algn="l"/>
-            <a:r>
-              <a:rPr lang="ru-RU" b="0" i="0" dirty="0" err="1">
-                <a:effectLst/>
-                <a:latin typeface="fkGroteskNeue"/>
-              </a:rPr>
-              <a:t>Graph</a:t>
-            </a:r>
-            <a:r>
-              <a:rPr lang="ru-RU" b="0" i="0" dirty="0">
-                <a:effectLst/>
-                <a:latin typeface="fkGroteskNeue"/>
-              </a:rPr>
-              <a:t> </a:t>
-            </a:r>
-            <a:r>
-              <a:rPr lang="ru-RU" b="0" i="0" dirty="0" err="1">
-                <a:effectLst/>
-                <a:latin typeface="fkGroteskNeue"/>
-              </a:rPr>
-              <a:t>Neural</a:t>
-            </a:r>
-            <a:r>
-              <a:rPr lang="ru-RU" b="0" i="0" dirty="0">
-                <a:effectLst/>
-                <a:latin typeface="fkGroteskNeue"/>
-              </a:rPr>
-              <a:t> Networks (GNN) могут учить граф-структуру + данные одновременно</a:t>
-            </a:r>
-          </a:p>
-          <a:p>
-            <a:pPr algn="l"/>
-            <a:r>
-              <a:rPr lang="ru-RU" b="0" i="0" dirty="0">
-                <a:effectLst/>
-                <a:latin typeface="fkGroteskNeue"/>
-              </a:rPr>
-              <a:t>Сложнее, но более мощно</a:t>
-            </a:r>
-          </a:p>
-          <a:p>
-            <a:endParaRPr lang="ru-RU" sz="1200" b="0" i="0" kern="1200" dirty="0">
-              <a:solidFill>
-                <a:schemeClr val="tx1"/>
-              </a:solidFill>
-              <a:latin typeface="+mn-lt"/>
-              <a:ea typeface="+mn-ea"/>
-              <a:cs typeface="+mn-cs"/>
-            </a:endParaRPr>
-          </a:p>
-          <a:p>
             <a:endParaRPr lang="ru-RU" sz="1200" b="0" i="0" kern="1200" dirty="0">
               <a:solidFill>
                 <a:schemeClr val="tx1"/>
@@ -5703,136 +1540,6 @@
           <a:bodyPr/>
           <a:lstStyle/>
           <a:p>
-            <a:pPr algn="l"/>
-            <a:r>
-              <a:rPr lang="ru-RU" b="0" i="0" dirty="0">
-                <a:effectLst/>
-                <a:latin typeface="fkGroteskNeue"/>
-              </a:rPr>
-              <a:t>Добрый день! Мы уже прошли 3 лекции. Классификация, продвинутые техники, анализ выживаемости.</a:t>
-            </a:r>
-          </a:p>
-          <a:p>
-            <a:pPr algn="l"/>
-            <a:r>
-              <a:rPr lang="ru-RU" b="0" i="0" dirty="0">
-                <a:effectLst/>
-                <a:latin typeface="fkGroteskNeue"/>
-              </a:rPr>
-              <a:t>На все эти лекции мы смотрели на отдельные признаки — один ген, один белок, один клинический параметр.</a:t>
-            </a:r>
-          </a:p>
-          <a:p>
-            <a:pPr algn="l"/>
-            <a:r>
-              <a:rPr lang="ru-RU" b="0" i="0" dirty="0">
-                <a:effectLst/>
-                <a:latin typeface="fkGroteskNeue"/>
-              </a:rPr>
-              <a:t>Но в реальности гены и белки не работают отдельно.</a:t>
-            </a:r>
-          </a:p>
-          <a:p>
-            <a:pPr algn="l"/>
-            <a:r>
-              <a:rPr lang="ru-RU" b="0" i="0" dirty="0">
-                <a:effectLst/>
-                <a:latin typeface="fkGroteskNeue"/>
-              </a:rPr>
-              <a:t>Пример. Вы приходите к врачу с кашлем.</a:t>
-            </a:r>
-          </a:p>
-          <a:p>
-            <a:pPr algn="l"/>
-            <a:r>
-              <a:rPr lang="ru-RU" b="0" i="0" dirty="0">
-                <a:effectLst/>
-                <a:latin typeface="fkGroteskNeue"/>
-              </a:rPr>
-              <a:t>Плохой врач: "Кашель → простуда" (один симптом → один диагноз)</a:t>
-            </a:r>
-          </a:p>
-          <a:p>
-            <a:pPr algn="l"/>
-            <a:r>
-              <a:rPr lang="ru-RU" b="0" i="0" dirty="0">
-                <a:effectLst/>
-                <a:latin typeface="fkGroteskNeue"/>
-              </a:rPr>
-              <a:t>Хороший врач: смотрит всю картину — кашель + температура + боль в горле + недавний контакт с больными → диагноз "грипп"</a:t>
-            </a:r>
-          </a:p>
-          <a:p>
-            <a:pPr algn="l"/>
-            <a:r>
-              <a:rPr lang="ru-RU" b="0" i="0" dirty="0">
-                <a:effectLst/>
-                <a:latin typeface="fkGroteskNeue"/>
-              </a:rPr>
-              <a:t>То же с молекулярной биологией!</a:t>
-            </a:r>
-          </a:p>
-          <a:p>
-            <a:pPr algn="l"/>
-            <a:r>
-              <a:rPr lang="ru-RU" b="0" i="0" dirty="0">
-                <a:effectLst/>
-                <a:latin typeface="fkGroteskNeue"/>
-              </a:rPr>
-              <a:t>Ген A имеет мутацию → вроде опасно. Но если гены B и C компенсируют → может быть всё ОК.</a:t>
-            </a:r>
-          </a:p>
-          <a:p>
-            <a:pPr algn="l"/>
-            <a:r>
-              <a:rPr lang="ru-RU" b="0" i="0" dirty="0">
-                <a:effectLst/>
-                <a:latin typeface="fkGroteskNeue"/>
-              </a:rPr>
-              <a:t>Или наоборот: ген A не имеет мутации, но гены B, C, D, E все активны → значит система скомпрометирована.</a:t>
-            </a:r>
-          </a:p>
-          <a:p>
-            <a:pPr algn="l"/>
-            <a:r>
-              <a:rPr lang="ru-RU" b="0" i="0" dirty="0">
-                <a:effectLst/>
-                <a:latin typeface="fkGroteskNeue"/>
-              </a:rPr>
-              <a:t>Это и есть "системный" подход. Анализ генных сетей.</a:t>
-            </a:r>
-          </a:p>
-          <a:p>
-            <a:pPr algn="l"/>
-            <a:r>
-              <a:rPr lang="ru-RU" b="0" i="0" dirty="0">
-                <a:effectLst/>
-                <a:latin typeface="fkGroteskNeue"/>
-              </a:rPr>
-              <a:t>Вместо вопроса "Какой ген предсказывает рак?" мы спрашиваем:</a:t>
-            </a:r>
-          </a:p>
-          <a:p>
-            <a:pPr algn="l"/>
-            <a:r>
-              <a:rPr lang="ru-RU" b="0" i="0" dirty="0">
-                <a:effectLst/>
-                <a:latin typeface="fkGroteskNeue"/>
-              </a:rPr>
-              <a:t>"Какой модуль генов, работающих как единая система, предсказывает рак?"</a:t>
-            </a:r>
-          </a:p>
-          <a:p>
-            <a:pPr algn="l"/>
-            <a:r>
-              <a:rPr lang="ru-RU" b="0" i="0" dirty="0">
-                <a:effectLst/>
-                <a:latin typeface="fkGroteskNeue"/>
-              </a:rPr>
-              <a:t>И всегда модули работают лучше, чем одиночные гены!</a:t>
-            </a:r>
-          </a:p>
-          <a:p>
             <a:endParaRPr lang="ru-RU" sz="1200" b="0" i="0" kern="1200" dirty="0">
               <a:solidFill>
                 <a:schemeClr val="tx1"/>
@@ -5926,600 +1633,6 @@
           <a:lstStyle/>
           <a:p>
             <a:pPr algn="l"/>
-            <a:r>
-              <a:rPr lang="ru-RU" b="0" i="0" dirty="0">
-                <a:effectLst/>
-                <a:latin typeface="fkGroteskNeue"/>
-              </a:rPr>
-              <a:t>Типичные ошибки в WGCNA</a:t>
-            </a:r>
-          </a:p>
-          <a:p>
-            <a:pPr algn="l"/>
-            <a:r>
-              <a:rPr lang="ru-RU" b="0" i="0" dirty="0">
-                <a:effectLst/>
-                <a:latin typeface="fkGroteskNeue"/>
-              </a:rPr>
-              <a:t>❌ Ошибка 1: Не настраивать β (</a:t>
-            </a:r>
-            <a:r>
-              <a:rPr lang="ru-RU" b="0" i="0" dirty="0" err="1">
-                <a:effectLst/>
-                <a:latin typeface="fkGroteskNeue"/>
-              </a:rPr>
-              <a:t>soft-thresholding</a:t>
-            </a:r>
-            <a:r>
-              <a:rPr lang="ru-RU" b="0" i="0" dirty="0">
-                <a:effectLst/>
-                <a:latin typeface="fkGroteskNeue"/>
-              </a:rPr>
-              <a:t> </a:t>
-            </a:r>
-            <a:r>
-              <a:rPr lang="ru-RU" b="0" i="0" dirty="0" err="1">
-                <a:effectLst/>
-                <a:latin typeface="fkGroteskNeue"/>
-              </a:rPr>
-              <a:t>power</a:t>
-            </a:r>
-            <a:r>
-              <a:rPr lang="ru-RU" b="0" i="0" dirty="0">
-                <a:effectLst/>
-                <a:latin typeface="fkGroteskNeue"/>
-              </a:rPr>
-              <a:t>)</a:t>
-            </a:r>
-          </a:p>
-          <a:p>
-            <a:pPr algn="l"/>
-            <a:r>
-              <a:rPr lang="ru-RU" b="0" i="0" dirty="0">
-                <a:effectLst/>
-                <a:latin typeface="fkGroteskNeue"/>
-              </a:rPr>
-              <a:t>Неправильно: просто взять β = 12 по умолчанию</a:t>
-            </a:r>
-          </a:p>
-          <a:p>
-            <a:pPr algn="l"/>
-            <a:r>
-              <a:rPr lang="ru-RU" b="0" i="0" dirty="0">
-                <a:effectLst/>
-                <a:latin typeface="fkGroteskNeue"/>
-              </a:rPr>
-              <a:t>Правильно: использовать функцию </a:t>
-            </a:r>
-            <a:r>
-              <a:rPr lang="ru-RU" b="0" i="0" dirty="0" err="1">
-                <a:effectLst/>
-                <a:latin typeface="fkGroteskNeue"/>
-              </a:rPr>
-              <a:t>pickSoftThreshold</a:t>
-            </a:r>
-            <a:r>
-              <a:rPr lang="ru-RU" b="0" i="0" dirty="0">
-                <a:effectLst/>
-                <a:latin typeface="fkGroteskNeue"/>
-              </a:rPr>
-              <a:t>() для вашего </a:t>
-            </a:r>
-            <a:r>
-              <a:rPr lang="ru-RU" b="0" i="0" dirty="0" err="1">
-                <a:effectLst/>
-                <a:latin typeface="fkGroteskNeue"/>
-              </a:rPr>
-              <a:t>датасета</a:t>
-            </a:r>
-            <a:endParaRPr lang="ru-RU" b="0" i="0" dirty="0">
-              <a:effectLst/>
-              <a:latin typeface="fkGroteskNeue"/>
-            </a:endParaRPr>
-          </a:p>
-          <a:p>
-            <a:pPr algn="l"/>
-            <a:r>
-              <a:rPr lang="ru-RU" b="0" i="0" dirty="0">
-                <a:effectLst/>
-                <a:latin typeface="fkGroteskNeue"/>
-              </a:rPr>
-              <a:t>Важно: β зависит от типа данных, вида корреляции</a:t>
-            </a:r>
-          </a:p>
-          <a:p>
-            <a:pPr algn="l"/>
-            <a:r>
-              <a:rPr lang="ru-RU" b="0" i="0" dirty="0">
-                <a:effectLst/>
-                <a:latin typeface="fkGroteskNeue"/>
-              </a:rPr>
-              <a:t>❌ Ошибка 2: Неправильная фильтрация генов</a:t>
-            </a:r>
-          </a:p>
-          <a:p>
-            <a:pPr algn="l"/>
-            <a:r>
-              <a:rPr lang="ru-RU" b="0" i="0" dirty="0">
-                <a:effectLst/>
-                <a:latin typeface="fkGroteskNeue"/>
-              </a:rPr>
-              <a:t>Неправильно: выбрать </a:t>
-            </a:r>
-            <a:r>
-              <a:rPr lang="ru-RU" b="0" i="0" dirty="0" err="1">
-                <a:effectLst/>
-                <a:latin typeface="fkGroteskNeue"/>
-              </a:rPr>
-              <a:t>top</a:t>
-            </a:r>
-            <a:r>
-              <a:rPr lang="ru-RU" b="0" i="0" dirty="0">
-                <a:effectLst/>
-                <a:latin typeface="fkGroteskNeue"/>
-              </a:rPr>
-              <a:t> 5,000 генов по </a:t>
-            </a:r>
-            <a:r>
-              <a:rPr lang="ru-RU" b="0" i="0" dirty="0" err="1">
-                <a:effectLst/>
-                <a:latin typeface="fkGroteskNeue"/>
-              </a:rPr>
-              <a:t>variance</a:t>
-            </a:r>
-            <a:r>
-              <a:rPr lang="ru-RU" b="0" i="0" dirty="0">
-                <a:effectLst/>
-                <a:latin typeface="fkGroteskNeue"/>
-              </a:rPr>
-              <a:t> (может быть это шум!)</a:t>
-            </a:r>
-          </a:p>
-          <a:p>
-            <a:pPr algn="l"/>
-            <a:r>
-              <a:rPr lang="ru-RU" b="0" i="0" dirty="0">
-                <a:effectLst/>
-                <a:latin typeface="fkGroteskNeue"/>
-              </a:rPr>
-              <a:t>Правильно: фильтровать биологически</a:t>
-            </a:r>
-          </a:p>
-          <a:p>
-            <a:pPr algn="l">
-              <a:buFont typeface="Arial" panose="020B0604020202020204" pitchFamily="34" charset="0"/>
-              <a:buChar char="•"/>
-            </a:pPr>
-            <a:r>
-              <a:rPr lang="ru-RU" b="0" i="0" dirty="0">
-                <a:effectLst/>
-                <a:latin typeface="fkGroteskNeue"/>
-              </a:rPr>
-              <a:t>Удалить гены низкой экспрессии (&lt; 1 CPM)</a:t>
-            </a:r>
-          </a:p>
-          <a:p>
-            <a:pPr algn="l">
-              <a:buFont typeface="Arial" panose="020B0604020202020204" pitchFamily="34" charset="0"/>
-              <a:buChar char="•"/>
-            </a:pPr>
-            <a:r>
-              <a:rPr lang="ru-RU" b="0" i="0" dirty="0">
-                <a:effectLst/>
-                <a:latin typeface="fkGroteskNeue"/>
-              </a:rPr>
-              <a:t>Удалить митохондриальные гены (не </a:t>
-            </a:r>
-            <a:r>
-              <a:rPr lang="ru-RU" b="0" i="0" dirty="0" err="1">
-                <a:effectLst/>
-                <a:latin typeface="fkGroteskNeue"/>
-              </a:rPr>
-              <a:t>релевантны</a:t>
-            </a:r>
-            <a:r>
-              <a:rPr lang="ru-RU" b="0" i="0" dirty="0">
-                <a:effectLst/>
-                <a:latin typeface="fkGroteskNeue"/>
-              </a:rPr>
-              <a:t> для болезни)</a:t>
-            </a:r>
-          </a:p>
-          <a:p>
-            <a:pPr algn="l">
-              <a:buFont typeface="Arial" panose="020B0604020202020204" pitchFamily="34" charset="0"/>
-              <a:buChar char="•"/>
-            </a:pPr>
-            <a:r>
-              <a:rPr lang="ru-RU" b="0" i="0" dirty="0">
-                <a:effectLst/>
-                <a:latin typeface="fkGroteskNeue"/>
-              </a:rPr>
-              <a:t>Удалить </a:t>
-            </a:r>
-            <a:r>
-              <a:rPr lang="ru-RU" b="0" i="0" dirty="0" err="1">
-                <a:effectLst/>
-                <a:latin typeface="fkGroteskNeue"/>
-              </a:rPr>
-              <a:t>рибосомальные</a:t>
-            </a:r>
-            <a:r>
-              <a:rPr lang="ru-RU" b="0" i="0" dirty="0">
-                <a:effectLst/>
-                <a:latin typeface="fkGroteskNeue"/>
-              </a:rPr>
-              <a:t> гены (техническая </a:t>
-            </a:r>
-            <a:r>
-              <a:rPr lang="ru-RU" b="0" i="0" dirty="0" err="1">
-                <a:effectLst/>
-                <a:latin typeface="fkGroteskNeue"/>
-              </a:rPr>
-              <a:t>констомиляция</a:t>
-            </a:r>
-            <a:r>
-              <a:rPr lang="ru-RU" b="0" i="0" dirty="0">
-                <a:effectLst/>
-                <a:latin typeface="fkGroteskNeue"/>
-              </a:rPr>
-              <a:t>)</a:t>
-            </a:r>
-          </a:p>
-          <a:p>
-            <a:pPr algn="l"/>
-            <a:r>
-              <a:rPr lang="ru-RU" b="0" i="0" dirty="0">
-                <a:effectLst/>
-                <a:latin typeface="fkGroteskNeue"/>
-              </a:rPr>
-              <a:t>Результат: чище данные → чище сети</a:t>
-            </a:r>
-          </a:p>
-          <a:p>
-            <a:pPr algn="l"/>
-            <a:r>
-              <a:rPr lang="ru-RU" b="0" i="0" dirty="0">
-                <a:effectLst/>
-                <a:latin typeface="fkGroteskNeue"/>
-              </a:rPr>
-              <a:t>❌ Ошибка 3: Неправильный размер модуля</a:t>
-            </a:r>
-          </a:p>
-          <a:p>
-            <a:pPr algn="l"/>
-            <a:r>
-              <a:rPr lang="ru-RU" b="0" i="0" dirty="0">
-                <a:effectLst/>
-                <a:latin typeface="fkGroteskNeue"/>
-              </a:rPr>
-              <a:t>Слишком маленькие модули (&lt; 30 генов):</a:t>
-            </a:r>
-          </a:p>
-          <a:p>
-            <a:pPr algn="l">
-              <a:buFont typeface="Arial" panose="020B0604020202020204" pitchFamily="34" charset="0"/>
-              <a:buChar char="•"/>
-            </a:pPr>
-            <a:r>
-              <a:rPr lang="ru-RU" b="0" i="0" dirty="0">
-                <a:effectLst/>
-                <a:latin typeface="fkGroteskNeue"/>
-              </a:rPr>
-              <a:t>Нестабильные (случайно могут соединиться)</a:t>
-            </a:r>
-          </a:p>
-          <a:p>
-            <a:pPr algn="l">
-              <a:buFont typeface="Arial" panose="020B0604020202020204" pitchFamily="34" charset="0"/>
-              <a:buChar char="•"/>
-            </a:pPr>
-            <a:r>
-              <a:rPr lang="ru-RU" b="0" i="0" dirty="0">
-                <a:effectLst/>
-                <a:latin typeface="fkGroteskNeue"/>
-              </a:rPr>
-              <a:t>Трудно функционально интерпретировать</a:t>
-            </a:r>
-          </a:p>
-          <a:p>
-            <a:pPr algn="l"/>
-            <a:r>
-              <a:rPr lang="ru-RU" b="0" i="0" dirty="0">
-                <a:effectLst/>
-                <a:latin typeface="fkGroteskNeue"/>
-              </a:rPr>
-              <a:t>Слишком большие модули (&gt; 1,000 генов):</a:t>
-            </a:r>
-          </a:p>
-          <a:p>
-            <a:pPr algn="l">
-              <a:buFont typeface="Arial" panose="020B0604020202020204" pitchFamily="34" charset="0"/>
-              <a:buChar char="•"/>
-            </a:pPr>
-            <a:r>
-              <a:rPr lang="ru-RU" b="0" i="0" dirty="0">
-                <a:effectLst/>
-                <a:latin typeface="fkGroteskNeue"/>
-              </a:rPr>
-              <a:t>Теряется структура (всё в один модуль)</a:t>
-            </a:r>
-          </a:p>
-          <a:p>
-            <a:pPr algn="l">
-              <a:buFont typeface="Arial" panose="020B0604020202020204" pitchFamily="34" charset="0"/>
-              <a:buChar char="•"/>
-            </a:pPr>
-            <a:r>
-              <a:rPr lang="ru-RU" b="0" i="0" dirty="0" err="1">
-                <a:effectLst/>
-                <a:latin typeface="fkGroteskNeue"/>
-              </a:rPr>
-              <a:t>Неинтерпретируемы</a:t>
-            </a:r>
-            <a:endParaRPr lang="ru-RU" b="0" i="0" dirty="0">
-              <a:effectLst/>
-              <a:latin typeface="fkGroteskNeue"/>
-            </a:endParaRPr>
-          </a:p>
-          <a:p>
-            <a:pPr algn="l"/>
-            <a:r>
-              <a:rPr lang="ru-RU" b="0" i="0" dirty="0">
-                <a:effectLst/>
-                <a:latin typeface="fkGroteskNeue"/>
-              </a:rPr>
-              <a:t>Оптимум: 50-300 генов на модуль</a:t>
-            </a:r>
-          </a:p>
-          <a:p>
-            <a:pPr algn="l"/>
-            <a:r>
-              <a:rPr lang="ru-RU" b="0" i="0" dirty="0">
-                <a:effectLst/>
-                <a:latin typeface="fkGroteskNeue"/>
-              </a:rPr>
-              <a:t>❌ Ошибка 4: </a:t>
-            </a:r>
-            <a:r>
-              <a:rPr lang="ru-RU" b="0" i="0" dirty="0" err="1">
-                <a:effectLst/>
-                <a:latin typeface="fkGroteskNeue"/>
-              </a:rPr>
-              <a:t>Переовер</a:t>
-            </a:r>
-            <a:r>
-              <a:rPr lang="ru-RU" b="0" i="0" dirty="0">
-                <a:effectLst/>
-                <a:latin typeface="fkGroteskNeue"/>
-              </a:rPr>
-              <a:t>-интерпретировать корреляцию</a:t>
-            </a:r>
-          </a:p>
-          <a:p>
-            <a:pPr algn="l"/>
-            <a:r>
-              <a:rPr lang="ru-RU" b="0" i="0" dirty="0">
-                <a:effectLst/>
-                <a:latin typeface="fkGroteskNeue"/>
-              </a:rPr>
-              <a:t>Модуль коррелирован с выживанием r = 0.7, p &lt; 0.001 → круто!</a:t>
-            </a:r>
-          </a:p>
-          <a:p>
-            <a:pPr algn="l"/>
-            <a:r>
-              <a:rPr lang="ru-RU" b="0" i="0" dirty="0">
-                <a:effectLst/>
-                <a:latin typeface="fkGroteskNeue"/>
-              </a:rPr>
-              <a:t>Но потом на другом </a:t>
-            </a:r>
-            <a:r>
-              <a:rPr lang="ru-RU" b="0" i="0" dirty="0" err="1">
-                <a:effectLst/>
-                <a:latin typeface="fkGroteskNeue"/>
-              </a:rPr>
-              <a:t>датасете</a:t>
-            </a:r>
-            <a:r>
-              <a:rPr lang="ru-RU" b="0" i="0" dirty="0">
-                <a:effectLst/>
-                <a:latin typeface="fkGroteskNeue"/>
-              </a:rPr>
-              <a:t> r = 0.2, p = 0.5 → не </a:t>
-            </a:r>
-            <a:r>
-              <a:rPr lang="ru-RU" b="0" i="0" dirty="0" err="1">
-                <a:effectLst/>
-                <a:latin typeface="fkGroteskNeue"/>
-              </a:rPr>
-              <a:t>репликируется</a:t>
-            </a:r>
-            <a:r>
-              <a:rPr lang="ru-RU" b="0" i="0" dirty="0">
-                <a:effectLst/>
-                <a:latin typeface="fkGroteskNeue"/>
-              </a:rPr>
-              <a:t>!</a:t>
-            </a:r>
-          </a:p>
-          <a:p>
-            <a:pPr algn="l"/>
-            <a:r>
-              <a:rPr lang="ru-RU" b="0" i="0" dirty="0">
-                <a:effectLst/>
-                <a:latin typeface="fkGroteskNeue"/>
-              </a:rPr>
-              <a:t>Решение:</a:t>
-            </a:r>
-          </a:p>
-          <a:p>
-            <a:pPr algn="l">
-              <a:buFont typeface="+mj-lt"/>
-              <a:buAutoNum type="arabicPeriod"/>
-            </a:pPr>
-            <a:r>
-              <a:rPr lang="ru-RU" b="0" i="0" dirty="0">
-                <a:effectLst/>
-                <a:latin typeface="fkGroteskNeue"/>
-              </a:rPr>
-              <a:t>Cross-</a:t>
-            </a:r>
-            <a:r>
-              <a:rPr lang="ru-RU" b="0" i="0" dirty="0" err="1">
-                <a:effectLst/>
-                <a:latin typeface="fkGroteskNeue"/>
-              </a:rPr>
-              <a:t>validation</a:t>
-            </a:r>
-            <a:r>
-              <a:rPr lang="ru-RU" b="0" i="0" dirty="0">
-                <a:effectLst/>
-                <a:latin typeface="fkGroteskNeue"/>
-              </a:rPr>
-              <a:t> на том же </a:t>
-            </a:r>
-            <a:r>
-              <a:rPr lang="ru-RU" b="0" i="0" dirty="0" err="1">
-                <a:effectLst/>
-                <a:latin typeface="fkGroteskNeue"/>
-              </a:rPr>
-              <a:t>датасете</a:t>
-            </a:r>
-            <a:endParaRPr lang="ru-RU" b="0" i="0" dirty="0">
-              <a:effectLst/>
-              <a:latin typeface="fkGroteskNeue"/>
-            </a:endParaRPr>
-          </a:p>
-          <a:p>
-            <a:pPr algn="l">
-              <a:buFont typeface="+mj-lt"/>
-              <a:buAutoNum type="arabicPeriod"/>
-            </a:pPr>
-            <a:r>
-              <a:rPr lang="ru-RU" b="0" i="0" dirty="0">
-                <a:effectLst/>
-                <a:latin typeface="fkGroteskNeue"/>
-              </a:rPr>
-              <a:t>Внешняя валидация на другом </a:t>
-            </a:r>
-            <a:r>
-              <a:rPr lang="ru-RU" b="0" i="0" dirty="0" err="1">
-                <a:effectLst/>
-                <a:latin typeface="fkGroteskNeue"/>
-              </a:rPr>
-              <a:t>датасете</a:t>
-            </a:r>
-            <a:endParaRPr lang="ru-RU" b="0" i="0" dirty="0">
-              <a:effectLst/>
-              <a:latin typeface="fkGroteskNeue"/>
-            </a:endParaRPr>
-          </a:p>
-          <a:p>
-            <a:pPr algn="l">
-              <a:buFont typeface="+mj-lt"/>
-              <a:buAutoNum type="arabicPeriod"/>
-            </a:pPr>
-            <a:r>
-              <a:rPr lang="ru-RU" b="0" i="0" dirty="0">
-                <a:effectLst/>
-                <a:latin typeface="fkGroteskNeue"/>
-              </a:rPr>
-              <a:t>Функциональная валидация (эксперименты)</a:t>
-            </a:r>
-          </a:p>
-          <a:p>
-            <a:pPr algn="l"/>
-            <a:r>
-              <a:rPr lang="ru-RU" b="0" i="0" dirty="0">
-                <a:effectLst/>
-                <a:latin typeface="fkGroteskNeue"/>
-              </a:rPr>
-              <a:t>❌ Ошибка 5: Забыть про </a:t>
-            </a:r>
-            <a:r>
-              <a:rPr lang="ru-RU" b="0" i="0" dirty="0" err="1">
-                <a:effectLst/>
-                <a:latin typeface="fkGroteskNeue"/>
-              </a:rPr>
-              <a:t>batch</a:t>
-            </a:r>
-            <a:r>
-              <a:rPr lang="ru-RU" b="0" i="0" dirty="0">
-                <a:effectLst/>
-                <a:latin typeface="fkGroteskNeue"/>
-              </a:rPr>
-              <a:t> </a:t>
-            </a:r>
-            <a:r>
-              <a:rPr lang="ru-RU" b="0" i="0" dirty="0" err="1">
-                <a:effectLst/>
-                <a:latin typeface="fkGroteskNeue"/>
-              </a:rPr>
-              <a:t>effects</a:t>
-            </a:r>
-            <a:endParaRPr lang="ru-RU" b="0" i="0" dirty="0">
-              <a:effectLst/>
-              <a:latin typeface="fkGroteskNeue"/>
-            </a:endParaRPr>
-          </a:p>
-          <a:p>
-            <a:pPr algn="l"/>
-            <a:r>
-              <a:rPr lang="ru-RU" b="0" i="0" dirty="0">
-                <a:effectLst/>
-                <a:latin typeface="fkGroteskNeue"/>
-              </a:rPr>
-              <a:t>Если данные из разных лабораторий/платформ:</a:t>
-            </a:r>
-          </a:p>
-          <a:p>
-            <a:pPr algn="l">
-              <a:buFont typeface="Arial" panose="020B0604020202020204" pitchFamily="34" charset="0"/>
-              <a:buChar char="•"/>
-            </a:pPr>
-            <a:r>
-              <a:rPr lang="ru-RU" b="0" i="0" dirty="0" err="1">
-                <a:effectLst/>
-                <a:latin typeface="fkGroteskNeue"/>
-              </a:rPr>
-              <a:t>Batch</a:t>
-            </a:r>
-            <a:r>
-              <a:rPr lang="ru-RU" b="0" i="0" dirty="0">
-                <a:effectLst/>
-                <a:latin typeface="fkGroteskNeue"/>
-              </a:rPr>
-              <a:t> </a:t>
-            </a:r>
-            <a:r>
-              <a:rPr lang="ru-RU" b="0" i="0" dirty="0" err="1">
-                <a:effectLst/>
-                <a:latin typeface="fkGroteskNeue"/>
-              </a:rPr>
-              <a:t>effect</a:t>
-            </a:r>
-            <a:r>
-              <a:rPr lang="ru-RU" b="0" i="0" dirty="0">
-                <a:effectLst/>
-                <a:latin typeface="fkGroteskNeue"/>
-              </a:rPr>
-              <a:t> может быть больше, чем биологический сигнал!</a:t>
-            </a:r>
-          </a:p>
-          <a:p>
-            <a:pPr algn="l">
-              <a:buFont typeface="Arial" panose="020B0604020202020204" pitchFamily="34" charset="0"/>
-              <a:buChar char="•"/>
-            </a:pPr>
-            <a:r>
-              <a:rPr lang="ru-RU" b="0" i="0" dirty="0">
-                <a:effectLst/>
-                <a:latin typeface="fkGroteskNeue"/>
-              </a:rPr>
-              <a:t>Нужна нормализация</a:t>
-            </a:r>
             <a:endParaRPr lang="ru-RU" sz="1200" b="0" i="0" kern="1200" dirty="0">
               <a:solidFill>
                 <a:schemeClr val="tx1"/>
@@ -6612,267 +1725,6 @@
           <a:bodyPr/>
           <a:lstStyle/>
           <a:p>
-            <a:pPr algn="l"/>
-            <a:r>
-              <a:rPr lang="ru-RU" b="0" i="0" dirty="0">
-                <a:effectLst/>
-                <a:latin typeface="fkGroteskNeue"/>
-              </a:rPr>
-              <a:t>Интеграция WGCNA с машинным обучением</a:t>
-            </a:r>
-          </a:p>
-          <a:p>
-            <a:pPr algn="l"/>
-            <a:r>
-              <a:rPr lang="ru-RU" b="0" i="0" dirty="0">
-                <a:effectLst/>
-                <a:latin typeface="fkGroteskNeue"/>
-              </a:rPr>
-              <a:t>Идея: использовать модули как новые признаки!</a:t>
-            </a:r>
-          </a:p>
-          <a:p>
-            <a:pPr algn="l"/>
-            <a:r>
-              <a:rPr lang="ru-RU" b="0" i="0" dirty="0">
-                <a:effectLst/>
-                <a:latin typeface="fkGroteskNeue"/>
-              </a:rPr>
-              <a:t>Сравнение:</a:t>
-            </a:r>
-          </a:p>
-          <a:p>
-            <a:pPr algn="l"/>
-            <a:r>
-              <a:rPr lang="ru-RU" b="0" i="0" dirty="0">
-                <a:effectLst/>
-                <a:latin typeface="fkGroteskNeue"/>
-              </a:rPr>
-              <a:t>Вариант 1: </a:t>
-            </a:r>
-            <a:r>
-              <a:rPr lang="ru-RU" b="0" i="0" dirty="0" err="1">
-                <a:effectLst/>
-                <a:latin typeface="fkGroteskNeue"/>
-              </a:rPr>
-              <a:t>Random</a:t>
-            </a:r>
-            <a:r>
-              <a:rPr lang="ru-RU" b="0" i="0" dirty="0">
-                <a:effectLst/>
-                <a:latin typeface="fkGroteskNeue"/>
-              </a:rPr>
-              <a:t> </a:t>
-            </a:r>
-            <a:r>
-              <a:rPr lang="ru-RU" b="0" i="0" dirty="0" err="1">
-                <a:effectLst/>
-                <a:latin typeface="fkGroteskNeue"/>
-              </a:rPr>
-              <a:t>Forest</a:t>
-            </a:r>
-            <a:r>
-              <a:rPr lang="ru-RU" b="0" i="0" dirty="0">
-                <a:effectLst/>
-                <a:latin typeface="fkGroteskNeue"/>
-              </a:rPr>
-              <a:t> на всех генах</a:t>
-            </a:r>
-          </a:p>
-          <a:p>
-            <a:pPr algn="l">
-              <a:buFont typeface="Arial" panose="020B0604020202020204" pitchFamily="34" charset="0"/>
-              <a:buChar char="•"/>
-            </a:pPr>
-            <a:r>
-              <a:rPr lang="ru-RU" b="0" i="0" dirty="0">
-                <a:effectLst/>
-                <a:latin typeface="fkGroteskNeue"/>
-              </a:rPr>
-              <a:t>Входные признаки: 20,000</a:t>
-            </a:r>
-          </a:p>
-          <a:p>
-            <a:pPr algn="l">
-              <a:buFont typeface="Arial" panose="020B0604020202020204" pitchFamily="34" charset="0"/>
-              <a:buChar char="•"/>
-            </a:pPr>
-            <a:r>
-              <a:rPr lang="ru-RU" b="0" i="0" dirty="0">
-                <a:effectLst/>
-                <a:latin typeface="fkGroteskNeue"/>
-              </a:rPr>
-              <a:t>Обучение: медленно (часы)</a:t>
-            </a:r>
-          </a:p>
-          <a:p>
-            <a:pPr algn="l">
-              <a:buFont typeface="Arial" panose="020B0604020202020204" pitchFamily="34" charset="0"/>
-              <a:buChar char="•"/>
-            </a:pPr>
-            <a:r>
-              <a:rPr lang="ru-RU" b="0" i="0" dirty="0">
-                <a:effectLst/>
-                <a:latin typeface="fkGroteskNeue"/>
-              </a:rPr>
-              <a:t>Интерпретация: какие гены важны? (1,000 </a:t>
-            </a:r>
-            <a:r>
-              <a:rPr lang="ru-RU" b="0" i="0" dirty="0" err="1">
-                <a:effectLst/>
-                <a:latin typeface="fkGroteskNeue"/>
-              </a:rPr>
-              <a:t>top</a:t>
-            </a:r>
-            <a:r>
-              <a:rPr lang="ru-RU" b="0" i="0" dirty="0">
-                <a:effectLst/>
-                <a:latin typeface="fkGroteskNeue"/>
-              </a:rPr>
-              <a:t> генов)</a:t>
-            </a:r>
-          </a:p>
-          <a:p>
-            <a:pPr algn="l">
-              <a:buFont typeface="Arial" panose="020B0604020202020204" pitchFamily="34" charset="0"/>
-              <a:buChar char="•"/>
-            </a:pPr>
-            <a:r>
-              <a:rPr lang="ru-RU" b="0" i="0" dirty="0" err="1">
-                <a:effectLst/>
-                <a:latin typeface="fkGroteskNeue"/>
-              </a:rPr>
-              <a:t>Overfitting</a:t>
-            </a:r>
-            <a:r>
-              <a:rPr lang="ru-RU" b="0" i="0" dirty="0">
-                <a:effectLst/>
-                <a:latin typeface="fkGroteskNeue"/>
-              </a:rPr>
-              <a:t> риск: высокий</a:t>
-            </a:r>
-          </a:p>
-          <a:p>
-            <a:pPr algn="l"/>
-            <a:r>
-              <a:rPr lang="ru-RU" b="0" i="0" dirty="0">
-                <a:effectLst/>
-                <a:latin typeface="fkGroteskNeue"/>
-              </a:rPr>
-              <a:t>Вариант 2: </a:t>
-            </a:r>
-            <a:r>
-              <a:rPr lang="ru-RU" b="0" i="0" dirty="0" err="1">
-                <a:effectLst/>
-                <a:latin typeface="fkGroteskNeue"/>
-              </a:rPr>
-              <a:t>Random</a:t>
-            </a:r>
-            <a:r>
-              <a:rPr lang="ru-RU" b="0" i="0" dirty="0">
-                <a:effectLst/>
-                <a:latin typeface="fkGroteskNeue"/>
-              </a:rPr>
-              <a:t> </a:t>
-            </a:r>
-            <a:r>
-              <a:rPr lang="ru-RU" b="0" i="0" dirty="0" err="1">
-                <a:effectLst/>
-                <a:latin typeface="fkGroteskNeue"/>
-              </a:rPr>
-              <a:t>Forest</a:t>
-            </a:r>
-            <a:r>
-              <a:rPr lang="ru-RU" b="0" i="0" dirty="0">
-                <a:effectLst/>
-                <a:latin typeface="fkGroteskNeue"/>
-              </a:rPr>
-              <a:t> на модулях (после WGCNA)</a:t>
-            </a:r>
-          </a:p>
-          <a:p>
-            <a:pPr algn="l">
-              <a:buFont typeface="Arial" panose="020B0604020202020204" pitchFamily="34" charset="0"/>
-              <a:buChar char="•"/>
-            </a:pPr>
-            <a:r>
-              <a:rPr lang="ru-RU" b="0" i="0" dirty="0">
-                <a:effectLst/>
-                <a:latin typeface="fkGroteskNeue"/>
-              </a:rPr>
-              <a:t>Входные признаки: 15 модулей</a:t>
-            </a:r>
-          </a:p>
-          <a:p>
-            <a:pPr algn="l">
-              <a:buFont typeface="Arial" panose="020B0604020202020204" pitchFamily="34" charset="0"/>
-              <a:buChar char="•"/>
-            </a:pPr>
-            <a:r>
-              <a:rPr lang="ru-RU" b="0" i="0" dirty="0">
-                <a:effectLst/>
-                <a:latin typeface="fkGroteskNeue"/>
-              </a:rPr>
-              <a:t>Обучение: быстро (минуты)</a:t>
-            </a:r>
-          </a:p>
-          <a:p>
-            <a:pPr algn="l">
-              <a:buFont typeface="Arial" panose="020B0604020202020204" pitchFamily="34" charset="0"/>
-              <a:buChar char="•"/>
-            </a:pPr>
-            <a:r>
-              <a:rPr lang="ru-RU" b="0" i="0" dirty="0">
-                <a:effectLst/>
-                <a:latin typeface="fkGroteskNeue"/>
-              </a:rPr>
-              <a:t>Интерпретация: какие модули важны? (очень ясно)</a:t>
-            </a:r>
-          </a:p>
-          <a:p>
-            <a:pPr algn="l">
-              <a:buFont typeface="Arial" panose="020B0604020202020204" pitchFamily="34" charset="0"/>
-              <a:buChar char="•"/>
-            </a:pPr>
-            <a:r>
-              <a:rPr lang="ru-RU" b="0" i="0" dirty="0" err="1">
-                <a:effectLst/>
-                <a:latin typeface="fkGroteskNeue"/>
-              </a:rPr>
-              <a:t>Overfitting</a:t>
-            </a:r>
-            <a:r>
-              <a:rPr lang="ru-RU" b="0" i="0" dirty="0">
-                <a:effectLst/>
-                <a:latin typeface="fkGroteskNeue"/>
-              </a:rPr>
-              <a:t> риск: низкий</a:t>
-            </a:r>
-          </a:p>
-          <a:p>
-            <a:pPr algn="l">
-              <a:buFont typeface="Arial" panose="020B0604020202020204" pitchFamily="34" charset="0"/>
-              <a:buChar char="•"/>
-            </a:pPr>
-            <a:r>
-              <a:rPr lang="ru-RU" b="0" i="0" dirty="0">
-                <a:effectLst/>
-                <a:latin typeface="fkGroteskNeue"/>
-              </a:rPr>
-              <a:t>Плюс: каждый модуль уже проаннотирован функционально (GO)</a:t>
-            </a:r>
-          </a:p>
-          <a:p>
-            <a:pPr algn="l"/>
-            <a:r>
-              <a:rPr lang="ru-RU" b="0" i="0" dirty="0">
-                <a:effectLst/>
-                <a:latin typeface="fkGroteskNeue"/>
-              </a:rPr>
-              <a:t>Преимущество: модульный подход часто даёт лучший баланс точность/интерпретируемость</a:t>
-            </a:r>
-          </a:p>
-          <a:p>
             <a:endParaRPr lang="ru-RU" sz="1200" b="0" i="0" kern="1200" dirty="0">
               <a:solidFill>
                 <a:schemeClr val="tx1"/>
@@ -6966,315 +1818,6 @@
           <a:lstStyle/>
           <a:p>
             <a:pPr algn="l"/>
-            <a:r>
-              <a:rPr lang="ru-RU" b="0" i="0" dirty="0">
-                <a:effectLst/>
-                <a:latin typeface="pplxSerif"/>
-              </a:rPr>
-              <a:t>Первый пример интеграции: статья 2023 по </a:t>
-            </a:r>
-            <a:r>
-              <a:rPr lang="ru-RU" b="0" i="0" dirty="0" err="1">
-                <a:effectLst/>
-                <a:latin typeface="pplxSerif"/>
-              </a:rPr>
-              <a:t>неоадъювантной</a:t>
-            </a:r>
-            <a:r>
-              <a:rPr lang="ru-RU" b="0" i="0" dirty="0">
-                <a:effectLst/>
-                <a:latin typeface="pplxSerif"/>
-              </a:rPr>
-              <a:t> </a:t>
-            </a:r>
-            <a:r>
-              <a:rPr lang="ru-RU" b="0" i="0" dirty="0" err="1">
-                <a:effectLst/>
-                <a:latin typeface="pplxSerif"/>
-              </a:rPr>
-              <a:t>химиорадиотерапии</a:t>
-            </a:r>
-            <a:r>
-              <a:rPr lang="ru-RU" b="0" i="0" dirty="0">
-                <a:effectLst/>
-                <a:latin typeface="pplxSerif"/>
-              </a:rPr>
-              <a:t> при раке груди (стадии </a:t>
-            </a:r>
-            <a:r>
-              <a:rPr lang="en-US" b="0" i="0" dirty="0">
-                <a:effectLst/>
-                <a:latin typeface="pplxSerif"/>
-              </a:rPr>
-              <a:t>IIB–IIIC, TCGA </a:t>
-            </a:r>
-            <a:r>
-              <a:rPr lang="ru-RU" b="0" i="0" dirty="0">
-                <a:effectLst/>
-                <a:latin typeface="pplxSerif"/>
-              </a:rPr>
-              <a:t>данные).​</a:t>
-            </a:r>
-            <a:br>
-              <a:rPr lang="ru-RU" dirty="0"/>
-            </a:br>
-            <a:r>
-              <a:rPr lang="ru-RU" b="0" i="0" dirty="0">
-                <a:effectLst/>
-                <a:latin typeface="pplxSerif"/>
-              </a:rPr>
-              <a:t>Авторы сделали </a:t>
-            </a:r>
-            <a:r>
-              <a:rPr lang="en-US" b="0" i="0" dirty="0">
-                <a:effectLst/>
-                <a:latin typeface="pplxSerif"/>
-              </a:rPr>
-              <a:t>WGCNA </a:t>
-            </a:r>
-            <a:r>
-              <a:rPr lang="ru-RU" b="0" i="0" dirty="0">
-                <a:effectLst/>
-                <a:latin typeface="pplxSerif"/>
-              </a:rPr>
-              <a:t>на </a:t>
-            </a:r>
-            <a:r>
-              <a:rPr lang="en-US" b="0" i="0" dirty="0">
-                <a:effectLst/>
-                <a:latin typeface="pplxSerif"/>
-              </a:rPr>
-              <a:t>RNA‑seq + DEG tumor vs normal, </a:t>
-            </a:r>
-            <a:r>
-              <a:rPr lang="ru-RU" b="0" i="0" dirty="0">
-                <a:effectLst/>
-                <a:latin typeface="pplxSerif"/>
-              </a:rPr>
-              <a:t>пересечение дало 16 генов, из них 4 </a:t>
-            </a:r>
-            <a:r>
-              <a:rPr lang="en-US" b="0" i="0" dirty="0">
-                <a:effectLst/>
-                <a:latin typeface="pplxSerif"/>
-              </a:rPr>
-              <a:t>hub </a:t>
-            </a:r>
-            <a:r>
-              <a:rPr lang="ru-RU" b="0" i="0" dirty="0">
-                <a:effectLst/>
-                <a:latin typeface="pplxSerif"/>
-              </a:rPr>
-              <a:t>прошли </a:t>
-            </a:r>
-            <a:r>
-              <a:rPr lang="en-US" b="0" i="0" dirty="0">
-                <a:effectLst/>
-                <a:latin typeface="pplxSerif"/>
-              </a:rPr>
-              <a:t>univariate Cox: SVOPL, EDAR, GSTA1, ABCA13.</a:t>
-            </a:r>
-            <a:br>
-              <a:rPr lang="en-US" dirty="0"/>
-            </a:br>
-            <a:r>
-              <a:rPr lang="ru-RU" b="0" i="0" dirty="0">
-                <a:effectLst/>
-                <a:latin typeface="pplxSerif"/>
-              </a:rPr>
-              <a:t>Построили </a:t>
-            </a:r>
-            <a:r>
-              <a:rPr lang="en-US" b="0" i="0" dirty="0">
-                <a:effectLst/>
-                <a:latin typeface="pplxSerif"/>
-              </a:rPr>
-              <a:t>risk score </a:t>
-            </a:r>
-            <a:r>
-              <a:rPr lang="ru-RU" b="0" i="0" dirty="0">
-                <a:effectLst/>
-                <a:latin typeface="pplxSerif"/>
-              </a:rPr>
-              <a:t>из 4 генов — </a:t>
-            </a:r>
-            <a:r>
-              <a:rPr lang="en-US" b="0" i="0" dirty="0">
-                <a:effectLst/>
-                <a:latin typeface="pplxSerif"/>
-              </a:rPr>
-              <a:t>multivariate Cox </a:t>
-            </a:r>
-            <a:r>
-              <a:rPr lang="ru-RU" b="0" i="0" dirty="0">
-                <a:effectLst/>
-                <a:latin typeface="pplxSerif"/>
-              </a:rPr>
-              <a:t>показал все </a:t>
-            </a:r>
-            <a:r>
-              <a:rPr lang="en-US" b="0" i="0" dirty="0">
-                <a:effectLst/>
-                <a:latin typeface="pplxSerif"/>
-              </a:rPr>
-              <a:t>HR&lt;1, </a:t>
-            </a:r>
-            <a:r>
-              <a:rPr lang="ru-RU" b="0" i="0" dirty="0">
-                <a:effectLst/>
-                <a:latin typeface="pplxSerif"/>
-              </a:rPr>
-              <a:t>то есть низкая экспрессия этих генов связана с плохим </a:t>
-            </a:r>
-            <a:r>
-              <a:rPr lang="en-US" b="0" i="0" dirty="0">
-                <a:effectLst/>
-                <a:latin typeface="pplxSerif"/>
-              </a:rPr>
-              <a:t>OS </a:t>
-            </a:r>
-            <a:r>
-              <a:rPr lang="ru-RU" b="0" i="0" dirty="0">
-                <a:effectLst/>
-                <a:latin typeface="pplxSerif"/>
-              </a:rPr>
-              <a:t>и </a:t>
-            </a:r>
-            <a:r>
-              <a:rPr lang="en-US" b="0" i="0" dirty="0">
-                <a:effectLst/>
-                <a:latin typeface="pplxSerif"/>
-              </a:rPr>
-              <a:t>PFS (p&lt;0.005).​</a:t>
-            </a:r>
-            <a:br>
-              <a:rPr lang="en-US" dirty="0"/>
-            </a:br>
-            <a:r>
-              <a:rPr lang="ru-RU" b="0" i="0" dirty="0">
-                <a:effectLst/>
-                <a:latin typeface="pplxSerif"/>
-              </a:rPr>
-              <a:t>На </a:t>
-            </a:r>
-            <a:r>
-              <a:rPr lang="en-US" b="0" i="0" dirty="0">
-                <a:effectLst/>
-                <a:latin typeface="pplxSerif"/>
-              </a:rPr>
-              <a:t>forest plot </a:t>
-            </a:r>
-            <a:r>
-              <a:rPr lang="ru-RU" b="0" i="0" dirty="0">
-                <a:effectLst/>
-                <a:latin typeface="pplxSerif"/>
-              </a:rPr>
-              <a:t>видно: </a:t>
-            </a:r>
-            <a:r>
-              <a:rPr lang="en-US" b="0" i="0" dirty="0">
-                <a:effectLst/>
-                <a:latin typeface="pplxSerif"/>
-              </a:rPr>
-              <a:t>SVOPL HR=0.48, EDAR 0.59 </a:t>
-            </a:r>
-            <a:r>
-              <a:rPr lang="ru-RU" b="0" i="0" dirty="0">
-                <a:effectLst/>
-                <a:latin typeface="pplxSerif"/>
-              </a:rPr>
-              <a:t>и т.д. — защитный эффект, </a:t>
-            </a:r>
-            <a:r>
-              <a:rPr lang="en-US" b="0" i="0" dirty="0">
-                <a:effectLst/>
-                <a:latin typeface="pplxSerif"/>
-              </a:rPr>
-              <a:t>CI </a:t>
-            </a:r>
-            <a:r>
-              <a:rPr lang="ru-RU" b="0" i="0" dirty="0">
-                <a:effectLst/>
-                <a:latin typeface="pplxSerif"/>
-              </a:rPr>
-              <a:t>не через 1.</a:t>
-            </a:r>
-            <a:br>
-              <a:rPr lang="ru-RU" dirty="0"/>
-            </a:br>
-            <a:r>
-              <a:rPr lang="ru-RU" b="0" i="0" dirty="0">
-                <a:effectLst/>
-                <a:latin typeface="pplxSerif"/>
-              </a:rPr>
-              <a:t>Бонус: </a:t>
-            </a:r>
-            <a:r>
-              <a:rPr lang="en-US" b="0" i="0" dirty="0">
-                <a:effectLst/>
-                <a:latin typeface="pplxSerif"/>
-              </a:rPr>
-              <a:t>low risk </a:t>
-            </a:r>
-            <a:r>
-              <a:rPr lang="ru-RU" b="0" i="0" dirty="0">
-                <a:effectLst/>
-                <a:latin typeface="pplxSerif"/>
-              </a:rPr>
-              <a:t>коррелирует с ↑ </a:t>
-            </a:r>
-            <a:r>
-              <a:rPr lang="en-US" b="0" i="0" dirty="0">
-                <a:effectLst/>
-                <a:latin typeface="pplxSerif"/>
-              </a:rPr>
-              <a:t>T‑</a:t>
-            </a:r>
-            <a:r>
-              <a:rPr lang="ru-RU" b="0" i="0" dirty="0">
-                <a:effectLst/>
-                <a:latin typeface="pplxSerif"/>
-              </a:rPr>
-              <a:t>клеток и моноцитов — </a:t>
-            </a:r>
-            <a:r>
-              <a:rPr lang="ru-RU" b="0" i="0" dirty="0" err="1">
-                <a:effectLst/>
-                <a:latin typeface="pplxSerif"/>
-              </a:rPr>
-              <a:t>иммуногенный</a:t>
-            </a:r>
-            <a:r>
-              <a:rPr lang="ru-RU" b="0" i="0" dirty="0">
-                <a:effectLst/>
-                <a:latin typeface="pplxSerif"/>
-              </a:rPr>
-              <a:t> профиль.</a:t>
-            </a:r>
-            <a:br>
-              <a:rPr lang="ru-RU" dirty="0"/>
-            </a:br>
-            <a:r>
-              <a:rPr lang="ru-RU" b="0" i="0" dirty="0">
-                <a:effectLst/>
-                <a:latin typeface="pplxSerif"/>
-              </a:rPr>
-              <a:t>Это шаблон для практики: </a:t>
-            </a:r>
-            <a:r>
-              <a:rPr lang="en-US" b="0" i="0" dirty="0">
-                <a:effectLst/>
-                <a:latin typeface="pplxSerif"/>
-              </a:rPr>
-              <a:t>WGCNA → DEG intersect → Cox signature → immune </a:t>
-            </a:r>
-            <a:r>
-              <a:rPr lang="ru-RU" b="0" i="0" dirty="0">
-                <a:effectLst/>
-                <a:latin typeface="pplxSerif"/>
-              </a:rPr>
-              <a:t>корреляция.</a:t>
-            </a:r>
             <a:endParaRPr lang="ru-RU" sz="1200" b="0" i="0" kern="1200" dirty="0">
               <a:solidFill>
                 <a:schemeClr val="tx1"/>
@@ -7368,333 +1911,6 @@
           <a:lstStyle/>
           <a:p>
             <a:pPr algn="l"/>
-            <a:r>
-              <a:rPr lang="ru-RU" b="0" i="0" dirty="0">
-                <a:effectLst/>
-                <a:latin typeface="pplxSerif"/>
-              </a:rPr>
-              <a:t>Второй пример: статья </a:t>
-            </a:r>
-            <a:r>
-              <a:rPr lang="en-US" b="0" i="0" dirty="0">
-                <a:effectLst/>
-                <a:latin typeface="pplxSerif"/>
-              </a:rPr>
-              <a:t>Frontiers Genetics 2020 </a:t>
-            </a:r>
-            <a:r>
-              <a:rPr lang="ru-RU" b="0" i="0" dirty="0">
-                <a:effectLst/>
-                <a:latin typeface="pplxSerif"/>
-              </a:rPr>
-              <a:t>по </a:t>
-            </a:r>
-            <a:r>
-              <a:rPr lang="en-US" b="0" i="0" dirty="0">
-                <a:effectLst/>
-                <a:latin typeface="pplxSerif"/>
-              </a:rPr>
-              <a:t>lung adenocarcinoma (LUAD) </a:t>
-            </a:r>
-            <a:r>
-              <a:rPr lang="ru-RU" b="0" i="0" dirty="0">
-                <a:effectLst/>
-                <a:latin typeface="pplxSerif"/>
-              </a:rPr>
-              <a:t>и </a:t>
-            </a:r>
-            <a:r>
-              <a:rPr lang="en-US" b="0" i="0" dirty="0">
-                <a:effectLst/>
-                <a:latin typeface="pplxSerif"/>
-              </a:rPr>
-              <a:t>cancer stem cells (CSC).​</a:t>
-            </a:r>
-            <a:br>
-              <a:rPr lang="en-US" dirty="0"/>
-            </a:br>
-            <a:r>
-              <a:rPr lang="en-US" b="0" i="0" dirty="0">
-                <a:effectLst/>
-                <a:latin typeface="pplxSerif"/>
-              </a:rPr>
-              <a:t>TCGA + GEO </a:t>
-            </a:r>
-            <a:r>
-              <a:rPr lang="ru-RU" b="0" i="0" dirty="0">
-                <a:effectLst/>
-                <a:latin typeface="pplxSerif"/>
-              </a:rPr>
-              <a:t>данные, фенотип </a:t>
-            </a:r>
-            <a:r>
-              <a:rPr lang="en-US" b="0" i="0" dirty="0" err="1">
-                <a:effectLst/>
-                <a:latin typeface="pplxSerif"/>
-              </a:rPr>
-              <a:t>mRNAsi</a:t>
-            </a:r>
-            <a:r>
-              <a:rPr lang="en-US" b="0" i="0" dirty="0">
-                <a:effectLst/>
-                <a:latin typeface="pplxSerif"/>
-              </a:rPr>
-              <a:t> (stemness </a:t>
-            </a:r>
-            <a:r>
-              <a:rPr lang="ru-RU" b="0" i="0" dirty="0">
-                <a:effectLst/>
-                <a:latin typeface="pplxSerif"/>
-              </a:rPr>
-              <a:t>по экспрессии). </a:t>
-            </a:r>
-            <a:r>
-              <a:rPr lang="en-US" b="0" i="0" dirty="0">
-                <a:effectLst/>
-                <a:latin typeface="pplxSerif"/>
-              </a:rPr>
-              <a:t>WGCNA </a:t>
-            </a:r>
-            <a:r>
-              <a:rPr lang="ru-RU" b="0" i="0" dirty="0">
-                <a:effectLst/>
-                <a:latin typeface="pplxSerif"/>
-              </a:rPr>
-              <a:t>выделила </a:t>
-            </a:r>
-            <a:r>
-              <a:rPr lang="en-US" b="0" i="0" dirty="0">
-                <a:effectLst/>
-                <a:latin typeface="pplxSerif"/>
-              </a:rPr>
-              <a:t>green/blue </a:t>
-            </a:r>
-            <a:r>
-              <a:rPr lang="ru-RU" b="0" i="0" dirty="0">
-                <a:effectLst/>
-                <a:latin typeface="pplxSerif"/>
-              </a:rPr>
-              <a:t>модули — </a:t>
-            </a:r>
-            <a:r>
-              <a:rPr lang="en-US" b="0" i="0" dirty="0">
-                <a:effectLst/>
-                <a:latin typeface="pplxSerif"/>
-              </a:rPr>
-              <a:t>cell cycle </a:t>
-            </a:r>
-            <a:r>
-              <a:rPr lang="ru-RU" b="0" i="0" dirty="0">
-                <a:effectLst/>
-                <a:latin typeface="pplxSerif"/>
-              </a:rPr>
-              <a:t>и </a:t>
-            </a:r>
-            <a:r>
-              <a:rPr lang="en-US" b="0" i="0" dirty="0">
-                <a:effectLst/>
-                <a:latin typeface="pplxSerif"/>
-              </a:rPr>
-              <a:t>mitosis, 50 </a:t>
-            </a:r>
-            <a:r>
-              <a:rPr lang="ru-RU" b="0" i="0" dirty="0">
-                <a:effectLst/>
-                <a:latin typeface="pplxSerif"/>
-              </a:rPr>
-              <a:t>ключевых генов.</a:t>
-            </a:r>
-            <a:br>
-              <a:rPr lang="ru-RU" dirty="0"/>
-            </a:br>
-            <a:r>
-              <a:rPr lang="ru-RU" b="0" i="0" dirty="0">
-                <a:effectLst/>
-                <a:latin typeface="pplxSerif"/>
-              </a:rPr>
-              <a:t>Из </a:t>
-            </a:r>
-            <a:r>
-              <a:rPr lang="en-US" b="0" i="0" dirty="0">
-                <a:effectLst/>
-                <a:latin typeface="pplxSerif"/>
-              </a:rPr>
-              <a:t>PPI + MCODE </a:t>
-            </a:r>
-            <a:r>
-              <a:rPr lang="en-US" b="0" i="0" dirty="0" err="1">
-                <a:effectLst/>
-                <a:latin typeface="pplxSerif"/>
-              </a:rPr>
-              <a:t>Cytoscape</a:t>
-            </a:r>
-            <a:r>
-              <a:rPr lang="en-US" b="0" i="0" dirty="0">
-                <a:effectLst/>
-                <a:latin typeface="pplxSerif"/>
-              </a:rPr>
-              <a:t> </a:t>
-            </a:r>
-            <a:r>
-              <a:rPr lang="ru-RU" b="0" i="0" dirty="0">
-                <a:effectLst/>
-                <a:latin typeface="pplxSerif"/>
-              </a:rPr>
-              <a:t>взяли 6 </a:t>
-            </a:r>
-            <a:r>
-              <a:rPr lang="en-US" b="0" i="0" dirty="0">
-                <a:effectLst/>
-                <a:latin typeface="pplxSerif"/>
-              </a:rPr>
-              <a:t>hub: CHEK1, RAD51, KIFC1 </a:t>
-            </a:r>
-            <a:r>
-              <a:rPr lang="ru-RU" b="0" i="0" dirty="0">
-                <a:effectLst/>
-                <a:latin typeface="pplxSerif"/>
-              </a:rPr>
-              <a:t>и др. — типичные для пролиферации </a:t>
-            </a:r>
-            <a:r>
-              <a:rPr lang="en-US" b="0" i="0" dirty="0">
-                <a:effectLst/>
-                <a:latin typeface="pplxSerif"/>
-              </a:rPr>
-              <a:t>CSC.​</a:t>
-            </a:r>
-            <a:br>
-              <a:rPr lang="en-US" dirty="0"/>
-            </a:br>
-            <a:r>
-              <a:rPr lang="en-US" b="0" i="0" dirty="0">
-                <a:effectLst/>
-                <a:latin typeface="pplxSerif"/>
-              </a:rPr>
-              <a:t>Random Forest </a:t>
-            </a:r>
-            <a:r>
-              <a:rPr lang="ru-RU" b="0" i="0" dirty="0">
-                <a:effectLst/>
-                <a:latin typeface="pplxSerif"/>
-              </a:rPr>
-              <a:t>на 6 генах дал классификатор подтипов </a:t>
-            </a:r>
-            <a:r>
-              <a:rPr lang="en-US" b="0" i="0" dirty="0">
-                <a:effectLst/>
-                <a:latin typeface="pplxSerif"/>
-              </a:rPr>
-              <a:t>LUAD </a:t>
-            </a:r>
-            <a:r>
-              <a:rPr lang="ru-RU" b="0" i="0" dirty="0">
-                <a:effectLst/>
-                <a:latin typeface="pplxSerif"/>
-              </a:rPr>
-              <a:t>с </a:t>
-            </a:r>
-            <a:r>
-              <a:rPr lang="en-US" b="0" i="0" dirty="0">
-                <a:effectLst/>
-                <a:latin typeface="pplxSerif"/>
-              </a:rPr>
-              <a:t>accuracy 85%. High CSC — poor OS, </a:t>
-            </a:r>
-            <a:r>
-              <a:rPr lang="ru-RU" b="0" i="0" dirty="0">
-                <a:effectLst/>
-                <a:latin typeface="pplxSerif"/>
-              </a:rPr>
-              <a:t>как видно на </a:t>
-            </a:r>
-            <a:r>
-              <a:rPr lang="en-US" b="0" i="0" dirty="0">
-                <a:effectLst/>
-                <a:latin typeface="pplxSerif"/>
-              </a:rPr>
-              <a:t>KM: </a:t>
-            </a:r>
-            <a:r>
-              <a:rPr lang="ru-RU" b="0" i="0" dirty="0">
-                <a:effectLst/>
-                <a:latin typeface="pplxSerif"/>
-              </a:rPr>
-              <a:t>синяя </a:t>
-            </a:r>
-            <a:r>
-              <a:rPr lang="en-US" b="0" i="0" dirty="0">
-                <a:effectLst/>
-                <a:latin typeface="pplxSerif"/>
-              </a:rPr>
-              <a:t>low CSC </a:t>
-            </a:r>
-            <a:r>
-              <a:rPr lang="ru-RU" b="0" i="0" dirty="0">
-                <a:effectLst/>
-                <a:latin typeface="pplxSerif"/>
-              </a:rPr>
-              <a:t>плато 0.7 на 5 лет, красная </a:t>
-            </a:r>
-            <a:r>
-              <a:rPr lang="en-US" b="0" i="0" dirty="0">
-                <a:effectLst/>
-                <a:latin typeface="pplxSerif"/>
-              </a:rPr>
-              <a:t>high </a:t>
-            </a:r>
-            <a:r>
-              <a:rPr lang="ru-RU" b="0" i="0" dirty="0">
-                <a:effectLst/>
-                <a:latin typeface="pplxSerif"/>
-              </a:rPr>
-              <a:t>быстро до 0.3.</a:t>
-            </a:r>
-            <a:br>
-              <a:rPr lang="ru-RU" dirty="0"/>
-            </a:br>
-            <a:r>
-              <a:rPr lang="en-US" b="0" i="0" dirty="0">
-                <a:effectLst/>
-                <a:latin typeface="pplxSerif"/>
-              </a:rPr>
-              <a:t>AUC 1y=0.78, 3y=0.75, 5y=0.74 — </a:t>
-            </a:r>
-            <a:r>
-              <a:rPr lang="ru-RU" b="0" i="0" dirty="0">
-                <a:effectLst/>
-                <a:latin typeface="pplxSerif"/>
-              </a:rPr>
-              <a:t>отличная прогностика. Практика: возьмите </a:t>
-            </a:r>
-            <a:r>
-              <a:rPr lang="en-US" b="0" i="0" dirty="0">
-                <a:effectLst/>
-                <a:latin typeface="pplxSerif"/>
-              </a:rPr>
-              <a:t>ME </a:t>
-            </a:r>
-            <a:r>
-              <a:rPr lang="ru-RU" b="0" i="0" dirty="0">
-                <a:effectLst/>
-                <a:latin typeface="pplxSerif"/>
-              </a:rPr>
-              <a:t>из ваших модулей → </a:t>
-            </a:r>
-            <a:r>
-              <a:rPr lang="en-US" b="0" i="0" dirty="0">
-                <a:effectLst/>
-                <a:latin typeface="pplxSerif"/>
-              </a:rPr>
-              <a:t>RF </a:t>
-            </a:r>
-            <a:r>
-              <a:rPr lang="ru-RU" b="0" i="0" dirty="0">
-                <a:effectLst/>
-                <a:latin typeface="pplxSerif"/>
-              </a:rPr>
-              <a:t>для рецидива/подтипов.</a:t>
-            </a:r>
             <a:endParaRPr lang="ru-RU" sz="1200" b="0" i="0" kern="1200" dirty="0">
               <a:solidFill>
                 <a:schemeClr val="tx1"/>
@@ -7788,331 +2004,6 @@
           <a:lstStyle/>
           <a:p>
             <a:pPr algn="l"/>
-            <a:r>
-              <a:rPr lang="ru-RU" b="0" i="0" dirty="0">
-                <a:effectLst/>
-                <a:latin typeface="pplxSerif"/>
-              </a:rPr>
-              <a:t>Третий пример: статья </a:t>
-            </a:r>
-            <a:r>
-              <a:rPr lang="ru-RU" b="0" i="0" dirty="0" err="1">
-                <a:effectLst/>
-                <a:latin typeface="pplxSerif"/>
-              </a:rPr>
-              <a:t>Frontiers</a:t>
-            </a:r>
-            <a:r>
-              <a:rPr lang="ru-RU" b="0" i="0" dirty="0">
-                <a:effectLst/>
-                <a:latin typeface="pplxSerif"/>
-              </a:rPr>
-              <a:t> 2020 по диффузному типу рака желудка (данные TCGA).</a:t>
-            </a:r>
-            <a:br>
-              <a:rPr lang="ru-RU" dirty="0"/>
-            </a:br>
-            <a:r>
-              <a:rPr lang="ru-RU" b="0" i="0" dirty="0">
-                <a:effectLst/>
-                <a:latin typeface="pplxSerif"/>
-              </a:rPr>
-              <a:t>Разделили на диффузный и </a:t>
-            </a:r>
-            <a:r>
-              <a:rPr lang="ru-RU" b="0" i="0" dirty="0" err="1">
-                <a:effectLst/>
-                <a:latin typeface="pplxSerif"/>
-              </a:rPr>
-              <a:t>интестинальный</a:t>
-            </a:r>
-            <a:r>
-              <a:rPr lang="ru-RU" b="0" i="0" dirty="0">
-                <a:effectLst/>
-                <a:latin typeface="pplxSerif"/>
-              </a:rPr>
-              <a:t> типы по классификации Лорена, WGCNA выделила модуль, сильно коррелирующий с диффузным типом.</a:t>
-            </a:r>
-            <a:br>
-              <a:rPr lang="ru-RU" dirty="0"/>
-            </a:br>
-            <a:r>
-              <a:rPr lang="ru-RU" b="0" i="0" dirty="0">
-                <a:effectLst/>
-                <a:latin typeface="pplxSerif"/>
-              </a:rPr>
-              <a:t>LASSO </a:t>
-            </a:r>
-            <a:r>
-              <a:rPr lang="ru-RU" b="0" i="0" dirty="0" err="1">
-                <a:effectLst/>
-                <a:latin typeface="pplxSerif"/>
-              </a:rPr>
-              <a:t>Cox</a:t>
-            </a:r>
-            <a:r>
-              <a:rPr lang="ru-RU" b="0" i="0" dirty="0">
-                <a:effectLst/>
-                <a:latin typeface="pplxSerif"/>
-              </a:rPr>
-              <a:t> из этого модуля отобрал 10 </a:t>
-            </a:r>
-            <a:r>
-              <a:rPr lang="ru-RU" b="0" i="0" dirty="0" err="1">
-                <a:effectLst/>
-                <a:latin typeface="pplxSerif"/>
-              </a:rPr>
-              <a:t>lncRNA</a:t>
-            </a:r>
-            <a:r>
-              <a:rPr lang="ru-RU" b="0" i="0" dirty="0">
-                <a:effectLst/>
-                <a:latin typeface="pplxSerif"/>
-              </a:rPr>
-              <a:t> — длинные </a:t>
-            </a:r>
-            <a:r>
-              <a:rPr lang="ru-RU" b="0" i="0" dirty="0" err="1">
-                <a:effectLst/>
-                <a:latin typeface="pplxSerif"/>
-              </a:rPr>
-              <a:t>некодирующие</a:t>
-            </a:r>
-            <a:r>
-              <a:rPr lang="ru-RU" b="0" i="0" dirty="0">
-                <a:effectLst/>
-                <a:latin typeface="pplxSerif"/>
-              </a:rPr>
-              <a:t> РНК, типичные регуляторы в раке желудка.</a:t>
-            </a:r>
-            <a:br>
-              <a:rPr lang="ru-RU" dirty="0"/>
-            </a:br>
-            <a:r>
-              <a:rPr lang="ru-RU" b="0" i="0" dirty="0">
-                <a:effectLst/>
-                <a:latin typeface="pplxSerif"/>
-              </a:rPr>
-              <a:t>Risk </a:t>
-            </a:r>
-            <a:r>
-              <a:rPr lang="ru-RU" b="0" i="0" dirty="0" err="1">
-                <a:effectLst/>
-                <a:latin typeface="pplxSerif"/>
-              </a:rPr>
-              <a:t>score</a:t>
-            </a:r>
-            <a:r>
-              <a:rPr lang="ru-RU" b="0" i="0" dirty="0">
-                <a:effectLst/>
-                <a:latin typeface="pplxSerif"/>
-              </a:rPr>
-              <a:t> разделил пациентов на </a:t>
-            </a:r>
-            <a:r>
-              <a:rPr lang="ru-RU" b="0" i="0" dirty="0" err="1">
-                <a:effectLst/>
-                <a:latin typeface="pplxSerif"/>
-              </a:rPr>
-              <a:t>high</a:t>
-            </a:r>
-            <a:r>
-              <a:rPr lang="ru-RU" b="0" i="0" dirty="0">
-                <a:effectLst/>
-                <a:latin typeface="pplxSerif"/>
-              </a:rPr>
-              <a:t>/</a:t>
-            </a:r>
-            <a:r>
-              <a:rPr lang="ru-RU" b="0" i="0" dirty="0" err="1">
-                <a:effectLst/>
-                <a:latin typeface="pplxSerif"/>
-              </a:rPr>
-              <a:t>low</a:t>
-            </a:r>
-            <a:r>
-              <a:rPr lang="ru-RU" b="0" i="0" dirty="0">
-                <a:effectLst/>
-                <a:latin typeface="pplxSerif"/>
-              </a:rPr>
-              <a:t>: общая выживаемость p=2.8×10^{-10}, C-</a:t>
-            </a:r>
-            <a:r>
-              <a:rPr lang="ru-RU" b="0" i="0" dirty="0" err="1">
-                <a:effectLst/>
-                <a:latin typeface="pplxSerif"/>
-              </a:rPr>
-              <a:t>index</a:t>
-            </a:r>
-            <a:r>
-              <a:rPr lang="ru-RU" b="0" i="0" dirty="0">
-                <a:effectLst/>
-                <a:latin typeface="pplxSerif"/>
-              </a:rPr>
-              <a:t>=0.97 — фантастическая точность!</a:t>
-            </a:r>
-            <a:br>
-              <a:rPr lang="ru-RU" dirty="0"/>
-            </a:br>
-            <a:r>
-              <a:rPr lang="ru-RU" b="0" i="0" dirty="0">
-                <a:effectLst/>
-                <a:latin typeface="pplxSerif"/>
-              </a:rPr>
-              <a:t>На KM график B: </a:t>
-            </a:r>
-            <a:r>
-              <a:rPr lang="ru-RU" b="0" i="0" dirty="0" err="1">
-                <a:effectLst/>
-                <a:latin typeface="pplxSerif"/>
-              </a:rPr>
-              <a:t>high</a:t>
-            </a:r>
-            <a:r>
-              <a:rPr lang="ru-RU" b="0" i="0" dirty="0">
-                <a:effectLst/>
-                <a:latin typeface="pplxSerif"/>
-              </a:rPr>
-              <a:t> </a:t>
-            </a:r>
-            <a:r>
-              <a:rPr lang="ru-RU" b="0" i="0" dirty="0" err="1">
-                <a:effectLst/>
-                <a:latin typeface="pplxSerif"/>
-              </a:rPr>
-              <a:t>risk</a:t>
-            </a:r>
-            <a:r>
-              <a:rPr lang="ru-RU" b="0" i="0" dirty="0">
-                <a:effectLst/>
-                <a:latin typeface="pplxSerif"/>
-              </a:rPr>
-              <a:t> падает быстро до 20% на 5 лет, </a:t>
-            </a:r>
-            <a:r>
-              <a:rPr lang="ru-RU" b="0" i="0" dirty="0" err="1">
-                <a:effectLst/>
-                <a:latin typeface="pplxSerif"/>
-              </a:rPr>
-              <a:t>low</a:t>
-            </a:r>
-            <a:r>
-              <a:rPr lang="ru-RU" b="0" i="0" dirty="0">
-                <a:effectLst/>
-                <a:latin typeface="pplxSerif"/>
-              </a:rPr>
-              <a:t> </a:t>
-            </a:r>
-            <a:r>
-              <a:rPr lang="ru-RU" b="0" i="0" dirty="0" err="1">
-                <a:effectLst/>
-                <a:latin typeface="pplxSerif"/>
-              </a:rPr>
-              <a:t>risk</a:t>
-            </a:r>
-            <a:r>
-              <a:rPr lang="ru-RU" b="0" i="0" dirty="0">
-                <a:effectLst/>
-                <a:latin typeface="pplxSerif"/>
-              </a:rPr>
-              <a:t> держит 80%.</a:t>
-            </a:r>
-            <a:br>
-              <a:rPr lang="ru-RU" dirty="0"/>
-            </a:br>
-            <a:r>
-              <a:rPr lang="ru-RU" b="0" i="0" dirty="0">
-                <a:effectLst/>
-                <a:latin typeface="pplxSerif"/>
-              </a:rPr>
-              <a:t>ROC график C: AUC 1 год=0.98, 3 года=1.0, 5 лет=1.0 — модель идеально предсказывает.</a:t>
-            </a:r>
-            <a:br>
-              <a:rPr lang="ru-RU" dirty="0"/>
-            </a:br>
-            <a:r>
-              <a:rPr lang="ru-RU" b="0" i="0" dirty="0">
-                <a:effectLst/>
-                <a:latin typeface="pplxSerif"/>
-              </a:rPr>
-              <a:t>График A — траектория коэффициентов LASSO, D — вероятно GSEA с </a:t>
-            </a:r>
-            <a:r>
-              <a:rPr lang="ru-RU" b="0" i="0" dirty="0" err="1">
-                <a:effectLst/>
-                <a:latin typeface="pplxSerif"/>
-              </a:rPr>
-              <a:t>tumor</a:t>
-            </a:r>
-            <a:r>
-              <a:rPr lang="ru-RU" b="0" i="0" dirty="0">
-                <a:effectLst/>
-                <a:latin typeface="pplxSerif"/>
-              </a:rPr>
-              <a:t> путями в </a:t>
-            </a:r>
-            <a:r>
-              <a:rPr lang="ru-RU" b="0" i="0" dirty="0" err="1">
-                <a:effectLst/>
-                <a:latin typeface="pplxSerif"/>
-              </a:rPr>
-              <a:t>high</a:t>
-            </a:r>
-            <a:r>
-              <a:rPr lang="ru-RU" b="0" i="0" dirty="0">
-                <a:effectLst/>
-                <a:latin typeface="pplxSerif"/>
-              </a:rPr>
-              <a:t> </a:t>
-            </a:r>
-            <a:r>
-              <a:rPr lang="ru-RU" b="0" i="0" dirty="0" err="1">
-                <a:effectLst/>
-                <a:latin typeface="pplxSerif"/>
-              </a:rPr>
-              <a:t>risk</a:t>
-            </a:r>
-            <a:r>
-              <a:rPr lang="ru-RU" b="0" i="0" dirty="0">
-                <a:effectLst/>
-                <a:latin typeface="pplxSerif"/>
-              </a:rPr>
-              <a:t>.</a:t>
-            </a:r>
-            <a:br>
-              <a:rPr lang="ru-RU" dirty="0"/>
-            </a:br>
-            <a:r>
-              <a:rPr lang="ru-RU" b="0" i="0" dirty="0">
-                <a:effectLst/>
-                <a:latin typeface="pplxSerif"/>
-              </a:rPr>
-              <a:t>Для практики: WGCNA по подтипу → LASSO </a:t>
-            </a:r>
-            <a:r>
-              <a:rPr lang="ru-RU" b="0" i="0" dirty="0" err="1">
-                <a:effectLst/>
-                <a:latin typeface="pplxSerif"/>
-              </a:rPr>
-              <a:t>Cox</a:t>
-            </a:r>
-            <a:r>
-              <a:rPr lang="ru-RU" b="0" i="0" dirty="0">
-                <a:effectLst/>
-                <a:latin typeface="pplxSerif"/>
-              </a:rPr>
-              <a:t> → номограмма для рака желудка.</a:t>
-            </a:r>
-            <a:br>
-              <a:rPr lang="ru-RU" dirty="0"/>
-            </a:br>
-            <a:r>
-              <a:rPr lang="ru-RU" b="0" i="0" dirty="0">
-                <a:effectLst/>
-                <a:latin typeface="pplxSerif"/>
-              </a:rPr>
-              <a:t>Это шаблон для ваших данных!</a:t>
-            </a:r>
             <a:endParaRPr lang="ru-RU" sz="1200" b="0" i="0" kern="1200" dirty="0">
               <a:solidFill>
                 <a:schemeClr val="tx1"/>
@@ -8205,344 +2096,6 @@
           <a:bodyPr/>
           <a:lstStyle/>
           <a:p>
-            <a:pPr algn="l"/>
-            <a:r>
-              <a:rPr lang="ru-RU" b="0" i="0" dirty="0">
-                <a:effectLst/>
-                <a:latin typeface="fkGroteskNeue"/>
-              </a:rPr>
-              <a:t>Итоги лекции</a:t>
-            </a:r>
-          </a:p>
-          <a:p>
-            <a:pPr algn="l"/>
-            <a:r>
-              <a:rPr lang="ru-RU" b="0" i="0" dirty="0">
-                <a:effectLst/>
-                <a:latin typeface="fkGroteskNeue"/>
-              </a:rPr>
-              <a:t>Мы покрыли сегодня:</a:t>
-            </a:r>
-          </a:p>
-          <a:p>
-            <a:pPr algn="l"/>
-            <a:r>
-              <a:rPr lang="ru-RU" b="0" i="0" dirty="0">
-                <a:effectLst/>
-                <a:latin typeface="fkGroteskNeue"/>
-              </a:rPr>
-              <a:t>✓ Основы теории графов (</a:t>
-            </a:r>
-            <a:r>
-              <a:rPr lang="en-US" b="0" i="0" dirty="0">
-                <a:effectLst/>
-                <a:latin typeface="fkGroteskNeue"/>
-              </a:rPr>
-              <a:t>nodes, edges, weights)</a:t>
-            </a:r>
-            <a:br>
-              <a:rPr lang="en-US" b="0" i="0" dirty="0">
-                <a:effectLst/>
-                <a:latin typeface="fkGroteskNeue"/>
-              </a:rPr>
-            </a:br>
-            <a:r>
-              <a:rPr lang="en-US" b="0" i="0" dirty="0">
-                <a:effectLst/>
-                <a:latin typeface="fkGroteskNeue"/>
-              </a:rPr>
-              <a:t>✓ </a:t>
-            </a:r>
-            <a:r>
-              <a:rPr lang="ru-RU" b="0" i="0" dirty="0">
-                <a:effectLst/>
-                <a:latin typeface="fkGroteskNeue"/>
-              </a:rPr>
-              <a:t>Метрики графов (</a:t>
-            </a:r>
-            <a:r>
-              <a:rPr lang="en-US" b="0" i="0" dirty="0">
-                <a:effectLst/>
-                <a:latin typeface="fkGroteskNeue"/>
-              </a:rPr>
-              <a:t>degree, centrality, clustering coefficient)</a:t>
-            </a:r>
-            <a:br>
-              <a:rPr lang="en-US" b="0" i="0" dirty="0">
-                <a:effectLst/>
-                <a:latin typeface="fkGroteskNeue"/>
-              </a:rPr>
-            </a:br>
-            <a:r>
-              <a:rPr lang="en-US" b="0" i="0" dirty="0">
-                <a:effectLst/>
-                <a:latin typeface="fkGroteskNeue"/>
-              </a:rPr>
-              <a:t>✓ </a:t>
-            </a:r>
-            <a:r>
-              <a:rPr lang="ru-RU" b="0" i="0" dirty="0">
-                <a:effectLst/>
-                <a:latin typeface="fkGroteskNeue"/>
-              </a:rPr>
-              <a:t>Обнаружение модулей (</a:t>
-            </a:r>
-            <a:r>
-              <a:rPr lang="en-US" b="0" i="0" dirty="0">
-                <a:effectLst/>
-                <a:latin typeface="fkGroteskNeue"/>
-              </a:rPr>
-              <a:t>Louvain algorithm, modularity Q)</a:t>
-            </a:r>
-            <a:br>
-              <a:rPr lang="en-US" b="0" i="0" dirty="0">
-                <a:effectLst/>
-                <a:latin typeface="fkGroteskNeue"/>
-              </a:rPr>
-            </a:br>
-            <a:r>
-              <a:rPr lang="en-US" b="0" i="0" dirty="0">
-                <a:effectLst/>
-                <a:latin typeface="fkGroteskNeue"/>
-              </a:rPr>
-              <a:t>✓ WGCNA — </a:t>
-            </a:r>
-            <a:r>
-              <a:rPr lang="ru-RU" b="0" i="0" dirty="0">
-                <a:effectLst/>
-                <a:latin typeface="fkGroteskNeue"/>
-              </a:rPr>
-              <a:t>полный </a:t>
-            </a:r>
-            <a:r>
-              <a:rPr lang="en-US" b="0" i="0" dirty="0">
-                <a:effectLst/>
-                <a:latin typeface="fkGroteskNeue"/>
-              </a:rPr>
-              <a:t>workflow:</a:t>
-            </a:r>
-          </a:p>
-          <a:p>
-            <a:pPr algn="l">
-              <a:buFont typeface="Arial" panose="020B0604020202020204" pitchFamily="34" charset="0"/>
-              <a:buChar char="•"/>
-            </a:pPr>
-            <a:r>
-              <a:rPr lang="ru-RU" b="0" i="0" dirty="0">
-                <a:effectLst/>
-                <a:latin typeface="fkGroteskNeue"/>
-              </a:rPr>
-              <a:t>Корреляция → </a:t>
-            </a:r>
-            <a:r>
-              <a:rPr lang="en-US" b="0" i="0" dirty="0">
-                <a:effectLst/>
-                <a:latin typeface="fkGroteskNeue"/>
-              </a:rPr>
-              <a:t>soft-thresholding → </a:t>
-            </a:r>
-            <a:r>
-              <a:rPr lang="ru-RU" b="0" i="0" dirty="0">
-                <a:effectLst/>
-                <a:latin typeface="fkGroteskNeue"/>
-              </a:rPr>
-              <a:t>кластеризация → модули → </a:t>
-            </a:r>
-            <a:r>
-              <a:rPr lang="en-US" b="0" i="0" dirty="0">
-                <a:effectLst/>
-                <a:latin typeface="fkGroteskNeue"/>
-              </a:rPr>
-              <a:t>ME → </a:t>
-            </a:r>
-            <a:r>
-              <a:rPr lang="ru-RU" b="0" i="0" dirty="0">
-                <a:effectLst/>
-                <a:latin typeface="fkGroteskNeue"/>
-              </a:rPr>
-              <a:t>корреляция с фенотипом</a:t>
-            </a:r>
-            <a:br>
-              <a:rPr lang="ru-RU" b="0" i="0" dirty="0">
-                <a:effectLst/>
-                <a:latin typeface="fkGroteskNeue"/>
-              </a:rPr>
-            </a:br>
-            <a:r>
-              <a:rPr lang="ru-RU" b="0" i="0" dirty="0">
-                <a:effectLst/>
-                <a:latin typeface="fkGroteskNeue"/>
-              </a:rPr>
-              <a:t>✓ </a:t>
-            </a:r>
-            <a:r>
-              <a:rPr lang="en-US" b="0" i="0" dirty="0">
-                <a:effectLst/>
-                <a:latin typeface="fkGroteskNeue"/>
-              </a:rPr>
-              <a:t>Hub </a:t>
-            </a:r>
-            <a:r>
-              <a:rPr lang="ru-RU" b="0" i="0" dirty="0">
-                <a:effectLst/>
-                <a:latin typeface="fkGroteskNeue"/>
-              </a:rPr>
-              <a:t>гены и их биологическая роль</a:t>
-            </a:r>
-            <a:br>
-              <a:rPr lang="ru-RU" b="0" i="0" dirty="0">
-                <a:effectLst/>
-                <a:latin typeface="fkGroteskNeue"/>
-              </a:rPr>
-            </a:br>
-            <a:r>
-              <a:rPr lang="ru-RU" b="0" i="0" dirty="0">
-                <a:effectLst/>
-                <a:latin typeface="fkGroteskNeue"/>
-              </a:rPr>
-              <a:t>✓ Визуализация (</a:t>
-            </a:r>
-            <a:r>
-              <a:rPr lang="en-US" b="0" i="0" dirty="0">
-                <a:effectLst/>
-                <a:latin typeface="fkGroteskNeue"/>
-              </a:rPr>
-              <a:t>TOM plots, </a:t>
-            </a:r>
-            <a:r>
-              <a:rPr lang="en-US" b="0" i="0" dirty="0" err="1">
-                <a:effectLst/>
-                <a:latin typeface="fkGroteskNeue"/>
-              </a:rPr>
-              <a:t>Cytoscape</a:t>
-            </a:r>
-            <a:r>
-              <a:rPr lang="en-US" b="0" i="0" dirty="0">
-                <a:effectLst/>
-                <a:latin typeface="fkGroteskNeue"/>
-              </a:rPr>
-              <a:t>, </a:t>
-            </a:r>
-            <a:r>
-              <a:rPr lang="en-US" b="0" i="0" dirty="0" err="1">
-                <a:effectLst/>
-                <a:latin typeface="fkGroteskNeue"/>
-              </a:rPr>
-              <a:t>igraph</a:t>
-            </a:r>
-            <a:r>
-              <a:rPr lang="en-US" b="0" i="0" dirty="0">
-                <a:effectLst/>
-                <a:latin typeface="fkGroteskNeue"/>
-              </a:rPr>
-              <a:t>)</a:t>
-            </a:r>
-            <a:br>
-              <a:rPr lang="en-US" b="0" i="0" dirty="0">
-                <a:effectLst/>
-                <a:latin typeface="fkGroteskNeue"/>
-              </a:rPr>
-            </a:br>
-            <a:r>
-              <a:rPr lang="en-US" b="0" i="0" dirty="0">
-                <a:effectLst/>
-                <a:latin typeface="fkGroteskNeue"/>
-              </a:rPr>
-              <a:t>✓ </a:t>
-            </a:r>
-            <a:r>
-              <a:rPr lang="ru-RU" b="0" i="0" dirty="0">
-                <a:effectLst/>
-                <a:latin typeface="fkGroteskNeue"/>
-              </a:rPr>
-              <a:t>Функциональное обогащение (</a:t>
-            </a:r>
-            <a:r>
-              <a:rPr lang="en-US" b="0" i="0" dirty="0">
-                <a:effectLst/>
-                <a:latin typeface="fkGroteskNeue"/>
-              </a:rPr>
-              <a:t>GO, KEGG)</a:t>
-            </a:r>
-            <a:br>
-              <a:rPr lang="en-US" b="0" i="0" dirty="0">
-                <a:effectLst/>
-                <a:latin typeface="fkGroteskNeue"/>
-              </a:rPr>
-            </a:br>
-            <a:r>
-              <a:rPr lang="en-US" b="0" i="0" dirty="0">
-                <a:effectLst/>
-                <a:latin typeface="fkGroteskNeue"/>
-              </a:rPr>
-              <a:t>✓ Case Study: </a:t>
-            </a:r>
-            <a:r>
-              <a:rPr lang="ru-RU" b="0" i="0" dirty="0">
-                <a:effectLst/>
-                <a:latin typeface="fkGroteskNeue"/>
-              </a:rPr>
-              <a:t>рак молочной железы</a:t>
-            </a:r>
-            <a:br>
-              <a:rPr lang="ru-RU" b="0" i="0" dirty="0">
-                <a:effectLst/>
-                <a:latin typeface="fkGroteskNeue"/>
-              </a:rPr>
-            </a:br>
-            <a:r>
-              <a:rPr lang="ru-RU" b="0" i="0" dirty="0">
-                <a:effectLst/>
-                <a:latin typeface="fkGroteskNeue"/>
-              </a:rPr>
-              <a:t>✓ Интеграция с </a:t>
-            </a:r>
-            <a:r>
-              <a:rPr lang="en-US" b="0" i="0" dirty="0">
-                <a:effectLst/>
-                <a:latin typeface="fkGroteskNeue"/>
-              </a:rPr>
-              <a:t>ML (</a:t>
-            </a:r>
-            <a:r>
-              <a:rPr lang="ru-RU" b="0" i="0" dirty="0">
-                <a:effectLst/>
-                <a:latin typeface="fkGroteskNeue"/>
-              </a:rPr>
-              <a:t>модули как признаки)</a:t>
-            </a:r>
-          </a:p>
-          <a:p>
-            <a:pPr algn="l"/>
-            <a:r>
-              <a:rPr lang="ru-RU" b="0" i="0" dirty="0">
-                <a:effectLst/>
-                <a:latin typeface="fkGroteskNeue"/>
-              </a:rPr>
-              <a:t>Ключевая идея:</a:t>
-            </a:r>
-          </a:p>
-          <a:p>
-            <a:pPr algn="l"/>
-            <a:r>
-              <a:rPr lang="ru-RU" b="0" i="0" dirty="0">
-                <a:effectLst/>
-                <a:latin typeface="fkGroteskNeue"/>
-              </a:rPr>
-              <a:t>Гены не работают в изоляции. Сетевой анализ раскрывает модульную архитектуру биологических систем.</a:t>
-            </a:r>
-          </a:p>
-          <a:p>
-            <a:pPr algn="l"/>
-            <a:r>
-              <a:rPr lang="ru-RU" b="0" i="0" dirty="0">
-                <a:effectLst/>
-                <a:latin typeface="fkGroteskNeue"/>
-              </a:rPr>
-              <a:t>Модули + гены в модуле часто более информативны, чем одиночные гены.</a:t>
-            </a:r>
-          </a:p>
-          <a:p>
             <a:endParaRPr lang="ru-RU" sz="1200" b="0" i="0" kern="1200" dirty="0">
               <a:solidFill>
                 <a:schemeClr val="tx1"/>
@@ -8812,160 +2365,6 @@
           <a:lstStyle/>
           <a:p>
             <a:pPr algn="l"/>
-            <a:r>
-              <a:rPr lang="en-US" b="0" i="0" dirty="0">
-                <a:effectLst/>
-                <a:latin typeface="pplxSerif"/>
-              </a:rPr>
-              <a:t>WGCNA </a:t>
-            </a:r>
-            <a:r>
-              <a:rPr lang="ru-RU" b="0" i="0" dirty="0">
-                <a:effectLst/>
-                <a:latin typeface="pplxSerif"/>
-              </a:rPr>
-              <a:t>на сырых 20</a:t>
-            </a:r>
-            <a:r>
-              <a:rPr lang="en-US" b="0" i="0" dirty="0">
-                <a:effectLst/>
-                <a:latin typeface="pplxSerif"/>
-              </a:rPr>
-              <a:t>k </a:t>
-            </a:r>
-            <a:r>
-              <a:rPr lang="ru-RU" b="0" i="0" dirty="0">
-                <a:effectLst/>
-                <a:latin typeface="pplxSerif"/>
-              </a:rPr>
-              <a:t>генах работает, но медленно и шумно. Сначала </a:t>
-            </a:r>
-            <a:r>
-              <a:rPr lang="en-US" b="0" i="0" dirty="0">
-                <a:effectLst/>
-                <a:latin typeface="pplxSerif"/>
-              </a:rPr>
-              <a:t>DEA tumor vs normal: </a:t>
-            </a:r>
-            <a:r>
-              <a:rPr lang="en-US" b="0" i="0" dirty="0" err="1">
-                <a:effectLst/>
-                <a:latin typeface="pplxSerif"/>
-              </a:rPr>
-              <a:t>limma</a:t>
-            </a:r>
-            <a:r>
-              <a:rPr lang="en-US" b="0" i="0" dirty="0">
-                <a:effectLst/>
-                <a:latin typeface="pplxSerif"/>
-              </a:rPr>
-              <a:t>/</a:t>
-            </a:r>
-            <a:r>
-              <a:rPr lang="en-US" b="0" i="0" dirty="0" err="1">
-                <a:effectLst/>
-                <a:latin typeface="pplxSerif"/>
-              </a:rPr>
-              <a:t>edgeR</a:t>
-            </a:r>
-            <a:r>
-              <a:rPr lang="en-US" b="0" i="0" dirty="0">
-                <a:effectLst/>
-                <a:latin typeface="pplxSerif"/>
-              </a:rPr>
-              <a:t>, FDR&lt;0.05, </a:t>
-            </a:r>
-            <a:r>
-              <a:rPr lang="ru-RU" b="0" i="0" dirty="0">
-                <a:effectLst/>
-                <a:latin typeface="pplxSerif"/>
-              </a:rPr>
-              <a:t>топ 5</a:t>
-            </a:r>
-            <a:r>
-              <a:rPr lang="en-US" b="0" i="0" dirty="0">
-                <a:effectLst/>
-                <a:latin typeface="pplxSerif"/>
-              </a:rPr>
-              <a:t>k </a:t>
-            </a:r>
-            <a:r>
-              <a:rPr lang="ru-RU" b="0" i="0" dirty="0">
-                <a:effectLst/>
-                <a:latin typeface="pplxSerif"/>
-              </a:rPr>
-              <a:t>по </a:t>
-            </a:r>
-            <a:r>
-              <a:rPr lang="en-US" b="0" i="0" dirty="0">
-                <a:effectLst/>
-                <a:latin typeface="pplxSerif"/>
-              </a:rPr>
-              <a:t>variance. </a:t>
-            </a:r>
-            <a:r>
-              <a:rPr lang="ru-RU" b="0" i="0" dirty="0">
-                <a:effectLst/>
-                <a:latin typeface="pplxSerif"/>
-              </a:rPr>
-              <a:t>Убираем митохондрии, </a:t>
-            </a:r>
-            <a:r>
-              <a:rPr lang="en-US" b="0" i="0" dirty="0">
-                <a:effectLst/>
-                <a:latin typeface="pplxSerif"/>
-              </a:rPr>
-              <a:t>low-expressed. </a:t>
-            </a:r>
-            <a:r>
-              <a:rPr lang="ru-RU" b="0" i="0" dirty="0">
-                <a:effectLst/>
-                <a:latin typeface="pplxSerif"/>
-              </a:rPr>
-              <a:t>В </a:t>
-            </a:r>
-            <a:r>
-              <a:rPr lang="en-US" b="0" i="0" dirty="0">
-                <a:effectLst/>
-                <a:latin typeface="pplxSerif"/>
-              </a:rPr>
-              <a:t>TCGA breast </a:t>
-            </a:r>
-            <a:r>
-              <a:rPr lang="ru-RU" b="0" i="0" dirty="0">
-                <a:effectLst/>
-                <a:latin typeface="pplxSerif"/>
-              </a:rPr>
-              <a:t>из 20</a:t>
-            </a:r>
-            <a:r>
-              <a:rPr lang="en-US" b="0" i="0" dirty="0">
-                <a:effectLst/>
-                <a:latin typeface="pplxSerif"/>
-              </a:rPr>
-              <a:t>k → 2k DEGs </a:t>
-            </a:r>
-            <a:r>
-              <a:rPr lang="ru-RU" b="0" i="0" dirty="0">
-                <a:effectLst/>
-                <a:latin typeface="pplxSerif"/>
-              </a:rPr>
-              <a:t>для </a:t>
-            </a:r>
-            <a:r>
-              <a:rPr lang="en-US" b="0" i="0" dirty="0">
-                <a:effectLst/>
-                <a:latin typeface="pplxSerif"/>
-              </a:rPr>
-              <a:t>WGCNA — </a:t>
-            </a:r>
-            <a:r>
-              <a:rPr lang="ru-RU" b="0" i="0" dirty="0">
-                <a:effectLst/>
-                <a:latin typeface="pplxSerif"/>
-              </a:rPr>
-              <a:t>ускорение ×4, фокус на раковых путях.</a:t>
-            </a:r>
             <a:endParaRPr lang="ru-RU" sz="1200" b="0" i="0" kern="1200" dirty="0">
               <a:solidFill>
                 <a:schemeClr val="tx1"/>
@@ -9058,386 +2457,6 @@
           <a:bodyPr/>
           <a:lstStyle/>
           <a:p>
-            <a:pPr algn="l"/>
-            <a:r>
-              <a:rPr lang="ru-RU" b="0" i="0" dirty="0">
-                <a:effectLst/>
-                <a:latin typeface="fkGroteskNeue"/>
-              </a:rPr>
-              <a:t>Давайте разберемся с примером из жизни.</a:t>
-            </a:r>
-          </a:p>
-          <a:p>
-            <a:pPr algn="l"/>
-            <a:r>
-              <a:rPr lang="ru-RU" b="0" i="0" dirty="0">
-                <a:effectLst/>
-                <a:latin typeface="fkGroteskNeue"/>
-              </a:rPr>
-              <a:t>Представьте компанию:</a:t>
-            </a:r>
-          </a:p>
-          <a:p>
-            <a:pPr algn="l">
-              <a:buFont typeface="Arial" panose="020B0604020202020204" pitchFamily="34" charset="0"/>
-              <a:buChar char="•"/>
-            </a:pPr>
-            <a:r>
-              <a:rPr lang="ru-RU" b="0" i="0" dirty="0">
-                <a:effectLst/>
-                <a:latin typeface="fkGroteskNeue"/>
-              </a:rPr>
-              <a:t>CEO = главный ген (</a:t>
-            </a:r>
-            <a:r>
-              <a:rPr lang="ru-RU" b="0" i="0" dirty="0" err="1">
-                <a:effectLst/>
-                <a:latin typeface="fkGroteskNeue"/>
-              </a:rPr>
-              <a:t>high-level</a:t>
-            </a:r>
-            <a:r>
-              <a:rPr lang="ru-RU" b="0" i="0" dirty="0">
-                <a:effectLst/>
-                <a:latin typeface="fkGroteskNeue"/>
-              </a:rPr>
-              <a:t> </a:t>
-            </a:r>
-            <a:r>
-              <a:rPr lang="ru-RU" b="0" i="0" dirty="0" err="1">
-                <a:effectLst/>
-                <a:latin typeface="fkGroteskNeue"/>
-              </a:rPr>
-              <a:t>decisions</a:t>
-            </a:r>
-            <a:r>
-              <a:rPr lang="ru-RU" b="0" i="0" dirty="0">
-                <a:effectLst/>
-                <a:latin typeface="fkGroteskNeue"/>
-              </a:rPr>
-              <a:t>)</a:t>
-            </a:r>
-          </a:p>
-          <a:p>
-            <a:pPr algn="l">
-              <a:buFont typeface="Arial" panose="020B0604020202020204" pitchFamily="34" charset="0"/>
-              <a:buChar char="•"/>
-            </a:pPr>
-            <a:r>
-              <a:rPr lang="ru-RU" b="0" i="0" dirty="0" err="1">
-                <a:effectLst/>
-                <a:latin typeface="fkGroteskNeue"/>
-              </a:rPr>
-              <a:t>CTOs</a:t>
-            </a:r>
-            <a:r>
-              <a:rPr lang="ru-RU" b="0" i="0" dirty="0">
-                <a:effectLst/>
-                <a:latin typeface="fkGroteskNeue"/>
-              </a:rPr>
-              <a:t>, </a:t>
-            </a:r>
-            <a:r>
-              <a:rPr lang="ru-RU" b="0" i="0" dirty="0" err="1">
-                <a:effectLst/>
-                <a:latin typeface="fkGroteskNeue"/>
-              </a:rPr>
-              <a:t>CFOs</a:t>
-            </a:r>
-            <a:r>
-              <a:rPr lang="ru-RU" b="0" i="0" dirty="0">
-                <a:effectLst/>
-                <a:latin typeface="fkGroteskNeue"/>
-              </a:rPr>
-              <a:t> = гены среднего уровня</a:t>
-            </a:r>
-          </a:p>
-          <a:p>
-            <a:pPr algn="l">
-              <a:buFont typeface="Arial" panose="020B0604020202020204" pitchFamily="34" charset="0"/>
-              <a:buChar char="•"/>
-            </a:pPr>
-            <a:r>
-              <a:rPr lang="ru-RU" b="0" i="0" dirty="0">
-                <a:effectLst/>
-                <a:latin typeface="fkGroteskNeue"/>
-              </a:rPr>
-              <a:t>Разработчики, тестеры = гены низкого уровня</a:t>
-            </a:r>
-          </a:p>
-          <a:p>
-            <a:pPr algn="l"/>
-            <a:r>
-              <a:rPr lang="ru-RU" b="0" i="0" dirty="0">
-                <a:effectLst/>
-                <a:latin typeface="fkGroteskNeue"/>
-              </a:rPr>
-              <a:t>Если CEO одиночка принимает решения → компания может упасть (зависит от одного человека).</a:t>
-            </a:r>
-          </a:p>
-          <a:p>
-            <a:pPr algn="l"/>
-            <a:r>
-              <a:rPr lang="ru-RU" b="0" i="0" dirty="0">
-                <a:effectLst/>
-                <a:latin typeface="fkGroteskNeue"/>
-              </a:rPr>
-              <a:t>Если команда CEO + </a:t>
-            </a:r>
-            <a:r>
-              <a:rPr lang="ru-RU" b="0" i="0" dirty="0" err="1">
-                <a:effectLst/>
-                <a:latin typeface="fkGroteskNeue"/>
-              </a:rPr>
-              <a:t>CTOs</a:t>
-            </a:r>
-            <a:r>
-              <a:rPr lang="ru-RU" b="0" i="0" dirty="0">
-                <a:effectLst/>
-                <a:latin typeface="fkGroteskNeue"/>
-              </a:rPr>
-              <a:t> + </a:t>
-            </a:r>
-            <a:r>
-              <a:rPr lang="ru-RU" b="0" i="0" dirty="0" err="1">
-                <a:effectLst/>
-                <a:latin typeface="fkGroteskNeue"/>
-              </a:rPr>
-              <a:t>CFOs</a:t>
-            </a:r>
-            <a:r>
-              <a:rPr lang="ru-RU" b="0" i="0" dirty="0">
-                <a:effectLst/>
-                <a:latin typeface="fkGroteskNeue"/>
-              </a:rPr>
-              <a:t> + разработчики работают вместе → компания крепче (распределённое управление).</a:t>
-            </a:r>
-          </a:p>
-          <a:p>
-            <a:pPr algn="l"/>
-            <a:r>
-              <a:rPr lang="ru-RU" b="0" i="0" dirty="0">
-                <a:effectLst/>
-                <a:latin typeface="fkGroteskNeue"/>
-              </a:rPr>
-              <a:t>Молекулярная система то же!</a:t>
-            </a:r>
-          </a:p>
-          <a:p>
-            <a:pPr algn="l"/>
-            <a:r>
-              <a:rPr lang="ru-RU" b="0" i="0" dirty="0">
-                <a:effectLst/>
-                <a:latin typeface="fkGroteskNeue"/>
-              </a:rPr>
-              <a:t>Классический подход (до 2000х):</a:t>
-            </a:r>
-          </a:p>
-          <a:p>
-            <a:pPr algn="l"/>
-            <a:r>
-              <a:rPr lang="ru-RU" b="0" i="0" dirty="0">
-                <a:effectLst/>
-                <a:latin typeface="fkGroteskNeue"/>
-              </a:rPr>
-              <a:t>У нас есть 20,000 генов. Мы ищем "</a:t>
-            </a:r>
-            <a:r>
-              <a:rPr lang="ru-RU" b="0" i="0" dirty="0" err="1">
-                <a:effectLst/>
-                <a:latin typeface="fkGroteskNeue"/>
-              </a:rPr>
-              <a:t>one</a:t>
-            </a:r>
-            <a:r>
-              <a:rPr lang="ru-RU" b="0" i="0" dirty="0">
-                <a:effectLst/>
-                <a:latin typeface="fkGroteskNeue"/>
-              </a:rPr>
-              <a:t> </a:t>
-            </a:r>
-            <a:r>
-              <a:rPr lang="ru-RU" b="0" i="0" dirty="0" err="1">
-                <a:effectLst/>
-                <a:latin typeface="fkGroteskNeue"/>
-              </a:rPr>
-              <a:t>magic</a:t>
-            </a:r>
-            <a:r>
-              <a:rPr lang="ru-RU" b="0" i="0" dirty="0">
-                <a:effectLst/>
-                <a:latin typeface="fkGroteskNeue"/>
-              </a:rPr>
-              <a:t> </a:t>
-            </a:r>
-            <a:r>
-              <a:rPr lang="ru-RU" b="0" i="0" dirty="0" err="1">
-                <a:effectLst/>
-                <a:latin typeface="fkGroteskNeue"/>
-              </a:rPr>
-              <a:t>gene</a:t>
-            </a:r>
-            <a:r>
-              <a:rPr lang="ru-RU" b="0" i="0" dirty="0">
-                <a:effectLst/>
-                <a:latin typeface="fkGroteskNeue"/>
-              </a:rPr>
-              <a:t>" для рака.</a:t>
-            </a:r>
-          </a:p>
-          <a:p>
-            <a:pPr algn="l"/>
-            <a:r>
-              <a:rPr lang="ru-RU" b="0" i="0" dirty="0">
-                <a:effectLst/>
-                <a:latin typeface="fkGroteskNeue"/>
-              </a:rPr>
-              <a:t>"Ген X мутирован в 80% раков?" → публикуем в Nature!</a:t>
-            </a:r>
-          </a:p>
-          <a:p>
-            <a:pPr algn="l"/>
-            <a:r>
-              <a:rPr lang="ru-RU" b="0" i="0" dirty="0">
-                <a:effectLst/>
-                <a:latin typeface="fkGroteskNeue"/>
-              </a:rPr>
-              <a:t>Результат: конечно, мы находим такие гены. Но:</a:t>
-            </a:r>
-          </a:p>
-          <a:p>
-            <a:pPr algn="l">
-              <a:buFont typeface="Arial" panose="020B0604020202020204" pitchFamily="34" charset="0"/>
-              <a:buChar char="•"/>
-            </a:pPr>
-            <a:r>
-              <a:rPr lang="ru-RU" b="0" i="0" dirty="0">
-                <a:effectLst/>
-                <a:latin typeface="fkGroteskNeue"/>
-              </a:rPr>
-              <a:t>TP53: мутирован в 50% раков, но в 30% здоровых с ним всё ОК (не мутирует рак?)</a:t>
-            </a:r>
-          </a:p>
-          <a:p>
-            <a:pPr algn="l">
-              <a:buFont typeface="Arial" panose="020B0604020202020204" pitchFamily="34" charset="0"/>
-              <a:buChar char="•"/>
-            </a:pPr>
-            <a:r>
-              <a:rPr lang="ru-RU" b="0" i="0" dirty="0">
-                <a:effectLst/>
-                <a:latin typeface="fkGroteskNeue"/>
-              </a:rPr>
-              <a:t>BRCA1: мутирован → риск рака 70%, но не 100%</a:t>
-            </a:r>
-          </a:p>
-          <a:p>
-            <a:pPr algn="l"/>
-            <a:r>
-              <a:rPr lang="ru-RU" b="0" i="0" dirty="0">
-                <a:effectLst/>
-                <a:latin typeface="fkGroteskNeue"/>
-              </a:rPr>
-              <a:t>Почему? Потому что контекст имеет значение!</a:t>
-            </a:r>
-          </a:p>
-          <a:p>
-            <a:pPr algn="l"/>
-            <a:r>
-              <a:rPr lang="ru-RU" b="0" i="0" dirty="0">
-                <a:effectLst/>
-                <a:latin typeface="fkGroteskNeue"/>
-              </a:rPr>
-              <a:t>Системный подход (2000х-2010х):</a:t>
-            </a:r>
-          </a:p>
-          <a:p>
-            <a:pPr algn="l"/>
-            <a:r>
-              <a:rPr lang="ru-RU" b="0" i="0" dirty="0">
-                <a:effectLst/>
-                <a:latin typeface="fkGroteskNeue"/>
-              </a:rPr>
-              <a:t>"А может быть, не один ген, а модуль 10-20 генов?"</a:t>
-            </a:r>
-          </a:p>
-          <a:p>
-            <a:pPr algn="l"/>
-            <a:r>
-              <a:rPr lang="ru-RU" b="0" i="0" dirty="0">
-                <a:effectLst/>
-                <a:latin typeface="fkGroteskNeue"/>
-              </a:rPr>
-              <a:t>Результат: модули намного лучше предсказывают рак!</a:t>
-            </a:r>
-          </a:p>
-          <a:p>
-            <a:pPr algn="l"/>
-            <a:r>
-              <a:rPr lang="ru-RU" b="0" i="0" dirty="0">
-                <a:effectLst/>
-                <a:latin typeface="fkGroteskNeue"/>
-              </a:rPr>
-              <a:t>Например, "иммунный модуль" (200 генов из иммунной системы) с </a:t>
-            </a:r>
-            <a:r>
-              <a:rPr lang="ru-RU" b="0" i="0" dirty="0" err="1">
-                <a:effectLst/>
-                <a:latin typeface="fkGroteskNeue"/>
-              </a:rPr>
-              <a:t>high</a:t>
-            </a:r>
-            <a:r>
-              <a:rPr lang="ru-RU" b="0" i="0" dirty="0">
-                <a:effectLst/>
-                <a:latin typeface="fkGroteskNeue"/>
-              </a:rPr>
-              <a:t> </a:t>
-            </a:r>
-            <a:r>
-              <a:rPr lang="ru-RU" b="0" i="0" dirty="0" err="1">
-                <a:effectLst/>
-                <a:latin typeface="fkGroteskNeue"/>
-              </a:rPr>
-              <a:t>expression</a:t>
-            </a:r>
-            <a:r>
-              <a:rPr lang="ru-RU" b="0" i="0" dirty="0">
-                <a:effectLst/>
-                <a:latin typeface="fkGroteskNeue"/>
-              </a:rPr>
-              <a:t> → выживает 95%, с </a:t>
-            </a:r>
-            <a:r>
-              <a:rPr lang="ru-RU" b="0" i="0" dirty="0" err="1">
-                <a:effectLst/>
-                <a:latin typeface="fkGroteskNeue"/>
-              </a:rPr>
-              <a:t>low</a:t>
-            </a:r>
-            <a:r>
-              <a:rPr lang="ru-RU" b="0" i="0" dirty="0">
-                <a:effectLst/>
-                <a:latin typeface="fkGroteskNeue"/>
-              </a:rPr>
-              <a:t> </a:t>
-            </a:r>
-            <a:r>
-              <a:rPr lang="ru-RU" b="0" i="0" dirty="0" err="1">
-                <a:effectLst/>
-                <a:latin typeface="fkGroteskNeue"/>
-              </a:rPr>
-              <a:t>expression</a:t>
-            </a:r>
-            <a:r>
-              <a:rPr lang="ru-RU" b="0" i="0" dirty="0">
-                <a:effectLst/>
-                <a:latin typeface="fkGroteskNeue"/>
-              </a:rPr>
-              <a:t> → выживает 30%.</a:t>
-            </a:r>
-          </a:p>
-          <a:p>
             <a:endParaRPr lang="ru-RU" sz="1200" b="0" i="0" kern="1200" dirty="0">
               <a:solidFill>
                 <a:schemeClr val="tx1"/>
@@ -9530,288 +2549,6 @@
           <a:bodyPr/>
           <a:lstStyle/>
           <a:p>
-            <a:pPr algn="l"/>
-            <a:r>
-              <a:rPr lang="ru-RU" b="0" i="0" dirty="0">
-                <a:effectLst/>
-                <a:latin typeface="fkGroteskNeue"/>
-              </a:rPr>
-              <a:t>Теперь язык. Граф — это просто набор узлов (вершин) и связей между ними (рёбра).</a:t>
-            </a:r>
-          </a:p>
-          <a:p>
-            <a:pPr algn="l"/>
-            <a:r>
-              <a:rPr lang="ru-RU" b="0" i="0" dirty="0">
-                <a:effectLst/>
-                <a:latin typeface="fkGroteskNeue"/>
-              </a:rPr>
-              <a:t>Узлы = гены, белки, пациенты (в зависимости от контекста)</a:t>
-            </a:r>
-            <a:br>
-              <a:rPr lang="ru-RU" b="0" i="0" dirty="0">
-                <a:effectLst/>
-                <a:latin typeface="fkGroteskNeue"/>
-              </a:rPr>
-            </a:br>
-            <a:r>
-              <a:rPr lang="ru-RU" b="0" i="0" dirty="0">
-                <a:effectLst/>
-                <a:latin typeface="fkGroteskNeue"/>
-              </a:rPr>
-              <a:t>Рёбра = "эти два узла связаны"</a:t>
-            </a:r>
-          </a:p>
-          <a:p>
-            <a:pPr algn="l"/>
-            <a:r>
-              <a:rPr lang="ru-RU" b="0" i="0" dirty="0">
-                <a:effectLst/>
-                <a:latin typeface="fkGroteskNeue"/>
-              </a:rPr>
-              <a:t>Взвешенный граф = рёбра имеют веса (силы).</a:t>
-            </a:r>
-          </a:p>
-          <a:p>
-            <a:r>
-              <a:rPr lang="ru-RU" b="0" i="0" dirty="0">
-                <a:effectLst/>
-                <a:latin typeface="fkGroteskNeue"/>
-              </a:rPr>
-              <a:t>Пример:</a:t>
-            </a:r>
-          </a:p>
-          <a:p>
-            <a:r>
-              <a:rPr lang="ru-RU" sz="1200" b="0" i="0" kern="1200" dirty="0" err="1">
-                <a:solidFill>
-                  <a:schemeClr val="tx1"/>
-                </a:solidFill>
-                <a:effectLst/>
-                <a:latin typeface="fkGroteskNeue"/>
-                <a:ea typeface="+mn-ea"/>
-                <a:cs typeface="+mn-cs"/>
-              </a:rPr>
-              <a:t>ГенA</a:t>
-            </a:r>
-            <a:r>
-              <a:rPr lang="ru-RU" sz="1200" b="0" i="0" kern="1200" dirty="0">
-                <a:solidFill>
-                  <a:schemeClr val="tx1"/>
-                </a:solidFill>
-                <a:effectLst/>
-                <a:latin typeface="fkGroteskNeue"/>
-                <a:ea typeface="+mn-ea"/>
-                <a:cs typeface="+mn-cs"/>
-              </a:rPr>
-              <a:t> - </a:t>
-            </a:r>
-            <a:r>
-              <a:rPr lang="ru-RU" sz="1200" b="0" i="0" kern="1200" dirty="0" err="1">
-                <a:solidFill>
-                  <a:schemeClr val="tx1"/>
-                </a:solidFill>
-                <a:effectLst/>
-                <a:latin typeface="fkGroteskNeue"/>
-                <a:ea typeface="+mn-ea"/>
-                <a:cs typeface="+mn-cs"/>
-              </a:rPr>
-              <a:t>ГенB</a:t>
-            </a:r>
-            <a:r>
-              <a:rPr lang="ru-RU" sz="1200" b="0" i="0" kern="1200" dirty="0">
-                <a:solidFill>
-                  <a:schemeClr val="tx1"/>
-                </a:solidFill>
-                <a:effectLst/>
-                <a:latin typeface="fkGroteskNeue"/>
-                <a:ea typeface="+mn-ea"/>
-                <a:cs typeface="+mn-cs"/>
-              </a:rPr>
-              <a:t>: корреляция = 0.8 (сильная связь, толстая линия)</a:t>
-            </a:r>
-          </a:p>
-          <a:p>
-            <a:r>
-              <a:rPr lang="ru-RU" sz="1200" b="0" i="0" kern="1200" dirty="0" err="1">
-                <a:solidFill>
-                  <a:schemeClr val="tx1"/>
-                </a:solidFill>
-                <a:effectLst/>
-                <a:latin typeface="fkGroteskNeue"/>
-                <a:ea typeface="+mn-ea"/>
-                <a:cs typeface="+mn-cs"/>
-              </a:rPr>
-              <a:t>ГенA</a:t>
-            </a:r>
-            <a:r>
-              <a:rPr lang="ru-RU" sz="1200" b="0" i="0" kern="1200" dirty="0">
-                <a:solidFill>
-                  <a:schemeClr val="tx1"/>
-                </a:solidFill>
-                <a:effectLst/>
-                <a:latin typeface="fkGroteskNeue"/>
-                <a:ea typeface="+mn-ea"/>
-                <a:cs typeface="+mn-cs"/>
-              </a:rPr>
-              <a:t> - </a:t>
-            </a:r>
-            <a:r>
-              <a:rPr lang="ru-RU" sz="1200" b="0" i="0" kern="1200" dirty="0" err="1">
-                <a:solidFill>
-                  <a:schemeClr val="tx1"/>
-                </a:solidFill>
-                <a:effectLst/>
-                <a:latin typeface="fkGroteskNeue"/>
-                <a:ea typeface="+mn-ea"/>
-                <a:cs typeface="+mn-cs"/>
-              </a:rPr>
-              <a:t>ГенC</a:t>
-            </a:r>
-            <a:r>
-              <a:rPr lang="ru-RU" sz="1200" b="0" i="0" kern="1200" dirty="0">
-                <a:solidFill>
-                  <a:schemeClr val="tx1"/>
-                </a:solidFill>
-                <a:effectLst/>
-                <a:latin typeface="fkGroteskNeue"/>
-                <a:ea typeface="+mn-ea"/>
-                <a:cs typeface="+mn-cs"/>
-              </a:rPr>
-              <a:t>: корреляция = 0.2 (слабая связь, тонкая линия)</a:t>
-            </a:r>
-          </a:p>
-          <a:p>
-            <a:pPr algn="l"/>
-            <a:r>
-              <a:rPr lang="ru-RU" b="0" i="0" dirty="0">
-                <a:effectLst/>
-                <a:latin typeface="fkGroteskNeue"/>
-              </a:rPr>
-              <a:t>Направленный граф:</a:t>
-            </a:r>
-            <a:br>
-              <a:rPr lang="ru-RU" b="0" i="0" dirty="0">
-                <a:effectLst/>
-                <a:latin typeface="fkGroteskNeue"/>
-              </a:rPr>
-            </a:br>
-            <a:r>
-              <a:rPr lang="ru-RU" b="0" i="0" dirty="0">
-                <a:effectLst/>
-                <a:latin typeface="fkGroteskNeue"/>
-              </a:rPr>
-              <a:t>Стрелка </a:t>
-            </a:r>
-            <a:r>
-              <a:rPr lang="ru-RU" b="0" i="0" dirty="0" err="1">
-                <a:effectLst/>
-                <a:latin typeface="fkGroteskNeue"/>
-              </a:rPr>
-              <a:t>ГенA</a:t>
-            </a:r>
-            <a:r>
-              <a:rPr lang="ru-RU" b="0" i="0" dirty="0">
-                <a:effectLst/>
-                <a:latin typeface="fkGroteskNeue"/>
-              </a:rPr>
-              <a:t> → </a:t>
-            </a:r>
-            <a:r>
-              <a:rPr lang="ru-RU" b="0" i="0" dirty="0" err="1">
-                <a:effectLst/>
-                <a:latin typeface="fkGroteskNeue"/>
-              </a:rPr>
-              <a:t>ГенB</a:t>
-            </a:r>
-            <a:r>
-              <a:rPr lang="ru-RU" b="0" i="0" dirty="0">
-                <a:effectLst/>
-                <a:latin typeface="fkGroteskNeue"/>
-              </a:rPr>
-              <a:t> = "</a:t>
-            </a:r>
-            <a:r>
-              <a:rPr lang="ru-RU" b="0" i="0" dirty="0" err="1">
-                <a:effectLst/>
-                <a:latin typeface="fkGroteskNeue"/>
-              </a:rPr>
-              <a:t>ГенA</a:t>
-            </a:r>
-            <a:r>
-              <a:rPr lang="ru-RU" b="0" i="0" dirty="0">
-                <a:effectLst/>
-                <a:latin typeface="fkGroteskNeue"/>
-              </a:rPr>
-              <a:t> регулирует </a:t>
-            </a:r>
-            <a:r>
-              <a:rPr lang="ru-RU" b="0" i="0" dirty="0" err="1">
-                <a:effectLst/>
-                <a:latin typeface="fkGroteskNeue"/>
-              </a:rPr>
-              <a:t>ГенB</a:t>
-            </a:r>
-            <a:r>
-              <a:rPr lang="ru-RU" b="0" i="0" dirty="0">
-                <a:effectLst/>
-                <a:latin typeface="fkGroteskNeue"/>
-              </a:rPr>
-              <a:t>" (есть направление)</a:t>
-            </a:r>
-          </a:p>
-          <a:p>
-            <a:pPr algn="l"/>
-            <a:r>
-              <a:rPr lang="ru-RU" b="0" i="0" dirty="0">
-                <a:effectLst/>
-                <a:latin typeface="fkGroteskNeue"/>
-              </a:rPr>
-              <a:t>Ненаправленный граф:</a:t>
-            </a:r>
-            <a:br>
-              <a:rPr lang="ru-RU" b="0" i="0" dirty="0">
-                <a:effectLst/>
-                <a:latin typeface="fkGroteskNeue"/>
-              </a:rPr>
-            </a:br>
-            <a:r>
-              <a:rPr lang="ru-RU" b="0" i="0" dirty="0">
-                <a:effectLst/>
-                <a:latin typeface="fkGroteskNeue"/>
-              </a:rPr>
-              <a:t>Просто линия = "</a:t>
-            </a:r>
-            <a:r>
-              <a:rPr lang="ru-RU" b="0" i="0" dirty="0" err="1">
-                <a:effectLst/>
-                <a:latin typeface="fkGroteskNeue"/>
-              </a:rPr>
-              <a:t>ГенA</a:t>
-            </a:r>
-            <a:r>
-              <a:rPr lang="ru-RU" b="0" i="0" dirty="0">
-                <a:effectLst/>
-                <a:latin typeface="fkGroteskNeue"/>
-              </a:rPr>
-              <a:t> и </a:t>
-            </a:r>
-            <a:r>
-              <a:rPr lang="ru-RU" b="0" i="0" dirty="0" err="1">
-                <a:effectLst/>
-                <a:latin typeface="fkGroteskNeue"/>
-              </a:rPr>
-              <a:t>ГенB</a:t>
-            </a:r>
-            <a:r>
-              <a:rPr lang="ru-RU" b="0" i="0" dirty="0">
-                <a:effectLst/>
-                <a:latin typeface="fkGroteskNeue"/>
-              </a:rPr>
-              <a:t> скоррелированы" (нет направления, просто связь)</a:t>
-            </a:r>
-          </a:p>
-          <a:p>
             <a:endParaRPr lang="ru-RU" sz="1200" b="0" i="0" kern="1200" dirty="0">
               <a:solidFill>
                 <a:schemeClr val="tx1"/>
@@ -9905,186 +2642,6 @@
           <a:lstStyle/>
           <a:p>
             <a:pPr algn="l"/>
-            <a:r>
-              <a:rPr lang="ru-RU" b="0" i="0" dirty="0">
-                <a:effectLst/>
-                <a:latin typeface="fkGroteskNeue"/>
-              </a:rPr>
-              <a:t>Как описать граф? Метрики.</a:t>
-            </a:r>
-          </a:p>
-          <a:p>
-            <a:pPr algn="l"/>
-            <a:r>
-              <a:rPr lang="ru-RU" b="0" i="0" dirty="0">
-                <a:effectLst/>
-                <a:latin typeface="fkGroteskNeue"/>
-              </a:rPr>
-              <a:t>Степень (</a:t>
-            </a:r>
-            <a:r>
-              <a:rPr lang="ru-RU" b="0" i="0" dirty="0" err="1">
-                <a:effectLst/>
-                <a:latin typeface="fkGroteskNeue"/>
-              </a:rPr>
-              <a:t>Degree</a:t>
-            </a:r>
-            <a:r>
-              <a:rPr lang="ru-RU" b="0" i="0" dirty="0">
-                <a:effectLst/>
-                <a:latin typeface="fkGroteskNeue"/>
-              </a:rPr>
-              <a:t>):</a:t>
-            </a:r>
-          </a:p>
-          <a:p>
-            <a:pPr algn="l"/>
-            <a:r>
-              <a:rPr lang="ru-RU" b="0" i="0" dirty="0">
-                <a:effectLst/>
-                <a:latin typeface="fkGroteskNeue"/>
-              </a:rPr>
-              <a:t>Сколько других узлов соединено с этим?</a:t>
-            </a:r>
-          </a:p>
-          <a:p>
-            <a:pPr algn="l"/>
-            <a:r>
-              <a:rPr lang="ru-RU" b="0" i="0" dirty="0">
-                <a:effectLst/>
-                <a:latin typeface="fkGroteskNeue"/>
-              </a:rPr>
-              <a:t>Ген A: </a:t>
-            </a:r>
-            <a:r>
-              <a:rPr lang="ru-RU" b="0" i="0" dirty="0" err="1">
-                <a:effectLst/>
-                <a:latin typeface="fkGroteskNeue"/>
-              </a:rPr>
-              <a:t>degree</a:t>
-            </a:r>
-            <a:r>
-              <a:rPr lang="ru-RU" b="0" i="0" dirty="0">
-                <a:effectLst/>
-                <a:latin typeface="fkGroteskNeue"/>
-              </a:rPr>
-              <a:t> = 3 (соединён с B, C, D)</a:t>
-            </a:r>
-          </a:p>
-          <a:p>
-            <a:pPr algn="l"/>
-            <a:r>
-              <a:rPr lang="ru-RU" b="0" i="0" dirty="0" err="1">
-                <a:effectLst/>
-                <a:latin typeface="fkGroteskNeue"/>
-              </a:rPr>
-              <a:t>Hub</a:t>
-            </a:r>
-            <a:r>
-              <a:rPr lang="ru-RU" b="0" i="0" dirty="0">
-                <a:effectLst/>
-                <a:latin typeface="fkGroteskNeue"/>
-              </a:rPr>
-              <a:t> гены = гены с высокой степенью (много соединений)</a:t>
-            </a:r>
-          </a:p>
-          <a:p>
-            <a:pPr algn="l"/>
-            <a:r>
-              <a:rPr lang="ru-RU" b="0" i="0" dirty="0">
-                <a:effectLst/>
-                <a:latin typeface="fkGroteskNeue"/>
-              </a:rPr>
-              <a:t>Интуиция: </a:t>
-            </a:r>
-            <a:r>
-              <a:rPr lang="ru-RU" b="0" i="0" dirty="0" err="1">
-                <a:effectLst/>
-                <a:latin typeface="fkGroteskNeue"/>
-              </a:rPr>
-              <a:t>hub</a:t>
-            </a:r>
-            <a:r>
-              <a:rPr lang="ru-RU" b="0" i="0" dirty="0">
-                <a:effectLst/>
-                <a:latin typeface="fkGroteskNeue"/>
-              </a:rPr>
-              <a:t> гены важнее (больше влияния на систему) </a:t>
-            </a:r>
-          </a:p>
-          <a:p>
-            <a:pPr algn="l"/>
-            <a:r>
-              <a:rPr lang="ru-RU" b="0" i="0" dirty="0" err="1">
-                <a:effectLst/>
-                <a:latin typeface="fkGroteskNeue"/>
-              </a:rPr>
-              <a:t>Кластеризационный</a:t>
-            </a:r>
-            <a:r>
-              <a:rPr lang="ru-RU" b="0" i="0" dirty="0">
-                <a:effectLst/>
-                <a:latin typeface="fkGroteskNeue"/>
-              </a:rPr>
-              <a:t> коэффициент (</a:t>
-            </a:r>
-            <a:r>
-              <a:rPr lang="ru-RU" b="0" i="0" dirty="0" err="1">
-                <a:effectLst/>
-                <a:latin typeface="fkGroteskNeue"/>
-              </a:rPr>
-              <a:t>Clustering</a:t>
-            </a:r>
-            <a:r>
-              <a:rPr lang="ru-RU" b="0" i="0" dirty="0">
-                <a:effectLst/>
-                <a:latin typeface="fkGroteskNeue"/>
-              </a:rPr>
-              <a:t> </a:t>
-            </a:r>
-            <a:r>
-              <a:rPr lang="ru-RU" b="0" i="0" dirty="0" err="1">
-                <a:effectLst/>
-                <a:latin typeface="fkGroteskNeue"/>
-              </a:rPr>
-              <a:t>Coefficient</a:t>
-            </a:r>
-            <a:r>
-              <a:rPr lang="ru-RU" b="0" i="0" dirty="0">
-                <a:effectLst/>
-                <a:latin typeface="fkGroteskNeue"/>
-              </a:rPr>
-              <a:t>):</a:t>
-            </a:r>
-          </a:p>
-          <a:p>
-            <a:pPr algn="l"/>
-            <a:r>
-              <a:rPr lang="ru-RU" b="0" i="0" dirty="0">
-                <a:effectLst/>
-                <a:latin typeface="fkGroteskNeue"/>
-              </a:rPr>
-              <a:t>Если я соединён с генами B и C, соединены ли B и C между собой?</a:t>
-            </a:r>
-          </a:p>
-          <a:p>
-            <a:r>
-              <a:rPr lang="ru-RU" b="0" i="0" dirty="0">
-                <a:effectLst/>
-                <a:latin typeface="fkGroteskNeue"/>
-              </a:rPr>
-              <a:t>Высокий CC = плотная подсеть (клика) = много "соседские отношения"</a:t>
-            </a:r>
-            <a:br>
-              <a:rPr lang="ru-RU" dirty="0"/>
-            </a:br>
-            <a:r>
-              <a:rPr lang="ru-RU" b="0" i="0" dirty="0">
-                <a:effectLst/>
-                <a:latin typeface="fkGroteskNeue"/>
-              </a:rPr>
-              <a:t>Низкий CC = разреженная сеть = "я соединяю разные части"</a:t>
-            </a:r>
             <a:endParaRPr lang="ru-RU" sz="1200" b="0" i="0" kern="1200" dirty="0">
               <a:solidFill>
                 <a:schemeClr val="tx1"/>
@@ -10177,186 +2734,6 @@
           <a:bodyPr/>
           <a:lstStyle/>
           <a:p>
-            <a:pPr algn="l"/>
-            <a:r>
-              <a:rPr lang="ru-RU" b="0" i="0" dirty="0" err="1">
-                <a:effectLst/>
-                <a:latin typeface="fkGroteskNeue"/>
-              </a:rPr>
-              <a:t>Centrality</a:t>
-            </a:r>
-            <a:r>
-              <a:rPr lang="ru-RU" b="0" i="0" dirty="0">
-                <a:effectLst/>
-                <a:latin typeface="fkGroteskNeue"/>
-              </a:rPr>
-              <a:t> </a:t>
-            </a:r>
-            <a:r>
-              <a:rPr lang="ru-RU" b="0" i="0" dirty="0" err="1">
-                <a:effectLst/>
-                <a:latin typeface="fkGroteskNeue"/>
-              </a:rPr>
-              <a:t>меtrики</a:t>
-            </a:r>
-            <a:r>
-              <a:rPr lang="ru-RU" b="0" i="0" dirty="0">
-                <a:effectLst/>
-                <a:latin typeface="fkGroteskNeue"/>
-              </a:rPr>
-              <a:t>:</a:t>
-            </a:r>
-          </a:p>
-          <a:p>
-            <a:pPr algn="l"/>
-            <a:r>
-              <a:rPr lang="ru-RU" b="0" i="0" dirty="0" err="1">
-                <a:effectLst/>
-                <a:latin typeface="fkGroteskNeue"/>
-              </a:rPr>
-              <a:t>Betweenness</a:t>
-            </a:r>
-            <a:r>
-              <a:rPr lang="ru-RU" b="0" i="0" dirty="0">
-                <a:effectLst/>
-                <a:latin typeface="fkGroteskNeue"/>
-              </a:rPr>
-              <a:t>: сколько кратчайших путей проходит через меня?</a:t>
-            </a:r>
-          </a:p>
-          <a:p>
-            <a:pPr algn="l"/>
-            <a:r>
-              <a:rPr lang="ru-RU" b="0" i="0" dirty="0">
-                <a:effectLst/>
-                <a:latin typeface="fkGroteskNeue"/>
-              </a:rPr>
-              <a:t>Смысл: гены, которые "мостят" разные части сети</a:t>
-            </a:r>
-          </a:p>
-          <a:p>
-            <a:pPr algn="l"/>
-            <a:r>
-              <a:rPr lang="ru-RU" b="0" i="0" dirty="0" err="1">
-                <a:effectLst/>
-                <a:latin typeface="fkGroteskNeue"/>
-              </a:rPr>
-              <a:t>Closeness</a:t>
-            </a:r>
-            <a:r>
-              <a:rPr lang="ru-RU" b="0" i="0" dirty="0">
-                <a:effectLst/>
-                <a:latin typeface="fkGroteskNeue"/>
-              </a:rPr>
-              <a:t>: как далеко я от других узлов?</a:t>
-            </a:r>
-          </a:p>
-          <a:p>
-            <a:r>
-              <a:rPr lang="ru-RU" sz="1200" b="0" i="0" kern="1200" dirty="0">
-                <a:solidFill>
-                  <a:schemeClr val="tx1"/>
-                </a:solidFill>
-                <a:latin typeface="+mn-lt"/>
-                <a:ea typeface="+mn-ea"/>
-                <a:cs typeface="+mn-cs"/>
-              </a:rPr>
-              <a:t>Центральный ген: близко ко всем (расстояние = 1-2 шага)</a:t>
-            </a:r>
-          </a:p>
-          <a:p>
-            <a:r>
-              <a:rPr lang="ru-RU" sz="1200" b="0" i="0" kern="1200" dirty="0">
-                <a:solidFill>
-                  <a:schemeClr val="tx1"/>
-                </a:solidFill>
-                <a:latin typeface="+mn-lt"/>
-                <a:ea typeface="+mn-ea"/>
-                <a:cs typeface="+mn-cs"/>
-              </a:rPr>
-              <a:t>Периферийный ген: далеко от многих (расстояние = 5-10 шагов)</a:t>
-            </a:r>
-          </a:p>
-          <a:p>
-            <a:pPr algn="l"/>
-            <a:r>
-              <a:rPr lang="ru-RU" b="0" i="0" dirty="0" err="1">
-                <a:effectLst/>
-                <a:latin typeface="fkGroteskNeue"/>
-              </a:rPr>
-              <a:t>Eigenvector</a:t>
-            </a:r>
-            <a:r>
-              <a:rPr lang="ru-RU" b="0" i="0" dirty="0">
-                <a:effectLst/>
-                <a:latin typeface="fkGroteskNeue"/>
-              </a:rPr>
-              <a:t> </a:t>
-            </a:r>
-            <a:r>
-              <a:rPr lang="ru-RU" b="0" i="0" dirty="0" err="1">
-                <a:effectLst/>
-                <a:latin typeface="fkGroteskNeue"/>
-              </a:rPr>
-              <a:t>Centrality</a:t>
-            </a:r>
-            <a:r>
-              <a:rPr lang="ru-RU" b="0" i="0" dirty="0">
-                <a:effectLst/>
-                <a:latin typeface="fkGroteskNeue"/>
-              </a:rPr>
-              <a:t>: ты важен, если соединён с другими важными узлами</a:t>
-            </a:r>
-          </a:p>
-          <a:p>
-            <a:pPr algn="l"/>
-            <a:r>
-              <a:rPr lang="ru-RU" b="0" i="0" dirty="0">
-                <a:effectLst/>
-                <a:latin typeface="fkGroteskNeue"/>
-              </a:rPr>
-              <a:t>Рекурсивное определение! "Вес узла зависит от весов соседей"</a:t>
-            </a:r>
-          </a:p>
-          <a:p>
-            <a:pPr algn="l"/>
-            <a:r>
-              <a:rPr lang="ru-RU" b="0" i="0" dirty="0">
-                <a:effectLst/>
-                <a:latin typeface="fkGroteskNeue"/>
-              </a:rPr>
-              <a:t>Это значит: </a:t>
-            </a:r>
-            <a:r>
-              <a:rPr lang="ru-RU" b="0" i="0" dirty="0" err="1">
-                <a:effectLst/>
-                <a:latin typeface="fkGroteskNeue"/>
-              </a:rPr>
-              <a:t>бытьсоединённым</a:t>
-            </a:r>
-            <a:r>
-              <a:rPr lang="ru-RU" b="0" i="0" dirty="0">
-                <a:effectLst/>
-                <a:latin typeface="fkGroteskNeue"/>
-              </a:rPr>
-              <a:t> с </a:t>
-            </a:r>
-            <a:r>
-              <a:rPr lang="ru-RU" b="0" i="0" dirty="0" err="1">
-                <a:effectLst/>
-                <a:latin typeface="fkGroteskNeue"/>
-              </a:rPr>
-              <a:t>hub'ом</a:t>
-            </a:r>
-            <a:r>
-              <a:rPr lang="ru-RU" b="0" i="0" dirty="0">
-                <a:effectLst/>
-                <a:latin typeface="fkGroteskNeue"/>
-              </a:rPr>
-              <a:t> → и тебя считают важным</a:t>
-            </a:r>
-          </a:p>
-          <a:p>
             <a:endParaRPr lang="ru-RU" sz="1200" b="0" i="0" kern="1200" dirty="0">
               <a:solidFill>
                 <a:schemeClr val="tx1"/>
@@ -10449,218 +2826,6 @@
           <a:bodyPr/>
           <a:lstStyle/>
           <a:p>
-            <a:pPr algn="l"/>
-            <a:r>
-              <a:rPr lang="ru-RU" b="0" i="0" dirty="0">
-                <a:effectLst/>
-                <a:latin typeface="fkGroteskNeue"/>
-              </a:rPr>
-              <a:t>Обнаружение модулей (</a:t>
-            </a:r>
-            <a:r>
-              <a:rPr lang="ru-RU" b="0" i="0" dirty="0" err="1">
-                <a:effectLst/>
-                <a:latin typeface="fkGroteskNeue"/>
-              </a:rPr>
-              <a:t>communities</a:t>
-            </a:r>
-            <a:r>
-              <a:rPr lang="ru-RU" b="0" i="0" dirty="0">
-                <a:effectLst/>
-                <a:latin typeface="fkGroteskNeue"/>
-              </a:rPr>
-              <a:t>):</a:t>
-            </a:r>
-          </a:p>
-          <a:p>
-            <a:pPr algn="l"/>
-            <a:r>
-              <a:rPr lang="ru-RU" b="0" i="0" dirty="0">
-                <a:effectLst/>
-                <a:latin typeface="fkGroteskNeue"/>
-              </a:rPr>
-              <a:t>Задача: найти группы генов, которые:</a:t>
-            </a:r>
-          </a:p>
-          <a:p>
-            <a:pPr algn="l">
-              <a:buFont typeface="+mj-lt"/>
-              <a:buAutoNum type="arabicPeriod"/>
-            </a:pPr>
-            <a:r>
-              <a:rPr lang="ru-RU" b="0" i="0" dirty="0">
-                <a:effectLst/>
-                <a:latin typeface="fkGroteskNeue"/>
-              </a:rPr>
-              <a:t>Сильно соединены между собой (внутри модуля)</a:t>
-            </a:r>
-          </a:p>
-          <a:p>
-            <a:pPr algn="l">
-              <a:buFont typeface="+mj-lt"/>
-              <a:buAutoNum type="arabicPeriod"/>
-            </a:pPr>
-            <a:r>
-              <a:rPr lang="ru-RU" b="0" i="0" dirty="0">
-                <a:effectLst/>
-                <a:latin typeface="fkGroteskNeue"/>
-              </a:rPr>
-              <a:t>Слабо соединены с другими группами</a:t>
-            </a:r>
-          </a:p>
-          <a:p>
-            <a:pPr algn="l"/>
-            <a:r>
-              <a:rPr lang="ru-RU" b="0" i="0" dirty="0">
-                <a:effectLst/>
-                <a:latin typeface="fkGroteskNeue"/>
-              </a:rPr>
-              <a:t>Пример:</a:t>
-            </a:r>
-          </a:p>
-          <a:p>
-            <a:r>
-              <a:rPr lang="ru-RU" sz="1200" b="0" i="0" kern="1200" dirty="0">
-                <a:solidFill>
-                  <a:schemeClr val="tx1"/>
-                </a:solidFill>
-                <a:latin typeface="+mn-lt"/>
-                <a:ea typeface="+mn-ea"/>
-                <a:cs typeface="+mn-cs"/>
-              </a:rPr>
-              <a:t>[Плотный кластер] ---- (слабое ребро) ---- [Другой кластер]</a:t>
-            </a:r>
-          </a:p>
-          <a:p>
-            <a:pPr algn="l"/>
-            <a:r>
-              <a:rPr lang="ru-RU" b="0" i="0" dirty="0">
-                <a:effectLst/>
-                <a:latin typeface="fkGroteskNeue"/>
-              </a:rPr>
-              <a:t>Модульность Q:</a:t>
-            </a:r>
-          </a:p>
-          <a:p>
-            <a:pPr algn="l"/>
-            <a:r>
-              <a:rPr lang="ru-RU" b="0" i="0" dirty="0">
-                <a:effectLst/>
-                <a:latin typeface="fkGroteskNeue"/>
-              </a:rPr>
-              <a:t>Метрика качества модульной структуры.</a:t>
-            </a:r>
-          </a:p>
-          <a:p>
-            <a:pPr algn="l"/>
-            <a:r>
-              <a:rPr lang="ru-RU" b="0" i="0" dirty="0">
-                <a:effectLst/>
-                <a:latin typeface="fkGroteskNeue"/>
-              </a:rPr>
-              <a:t>Q близко к 1 → отлично (явные модули)</a:t>
-            </a:r>
-            <a:br>
-              <a:rPr lang="ru-RU" b="0" i="0" dirty="0">
-                <a:effectLst/>
-                <a:latin typeface="fkGroteskNeue"/>
-              </a:rPr>
-            </a:br>
-            <a:r>
-              <a:rPr lang="ru-RU" b="0" i="0" dirty="0">
-                <a:effectLst/>
-                <a:latin typeface="fkGroteskNeue"/>
-              </a:rPr>
-              <a:t>Q близко к 0 → плохо (нет явной модульной структуры)</a:t>
-            </a:r>
-          </a:p>
-          <a:p>
-            <a:pPr algn="l"/>
-            <a:r>
-              <a:rPr lang="ru-RU" b="0" i="0" dirty="0">
-                <a:effectLst/>
-                <a:latin typeface="fkGroteskNeue"/>
-              </a:rPr>
-              <a:t>Алгоритм </a:t>
-            </a:r>
-            <a:r>
-              <a:rPr lang="ru-RU" b="0" i="0" dirty="0" err="1">
-                <a:effectLst/>
-                <a:latin typeface="fkGroteskNeue"/>
-              </a:rPr>
-              <a:t>Louvain</a:t>
-            </a:r>
-            <a:r>
-              <a:rPr lang="ru-RU" b="0" i="0" dirty="0">
-                <a:effectLst/>
-                <a:latin typeface="fkGroteskNeue"/>
-              </a:rPr>
-              <a:t> (самый популярный):</a:t>
-            </a:r>
-          </a:p>
-          <a:p>
-            <a:pPr algn="l">
-              <a:buFont typeface="+mj-lt"/>
-              <a:buAutoNum type="arabicPeriod"/>
-            </a:pPr>
-            <a:r>
-              <a:rPr lang="ru-RU" b="0" i="0" dirty="0">
-                <a:effectLst/>
-                <a:latin typeface="fkGroteskNeue"/>
-              </a:rPr>
-              <a:t>Каждый ген = отдельный модуль (n модулей = n генов)</a:t>
-            </a:r>
-          </a:p>
-          <a:p>
-            <a:pPr algn="l">
-              <a:buFont typeface="+mj-lt"/>
-              <a:buAutoNum type="arabicPeriod"/>
-            </a:pPr>
-            <a:r>
-              <a:rPr lang="ru-RU" b="0" i="0" dirty="0">
-                <a:effectLst/>
-                <a:latin typeface="fkGroteskNeue"/>
-              </a:rPr>
-              <a:t>Для каждого гена проверяем: если переместить в модуль соседа, возрастёт ли Q?</a:t>
-            </a:r>
-          </a:p>
-          <a:p>
-            <a:pPr algn="l">
-              <a:buFont typeface="+mj-lt"/>
-              <a:buAutoNum type="arabicPeriod"/>
-            </a:pPr>
-            <a:r>
-              <a:rPr lang="ru-RU" b="0" i="0" dirty="0">
-                <a:effectLst/>
-                <a:latin typeface="fkGroteskNeue"/>
-              </a:rPr>
-              <a:t>Если да → перемещаем</a:t>
-            </a:r>
-          </a:p>
-          <a:p>
-            <a:pPr algn="l">
-              <a:buFont typeface="+mj-lt"/>
-              <a:buAutoNum type="arabicPeriod"/>
-            </a:pPr>
-            <a:r>
-              <a:rPr lang="ru-RU" b="0" i="0" dirty="0">
-                <a:effectLst/>
-                <a:latin typeface="fkGroteskNeue"/>
-              </a:rPr>
-              <a:t>Повторяем, пока Q не стабилизируется</a:t>
-            </a:r>
-          </a:p>
-          <a:p>
-            <a:pPr algn="l"/>
-            <a:r>
-              <a:rPr lang="ru-RU" b="0" i="0" dirty="0">
-                <a:effectLst/>
-                <a:latin typeface="fkGroteskNeue"/>
-              </a:rPr>
-              <a:t>Результат: автоматически найденные 5-30 модулей!</a:t>
-            </a:r>
-          </a:p>
-          <a:p>
             <a:endParaRPr lang="ru-RU" sz="1200" b="0" i="0" kern="1200" dirty="0">
               <a:solidFill>
                 <a:schemeClr val="tx1"/>
@@ -10754,643 +2919,10 @@
           <a:lstStyle/>
           <a:p>
             <a:pPr algn="l"/>
-            <a:r>
-              <a:rPr lang="ru-RU" b="0" i="0" dirty="0">
-                <a:effectLst/>
-                <a:latin typeface="fkGroteskNeue"/>
-              </a:rPr>
-              <a:t>Теперь главный инструмент: </a:t>
-            </a:r>
-            <a:r>
-              <a:rPr lang="en-US" b="0" i="0" dirty="0">
-                <a:effectLst/>
-                <a:latin typeface="fkGroteskNeue"/>
-              </a:rPr>
-              <a:t>WGCNA (Weighted Gene Co-expression Network Analysis)</a:t>
-            </a:r>
-          </a:p>
-          <a:p>
-            <a:pPr algn="l"/>
-            <a:r>
-              <a:rPr lang="ru-RU" b="0" i="0" dirty="0">
-                <a:effectLst/>
-                <a:latin typeface="fkGroteskNeue"/>
-              </a:rPr>
-              <a:t>Разработано в 2008, </a:t>
-            </a:r>
-            <a:r>
-              <a:rPr lang="en-US" b="0" i="0" dirty="0">
-                <a:effectLst/>
-                <a:latin typeface="fkGroteskNeue"/>
-              </a:rPr>
-              <a:t>Horvath &amp; Langfelder, UCLA</a:t>
-            </a:r>
-          </a:p>
-          <a:p>
-            <a:pPr algn="l"/>
-            <a:r>
-              <a:rPr lang="ru-RU" b="0" i="0" dirty="0">
-                <a:effectLst/>
-                <a:latin typeface="fkGroteskNeue"/>
-              </a:rPr>
-              <a:t>Это стало золотым стандартом для сетевого анализа в биоинформатике.</a:t>
-            </a:r>
-          </a:p>
-          <a:p>
-            <a:pPr algn="l"/>
-            <a:r>
-              <a:rPr lang="ru-RU" b="0" i="0" dirty="0">
-                <a:effectLst/>
-                <a:latin typeface="fkGroteskNeue"/>
-              </a:rPr>
-              <a:t>Входные данные:</a:t>
-            </a:r>
-          </a:p>
-          <a:p>
-            <a:pPr algn="l"/>
-            <a:r>
-              <a:rPr lang="ru-RU" b="0" i="0" dirty="0">
-                <a:effectLst/>
-                <a:latin typeface="fkGroteskNeue"/>
-              </a:rPr>
-              <a:t>Матрица экспрессии генов.</a:t>
-            </a:r>
-          </a:p>
-          <a:p>
-            <a:pPr algn="l"/>
-            <a:r>
-              <a:rPr lang="ru-RU" b="0" i="0" dirty="0">
-                <a:effectLst/>
-                <a:latin typeface="fkGroteskNeue"/>
-              </a:rPr>
-              <a:t>Строки = гены (16,000)</a:t>
-            </a:r>
-            <a:br>
-              <a:rPr lang="ru-RU" b="0" i="0" dirty="0">
-                <a:effectLst/>
-                <a:latin typeface="fkGroteskNeue"/>
-              </a:rPr>
-            </a:br>
-            <a:r>
-              <a:rPr lang="ru-RU" b="0" i="0" dirty="0">
-                <a:effectLst/>
-                <a:latin typeface="fkGroteskNeue"/>
-              </a:rPr>
-              <a:t>Столбцы = пациенты (500)</a:t>
-            </a:r>
-            <a:br>
-              <a:rPr lang="ru-RU" b="0" i="0" dirty="0">
-                <a:effectLst/>
-                <a:latin typeface="fkGroteskNeue"/>
-              </a:rPr>
-            </a:br>
-            <a:r>
-              <a:rPr lang="ru-RU" b="0" i="0" dirty="0">
-                <a:effectLst/>
-                <a:latin typeface="fkGroteskNeue"/>
-              </a:rPr>
-              <a:t>Каждая ячейка = экспрессия (уровень мРНК)</a:t>
-            </a:r>
-          </a:p>
-          <a:p>
-            <a:pPr algn="l"/>
-            <a:r>
-              <a:rPr lang="ru-RU" b="0" i="0" dirty="0">
-                <a:effectLst/>
-                <a:latin typeface="fkGroteskNeue"/>
-              </a:rPr>
-              <a:t>Данные могут быть из:</a:t>
-            </a:r>
-          </a:p>
-          <a:p>
-            <a:pPr algn="l">
-              <a:buFont typeface="Arial" panose="020B0604020202020204" pitchFamily="34" charset="0"/>
-              <a:buChar char="•"/>
-            </a:pPr>
-            <a:r>
-              <a:rPr lang="ru-RU" b="0" i="0" dirty="0">
-                <a:effectLst/>
-                <a:latin typeface="fkGroteskNeue"/>
-              </a:rPr>
-              <a:t>RNA-</a:t>
-            </a:r>
-            <a:r>
-              <a:rPr lang="ru-RU" b="0" i="0" dirty="0" err="1">
-                <a:effectLst/>
-                <a:latin typeface="fkGroteskNeue"/>
-              </a:rPr>
-              <a:t>seq</a:t>
-            </a:r>
-            <a:r>
-              <a:rPr lang="ru-RU" b="0" i="0" dirty="0">
-                <a:effectLst/>
-                <a:latin typeface="fkGroteskNeue"/>
-              </a:rPr>
-              <a:t> (счёты </a:t>
-            </a:r>
-            <a:r>
-              <a:rPr lang="ru-RU" b="0" i="0" dirty="0" err="1">
-                <a:effectLst/>
-                <a:latin typeface="fkGroteskNeue"/>
-              </a:rPr>
-              <a:t>прочитаний</a:t>
-            </a:r>
-            <a:r>
-              <a:rPr lang="ru-RU" b="0" i="0" dirty="0">
-                <a:effectLst/>
-                <a:latin typeface="fkGroteskNeue"/>
-              </a:rPr>
-              <a:t>)</a:t>
-            </a:r>
-          </a:p>
-          <a:p>
-            <a:pPr algn="l">
-              <a:buFont typeface="Arial" panose="020B0604020202020204" pitchFamily="34" charset="0"/>
-              <a:buChar char="•"/>
-            </a:pPr>
-            <a:r>
-              <a:rPr lang="ru-RU" b="0" i="0" dirty="0" err="1">
-                <a:effectLst/>
-                <a:latin typeface="fkGroteskNeue"/>
-              </a:rPr>
-              <a:t>Microarray</a:t>
-            </a:r>
-            <a:r>
-              <a:rPr lang="ru-RU" b="0" i="0" dirty="0">
-                <a:effectLst/>
-                <a:latin typeface="fkGroteskNeue"/>
-              </a:rPr>
-              <a:t> (интенсивность флуоресценции)</a:t>
-            </a:r>
-          </a:p>
-          <a:p>
-            <a:pPr algn="l"/>
-            <a:r>
-              <a:rPr lang="ru-RU" b="0" i="0" dirty="0">
-                <a:effectLst/>
-                <a:latin typeface="fkGroteskNeue"/>
-              </a:rPr>
-              <a:t>Шаг 1: Корреляция</a:t>
-            </a:r>
-          </a:p>
-          <a:p>
-            <a:pPr algn="l"/>
-            <a:r>
-              <a:rPr lang="ru-RU" b="0" i="0" dirty="0">
-                <a:effectLst/>
-                <a:latin typeface="fkGroteskNeue"/>
-              </a:rPr>
-              <a:t>Берём каждую пару генов и считаем корреляцию Пирсона по 500 пациентам.</a:t>
-            </a:r>
-          </a:p>
-          <a:p>
-            <a:pPr algn="l"/>
-            <a:r>
-              <a:rPr lang="ru-RU" b="0" i="0" dirty="0">
-                <a:effectLst/>
-                <a:latin typeface="fkGroteskNeue"/>
-              </a:rPr>
-              <a:t>Результат: матрица корреляций 16,000 × 16,000</a:t>
-            </a:r>
-          </a:p>
-          <a:p>
-            <a:pPr algn="l"/>
-            <a:r>
-              <a:rPr lang="ru-RU" b="0" i="0" dirty="0" err="1">
-                <a:effectLst/>
-                <a:latin typeface="fkGroteskNeue"/>
-              </a:rPr>
-              <a:t>r_ij</a:t>
-            </a:r>
-            <a:r>
-              <a:rPr lang="ru-RU" b="0" i="0" dirty="0">
-                <a:effectLst/>
-                <a:latin typeface="fkGroteskNeue"/>
-              </a:rPr>
-              <a:t> = 0.9 → сильная корреляция (гены работают вместе!)</a:t>
-            </a:r>
-            <a:br>
-              <a:rPr lang="ru-RU" b="0" i="0" dirty="0">
-                <a:effectLst/>
-                <a:latin typeface="fkGroteskNeue"/>
-              </a:rPr>
-            </a:br>
-            <a:r>
-              <a:rPr lang="ru-RU" b="0" i="0" dirty="0" err="1">
-                <a:effectLst/>
-                <a:latin typeface="fkGroteskNeue"/>
-              </a:rPr>
-              <a:t>r_ij</a:t>
-            </a:r>
-            <a:r>
-              <a:rPr lang="ru-RU" b="0" i="0" dirty="0">
-                <a:effectLst/>
-                <a:latin typeface="fkGroteskNeue"/>
-              </a:rPr>
-              <a:t> = 0.1 → слабая корреляция (независимы)</a:t>
-            </a:r>
-          </a:p>
-          <a:p>
-            <a:pPr algn="l"/>
-            <a:r>
-              <a:rPr lang="ru-RU" b="0" i="0" dirty="0">
-                <a:effectLst/>
-                <a:latin typeface="fkGroteskNeue"/>
-              </a:rPr>
-              <a:t>Шаг 2: Soft-</a:t>
-            </a:r>
-            <a:r>
-              <a:rPr lang="ru-RU" b="0" i="0" dirty="0" err="1">
-                <a:effectLst/>
-                <a:latin typeface="fkGroteskNeue"/>
-              </a:rPr>
-              <a:t>thresholding</a:t>
-            </a:r>
-            <a:r>
-              <a:rPr lang="ru-RU" b="0" i="0" dirty="0">
-                <a:effectLst/>
-                <a:latin typeface="fkGroteskNeue"/>
-              </a:rPr>
-              <a:t> (мягкий порог)</a:t>
-            </a:r>
-          </a:p>
-          <a:p>
-            <a:pPr algn="l"/>
-            <a:r>
-              <a:rPr lang="ru-RU" b="0" i="0" dirty="0">
-                <a:effectLst/>
-                <a:latin typeface="fkGroteskNeue"/>
-              </a:rPr>
-              <a:t>Проблема: если использовать корреляцию напрямую, много шума.</a:t>
-            </a:r>
-          </a:p>
-          <a:p>
-            <a:pPr algn="l"/>
-            <a:r>
-              <a:rPr lang="ru-RU" b="0" i="0" dirty="0">
-                <a:effectLst/>
-                <a:latin typeface="fkGroteskNeue"/>
-              </a:rPr>
-              <a:t>r = 0.3 — это много или мало?</a:t>
-            </a:r>
-          </a:p>
-          <a:p>
-            <a:pPr algn="l"/>
-            <a:r>
-              <a:rPr lang="ru-RU" b="0" i="0" dirty="0">
-                <a:effectLst/>
-                <a:latin typeface="fkGroteskNeue"/>
-              </a:rPr>
-              <a:t>Решение: возвести в степень.</a:t>
-            </a:r>
-          </a:p>
-          <a:p>
-            <a:pPr algn="l"/>
-            <a:r>
-              <a:rPr lang="ru-RU" b="0" i="0" dirty="0">
-                <a:effectLst/>
-                <a:latin typeface="fkGroteskNeue"/>
-              </a:rPr>
-              <a:t>где β = "</a:t>
-            </a:r>
-            <a:r>
-              <a:rPr lang="ru-RU" b="0" i="0" dirty="0" err="1">
-                <a:effectLst/>
-                <a:latin typeface="fkGroteskNeue"/>
-              </a:rPr>
-              <a:t>softness</a:t>
-            </a:r>
-            <a:r>
-              <a:rPr lang="ru-RU" b="0" i="0" dirty="0">
-                <a:effectLst/>
-                <a:latin typeface="fkGroteskNeue"/>
-              </a:rPr>
-              <a:t>" (обычно 12 для людей)</a:t>
-            </a:r>
-          </a:p>
-          <a:p>
-            <a:pPr algn="l"/>
-            <a:r>
-              <a:rPr lang="ru-RU" b="0" i="0" dirty="0">
-                <a:effectLst/>
-                <a:latin typeface="fkGroteskNeue"/>
-              </a:rPr>
-              <a:t>Эффект:</a:t>
-            </a:r>
-          </a:p>
-          <a:p>
-            <a:pPr algn="l"/>
-            <a:r>
-              <a:rPr lang="ru-RU" b="0" i="0" dirty="0">
-                <a:effectLst/>
-                <a:latin typeface="fkGroteskNeue"/>
-              </a:rPr>
-              <a:t>Эффект: слабые корреляции → ещё </a:t>
-            </a:r>
-            <a:r>
-              <a:rPr lang="ru-RU" b="0" i="0" dirty="0" err="1">
-                <a:effectLst/>
-                <a:latin typeface="fkGroteskNeue"/>
-              </a:rPr>
-              <a:t>слабже</a:t>
-            </a:r>
-            <a:r>
-              <a:rPr lang="ru-RU" b="0" i="0" dirty="0">
-                <a:effectLst/>
-                <a:latin typeface="fkGroteskNeue"/>
-              </a:rPr>
-              <a:t> (практически удаляются), сильные → остаются</a:t>
-            </a:r>
-          </a:p>
-          <a:p>
-            <a:pPr algn="l"/>
-            <a:r>
-              <a:rPr lang="ru-RU" b="0" i="0" dirty="0">
-                <a:effectLst/>
-                <a:latin typeface="fkGroteskNeue"/>
-              </a:rPr>
-              <a:t>Это "мягче" чем просто </a:t>
-            </a:r>
-            <a:r>
-              <a:rPr lang="ru-RU" b="0" i="0" dirty="0" err="1">
-                <a:effectLst/>
-                <a:latin typeface="fkGroteskNeue"/>
-              </a:rPr>
-              <a:t>threshold</a:t>
-            </a:r>
-            <a:r>
-              <a:rPr lang="ru-RU" b="0" i="0" dirty="0">
-                <a:effectLst/>
-                <a:latin typeface="fkGroteskNeue"/>
-              </a:rPr>
-              <a:t> (w &gt; 0.5 → удаляем все w &lt; 0.5, </a:t>
-            </a:r>
-            <a:r>
-              <a:rPr lang="ru-RU" b="0" i="0" dirty="0" err="1">
-                <a:effectLst/>
-                <a:latin typeface="fkGroteskNeue"/>
-              </a:rPr>
-              <a:t>бинарно</a:t>
-            </a:r>
-            <a:r>
-              <a:rPr lang="ru-RU" b="0" i="0" dirty="0">
-                <a:effectLst/>
-                <a:latin typeface="fkGroteskNeue"/>
-              </a:rPr>
-              <a:t>)</a:t>
-            </a:r>
-          </a:p>
-          <a:p>
-            <a:pPr algn="l"/>
-            <a:r>
-              <a:rPr lang="ru-RU" b="0" i="0" dirty="0">
-                <a:effectLst/>
-                <a:latin typeface="fkGroteskNeue"/>
-              </a:rPr>
-              <a:t>Название "</a:t>
-            </a:r>
-            <a:r>
-              <a:rPr lang="ru-RU" b="0" i="0" dirty="0" err="1">
-                <a:effectLst/>
-                <a:latin typeface="fkGroteskNeue"/>
-              </a:rPr>
-              <a:t>soft</a:t>
-            </a:r>
-            <a:r>
-              <a:rPr lang="ru-RU" b="0" i="0" dirty="0">
-                <a:effectLst/>
-                <a:latin typeface="fkGroteskNeue"/>
-              </a:rPr>
-              <a:t>" потому что это не бинарное, а градуальное снижение</a:t>
-            </a:r>
-          </a:p>
-          <a:p>
-            <a:pPr algn="l"/>
-            <a:r>
-              <a:rPr lang="ru-RU" b="0" i="0" dirty="0">
-                <a:effectLst/>
-                <a:latin typeface="fkGroteskNeue"/>
-              </a:rPr>
-              <a:t>Как выбрать β?</a:t>
-            </a:r>
-          </a:p>
-          <a:p>
-            <a:pPr algn="l"/>
-            <a:r>
-              <a:rPr lang="ru-RU" b="0" i="0" dirty="0">
-                <a:effectLst/>
-                <a:latin typeface="fkGroteskNeue"/>
-              </a:rPr>
-              <a:t>Используется масштабность (</a:t>
-            </a:r>
-            <a:r>
-              <a:rPr lang="ru-RU" b="0" i="0" dirty="0" err="1">
-                <a:effectLst/>
-                <a:latin typeface="fkGroteskNeue"/>
-              </a:rPr>
-              <a:t>scale-free</a:t>
-            </a:r>
-            <a:r>
-              <a:rPr lang="ru-RU" b="0" i="0" dirty="0">
-                <a:effectLst/>
-                <a:latin typeface="fkGroteskNeue"/>
-              </a:rPr>
-              <a:t> </a:t>
-            </a:r>
-            <a:r>
-              <a:rPr lang="ru-RU" b="0" i="0" dirty="0" err="1">
-                <a:effectLst/>
-                <a:latin typeface="fkGroteskNeue"/>
-              </a:rPr>
-              <a:t>topology</a:t>
-            </a:r>
-            <a:r>
-              <a:rPr lang="ru-RU" b="0" i="0" dirty="0">
-                <a:effectLst/>
-                <a:latin typeface="fkGroteskNeue"/>
-              </a:rPr>
-              <a:t>).</a:t>
-            </a:r>
-          </a:p>
-          <a:p>
-            <a:pPr algn="l"/>
-            <a:r>
-              <a:rPr lang="ru-RU" b="0" i="0" dirty="0">
-                <a:effectLst/>
-                <a:latin typeface="fkGroteskNeue"/>
-              </a:rPr>
-              <a:t>Идея: в биологических сетях обычно есть </a:t>
-            </a:r>
-            <a:r>
-              <a:rPr lang="ru-RU" b="0" i="0" dirty="0" err="1">
-                <a:effectLst/>
-                <a:latin typeface="fkGroteskNeue"/>
-              </a:rPr>
-              <a:t>few</a:t>
-            </a:r>
-            <a:r>
-              <a:rPr lang="ru-RU" b="0" i="0" dirty="0">
-                <a:effectLst/>
-                <a:latin typeface="fkGroteskNeue"/>
-              </a:rPr>
-              <a:t> </a:t>
-            </a:r>
-            <a:r>
-              <a:rPr lang="ru-RU" b="0" i="0" dirty="0" err="1">
-                <a:effectLst/>
-                <a:latin typeface="fkGroteskNeue"/>
-              </a:rPr>
-              <a:t>hub</a:t>
-            </a:r>
-            <a:r>
-              <a:rPr lang="ru-RU" b="0" i="0" dirty="0">
-                <a:effectLst/>
-                <a:latin typeface="fkGroteskNeue"/>
-              </a:rPr>
-              <a:t> </a:t>
-            </a:r>
-            <a:r>
-              <a:rPr lang="ru-RU" b="0" i="0" dirty="0" err="1">
-                <a:effectLst/>
-                <a:latin typeface="fkGroteskNeue"/>
-              </a:rPr>
-              <a:t>nodes</a:t>
-            </a:r>
-            <a:r>
-              <a:rPr lang="ru-RU" b="0" i="0" dirty="0">
-                <a:effectLst/>
-                <a:latin typeface="fkGroteskNeue"/>
-              </a:rPr>
-              <a:t> и </a:t>
-            </a:r>
-            <a:r>
-              <a:rPr lang="ru-RU" b="0" i="0" dirty="0" err="1">
-                <a:effectLst/>
-                <a:latin typeface="fkGroteskNeue"/>
-              </a:rPr>
-              <a:t>many</a:t>
-            </a:r>
-            <a:r>
-              <a:rPr lang="ru-RU" b="0" i="0" dirty="0">
-                <a:effectLst/>
-                <a:latin typeface="fkGroteskNeue"/>
-              </a:rPr>
-              <a:t> </a:t>
-            </a:r>
-            <a:r>
-              <a:rPr lang="ru-RU" b="0" i="0" dirty="0" err="1">
-                <a:effectLst/>
-                <a:latin typeface="fkGroteskNeue"/>
-              </a:rPr>
-              <a:t>peripheral</a:t>
-            </a:r>
-            <a:r>
-              <a:rPr lang="ru-RU" b="0" i="0" dirty="0">
-                <a:effectLst/>
-                <a:latin typeface="fkGroteskNeue"/>
-              </a:rPr>
-              <a:t> </a:t>
-            </a:r>
-            <a:r>
-              <a:rPr lang="ru-RU" b="0" i="0" dirty="0" err="1">
-                <a:effectLst/>
-                <a:latin typeface="fkGroteskNeue"/>
-              </a:rPr>
-              <a:t>nodes</a:t>
-            </a:r>
-            <a:r>
-              <a:rPr lang="ru-RU" b="0" i="0" dirty="0">
-                <a:effectLst/>
-                <a:latin typeface="fkGroteskNeue"/>
-              </a:rPr>
-              <a:t>.</a:t>
-            </a:r>
-          </a:p>
-          <a:p>
-            <a:pPr algn="l"/>
-            <a:r>
-              <a:rPr lang="ru-RU" b="0" i="0" dirty="0">
-                <a:effectLst/>
-                <a:latin typeface="fkGroteskNeue"/>
-              </a:rPr>
-              <a:t>Распределение степеней = </a:t>
-            </a:r>
-            <a:r>
-              <a:rPr lang="ru-RU" b="0" i="0" dirty="0" err="1">
-                <a:effectLst/>
-                <a:latin typeface="fkGroteskNeue"/>
-              </a:rPr>
-              <a:t>power-law</a:t>
-            </a:r>
-            <a:r>
-              <a:rPr lang="ru-RU" b="0" i="0" dirty="0">
-                <a:effectLst/>
-                <a:latin typeface="fkGroteskNeue"/>
-              </a:rPr>
-              <a:t> </a:t>
-            </a:r>
-            <a:r>
-              <a:rPr lang="ru-RU" b="0" i="0" dirty="0" err="1">
-                <a:effectLst/>
-                <a:latin typeface="fkGroteskNeue"/>
-              </a:rPr>
-              <a:t>distribution</a:t>
-            </a:r>
-            <a:r>
-              <a:rPr lang="ru-RU" b="0" i="0" dirty="0">
-                <a:effectLst/>
-                <a:latin typeface="fkGroteskNeue"/>
-              </a:rPr>
-              <a:t>.</a:t>
-            </a:r>
-          </a:p>
-          <a:p>
-            <a:pPr algn="l"/>
-            <a:r>
-              <a:rPr lang="ru-RU" b="0" i="0" dirty="0">
-                <a:effectLst/>
-                <a:latin typeface="fkGroteskNeue"/>
-              </a:rPr>
-              <a:t>Функция </a:t>
-            </a:r>
-            <a:r>
-              <a:rPr lang="ru-RU" b="0" i="0" dirty="0" err="1">
-                <a:effectLst/>
-                <a:latin typeface="fkGroteskNeue"/>
-              </a:rPr>
-              <a:t>pickSoftThreshold</a:t>
-            </a:r>
-            <a:r>
-              <a:rPr lang="ru-RU" b="0" i="0" dirty="0">
-                <a:effectLst/>
-                <a:latin typeface="fkGroteskNeue"/>
-              </a:rPr>
-              <a:t>() в R ищет β такую, что сеть наиболее приближается к </a:t>
-            </a:r>
-            <a:r>
-              <a:rPr lang="ru-RU" b="0" i="0" dirty="0" err="1">
-                <a:effectLst/>
-                <a:latin typeface="fkGroteskNeue"/>
-              </a:rPr>
-              <a:t>scale-free</a:t>
-            </a:r>
-            <a:r>
-              <a:rPr lang="ru-RU" b="0" i="0" dirty="0">
-                <a:effectLst/>
-                <a:latin typeface="fkGroteskNeue"/>
-              </a:rPr>
-              <a:t>.</a:t>
-            </a:r>
-          </a:p>
-          <a:p>
-            <a:pPr algn="l"/>
-            <a:r>
-              <a:rPr lang="ru-RU" b="0" i="0" dirty="0">
-                <a:effectLst/>
-                <a:latin typeface="fkGroteskNeue"/>
-              </a:rPr>
-              <a:t>Обычно β = 10-15</a:t>
-            </a:r>
+            <a:endParaRPr lang="ru-RU" b="0" i="0" dirty="0">
+              <a:effectLst/>
+              <a:latin typeface="fkGroteskNeue"/>
+            </a:endParaRPr>
           </a:p>
         </p:txBody>
       </p:sp>
